--- a/docs/MiniC编译器_答辩演示.pptx
+++ b/docs/MiniC编译器_答辩演示.pptx
@@ -3491,7 +3491,7 @@
                 </a:solidFill>
                 <a:latin typeface="微软雅黑"/>
               </a:rPr>
-              <a:t>10 个源文件 6,940 行 C++17  ·  103 个用例  ·  11 套回归全绿  ·  432 例随机差分零不一致</a:t>
+              <a:t>10 个源文件 6,940 行 C++17  ·  103 个用例  ·  11 套回归全绿  ·  912 例随机差分零不一致</a:t>
             </a:r>
           </a:p>
         </p:txBody>
@@ -7844,7 +7844,7 @@
                 </a:solidFill>
                 <a:latin typeface="微软雅黑"/>
               </a:rPr>
-              <a:t>用独立参考实现反查：432 例随机表达式，零不一致</a:t>
+              <a:t>两组独立基准反查：912 例，零不一致</a:t>
             </a:r>
           </a:p>
         </p:txBody>
@@ -7927,7 +7927,7 @@
                 </a:solidFill>
                 <a:latin typeface="微软雅黑"/>
               </a:rPr>
-              <a:t>方法</a:t>
+              <a:t>两组基准，互相补位</a:t>
             </a:r>
           </a:p>
         </p:txBody>
@@ -8010,7 +8010,7 @@
                 </a:solidFill>
                 <a:latin typeface="微软雅黑"/>
               </a:rPr>
-              <a:t>随机生成表达式树</a:t>
+              <a:t>基准一：gcc</a:t>
             </a:r>
           </a:p>
         </p:txBody>
@@ -8049,7 +8049,7 @@
                 </a:solidFill>
                 <a:latin typeface="微软雅黑"/>
               </a:rPr>
-              <a:t>深度 4，覆盖 + - * / 与括号、int 与 float 两套类型</a:t>
+              <a:t>同一逻辑写 .mc 与 .c 两份，各走自己的编译器，逐行比对 stdout</a:t>
             </a:r>
           </a:p>
         </p:txBody>
@@ -8132,7 +8132,7 @@
                 </a:solidFill>
                 <a:latin typeface="微软雅黑"/>
               </a:rPr>
-              <a:t>Python 独立求值</a:t>
+              <a:t>基准二：Python 求值器</a:t>
             </a:r>
           </a:p>
         </p:txBody>
@@ -8171,7 +8171,7 @@
                 </a:solidFill>
                 <a:latin typeface="微软雅黑"/>
               </a:rPr>
-              <a:t>另写一份参考求值器，不共享编译器任何代码</a:t>
+              <a:t>随机表达式树深度 4，另写参考求值器，不共享编译器任何代码</a:t>
             </a:r>
           </a:p>
         </p:txBody>
@@ -8254,7 +8254,7 @@
                 </a:solidFill>
                 <a:latin typeface="微软雅黑"/>
               </a:rPr>
-              <a:t>比对运行输出</a:t>
+              <a:t>为什么两组</a:t>
             </a:r>
           </a:p>
         </p:txBody>
@@ -8293,7 +8293,7 @@
                 </a:solidFill>
                 <a:latin typeface="微软雅黑"/>
               </a:rPr>
-              <a:t>编译 → 汇编 → 链接 → 运行，stdout 与参考值逐字对照</a:t>
+              <a:t>gcc 覆盖函数/递归/数组；Python 覆盖优先级与类型转换，单组都有盲区</a:t>
             </a:r>
           </a:p>
         </p:txBody>
@@ -8500,7 +8500,7 @@
                 </a:solidFill>
                 <a:latin typeface="微软雅黑"/>
               </a:rPr>
-              <a:t>207</a:t>
+              <a:t>480</a:t>
             </a:r>
           </a:p>
         </p:txBody>
@@ -8539,7 +8539,7 @@
                 </a:solidFill>
                 <a:latin typeface="微软雅黑"/>
               </a:rPr>
-              <a:t>int 有效用例</a:t>
+              <a:t>例 gcc 基准</a:t>
             </a:r>
           </a:p>
           <a:p>
@@ -8640,7 +8640,7 @@
                 </a:solidFill>
                 <a:latin typeface="微软雅黑"/>
               </a:rPr>
-              <a:t>225</a:t>
+              <a:t>432</a:t>
             </a:r>
           </a:p>
         </p:txBody>
@@ -8679,7 +8679,7 @@
                 </a:solidFill>
                 <a:latin typeface="微软雅黑"/>
               </a:rPr>
-              <a:t>float 有效用例</a:t>
+              <a:t>例 Python 基准</a:t>
             </a:r>
           </a:p>
           <a:p>
@@ -8695,7 +8695,7 @@
                 </a:solidFill>
                 <a:latin typeface="微软雅黑"/>
               </a:rPr>
-              <a:t>0 不一致</a:t>
+              <a:t>207 int + 225 float</a:t>
             </a:r>
           </a:p>
         </p:txBody>
@@ -8734,7 +8734,7 @@
                 </a:solidFill>
                 <a:latin typeface="微软雅黑"/>
               </a:rPr>
-              <a:t>还验证了什么</a:t>
+              <a:t>边界场景也覆盖了</a:t>
             </a:r>
           </a:p>
         </p:txBody>
@@ -8939,7 +8939,7 @@
                 </a:solidFill>
                 <a:latin typeface="微软雅黑"/>
               </a:rPr>
-              <a:t>汇编确定性</a:t>
+              <a:t>深递归与规模</a:t>
             </a:r>
           </a:p>
         </p:txBody>
@@ -8978,7 +8978,7 @@
                 </a:solidFill>
                 <a:latin typeface="微软雅黑"/>
               </a:rPr>
-              <a:t>同一份源码两次编译，.asm 的 SHA256 完全一致</a:t>
+              <a:t>20 000 层递归、100 个函数、50 层括号、5 000 元素局部数组</a:t>
             </a:r>
           </a:p>
         </p:txBody>
@@ -9061,7 +9061,7 @@
                 </a:solidFill>
                 <a:latin typeface="微软雅黑"/>
               </a:rPr>
-              <a:t>栈对齐</a:t>
+              <a:t>汇编确定性</a:t>
             </a:r>
           </a:p>
         </p:txBody>
@@ -9100,7 +9100,7 @@
                 </a:solidFill>
                 <a:latin typeface="微软雅黑"/>
               </a:rPr>
-              <a:t>16 字节对齐，否则 printf 变参调用会崩</a:t>
+              <a:t>同一份源码两次编译，.asm 的 SHA256 完全一致</a:t>
             </a:r>
           </a:p>
         </p:txBody>
@@ -9222,7 +9222,7 @@
                 </a:solidFill>
                 <a:latin typeface="微软雅黑"/>
               </a:rPr>
-              <a:t>5 种退出码情形逐一实测：正常 0、无参 1、词法错 1、文件不存在 1、未知选项 1</a:t>
+              <a:t>5 种退出码：正常 0、无参 1、词法错 1、文件不存在 1、未知选项 1</a:t>
             </a:r>
           </a:p>
         </p:txBody>
@@ -15848,7 +15848,7 @@
                 </a:solidFill>
                 <a:latin typeface="微软雅黑"/>
               </a:rPr>
-              <a:t>432</a:t>
+              <a:t>912</a:t>
             </a:r>
           </a:p>
         </p:txBody>
@@ -15887,7 +15887,7 @@
                 </a:solidFill>
                 <a:latin typeface="微软雅黑"/>
               </a:rPr>
-              <a:t>例随机差分验证</a:t>
+              <a:t>例差分验证</a:t>
             </a:r>
           </a:p>
           <a:p>
@@ -15903,7 +15903,7 @@
                 </a:solidFill>
                 <a:latin typeface="微软雅黑"/>
               </a:rPr>
-              <a:t>与独立参考求值器</a:t>
+              <a:t>两组独立基准</a:t>
             </a:r>
           </a:p>
         </p:txBody>
@@ -27719,7 +27719,7 @@
                 </a:solidFill>
                 <a:latin typeface="微软雅黑"/>
               </a:rPr>
-              <a:t>432 例随机差分</a:t>
+              <a:t>912 例两组差分</a:t>
             </a:r>
           </a:p>
         </p:txBody>
@@ -27758,7 +27758,7 @@
                 </a:solidFill>
                 <a:latin typeface="微软雅黑"/>
               </a:rPr>
-              <a:t>随机生成表达式，用 Python 写独立参考求值器对照，0 不一致（除零跳过）</a:t>
+              <a:t>gcc 编译等价 C 版对照 480 例 + Python 独立求值器 432 例，0 不一致</a:t>
             </a:r>
           </a:p>
         </p:txBody>

--- a/docs/MiniC编译器_答辩演示.pptx
+++ b/docs/MiniC编译器_答辩演示.pptx
@@ -3491,7 +3491,7 @@
                 </a:solidFill>
                 <a:latin typeface="微软雅黑"/>
               </a:rPr>
-              <a:t>10 个源文件 6,940 行 C++17  ·  103 个用例  ·  11 套回归全绿  ·  912 例随机差分零不一致</a:t>
+              <a:t>10 个源文件 6,940 行 C++17  ·  111 个用例  ·  11 套回归全绿  ·  912 例随机差分零不一致</a:t>
             </a:r>
           </a:p>
         </p:txBody>
@@ -3530,7 +3530,7 @@
                 </a:solidFill>
                 <a:latin typeface="微软雅黑"/>
               </a:rPr>
-              <a:t>2026-10-24</a:t>
+              <a:t>2026-10-27</a:t>
             </a:r>
           </a:p>
         </p:txBody>
@@ -6260,7 +6260,7 @@
                 </a:solidFill>
                 <a:latin typeface="微软雅黑"/>
               </a:rPr>
-              <a:t>43 例</a:t>
+              <a:t>49 例</a:t>
             </a:r>
           </a:p>
         </p:txBody>
@@ -7295,7 +7295,7 @@
                 </a:solidFill>
                 <a:latin typeface="微软雅黑"/>
               </a:rPr>
-              <a:t>14 例</a:t>
+              <a:t>15 例</a:t>
             </a:r>
           </a:p>
         </p:txBody>
@@ -7502,7 +7502,7 @@
                 </a:solidFill>
                 <a:latin typeface="微软雅黑"/>
               </a:rPr>
-              <a:t>25 例</a:t>
+              <a:t>26 例</a:t>
             </a:r>
           </a:p>
         </p:txBody>
@@ -7626,7 +7626,7 @@
                 </a:solidFill>
                 <a:latin typeface="微软雅黑"/>
               </a:rPr>
-              <a:t>+ 2 套 GUI 冒烟（book-smoke 54 条断言 / sample-smoke 7 条）  →  合计 11 套，ALL TEST SUITES PASSED，exit 0</a:t>
+              <a:t>+ 2 套 GUI 冒烟（book-smoke 55 条断言 / sample-smoke 22 条）  →  合计 11 套，ALL TEST SUITES PASSED，exit 0</a:t>
             </a:r>
           </a:p>
         </p:txBody>
@@ -15664,7 +15664,7 @@
                 </a:solidFill>
                 <a:latin typeface="微软雅黑"/>
               </a:rPr>
-              <a:t>103</a:t>
+              <a:t>111</a:t>
             </a:r>
           </a:p>
         </p:txBody>
@@ -18510,7 +18510,7 @@
                 </a:solidFill>
                 <a:latin typeface="微软雅黑"/>
               </a:rPr>
-              <a:t>门禁：g_ErrorList 非空即 stderr 报错、exit 1；前一段有错则后一段不执行 —— 不会拿残缺 AST 生成脏四元式</a:t>
+              <a:t>门禁：语法/语义错都继续往下收集、最后统一 stderr 报错并 exit 1；只有目标代码保持门禁 —— 不拿残缺 AST 生成脏汇编</a:t>
             </a:r>
           </a:p>
         </p:txBody>
@@ -18671,7 +18671,7 @@
                 </a:solidFill>
                 <a:latin typeface="微软雅黑"/>
               </a:rPr>
-              <a:t>92 条产生式 + 预测分析表驱动，不是手写递归下降</a:t>
+              <a:t>102 条产生式 + 预测分析表驱动，不是手写递归下降</a:t>
             </a:r>
           </a:p>
         </p:txBody>
@@ -19720,7 +19720,7 @@
                 </a:solidFill>
                 <a:latin typeface="微软雅黑"/>
               </a:rPr>
-              <a:t>001~005 为类型关键字，031~044 为运算符，051 标识符，099 EOF</a:t>
+              <a:t>001~005 为类型关键字，031~046 为运算符，051 标识符，099 EOF</a:t>
             </a:r>
           </a:p>
         </p:txBody>
@@ -19842,7 +19842,7 @@
                 </a:solidFill>
                 <a:latin typeface="微软雅黑"/>
               </a:rPr>
-              <a:t>== != &lt;= &gt;= &amp;&amp; || 先试两字符，失败再退回单字符</a:t>
+              <a:t>== != &lt;= &gt;= &amp;&amp; || ++ -- 先试两字符，失败再退回单字符</a:t>
             </a:r>
           </a:p>
         </p:txBody>
@@ -20930,7 +20930,7 @@
                 </a:solidFill>
                 <a:latin typeface="微软雅黑"/>
               </a:rPr>
-              <a:t>92 条产生式的 LL(1) 预测分析表，全程无回溯</a:t>
+              <a:t>102 条产生式的 LL(1) 预测分析表，全程无回溯</a:t>
             </a:r>
           </a:p>
         </p:txBody>
@@ -21648,7 +21648,7 @@
                 </a:solidFill>
                 <a:latin typeface="Consolas"/>
               </a:rPr>
-              <a:t>// 产生式 92 条 / 分析步骤 66 / 结果 接受</a:t>
+              <a:t>// 产生式 102 条 / 分析步骤 66 / 结果 接受</a:t>
             </a:r>
           </a:p>
           <a:p>

--- a/docs/MiniC编译器_答辩演示.pptx
+++ b/docs/MiniC编译器_答辩演示.pptx
@@ -12866,7 +12866,7 @@
                 </a:solidFill>
                 <a:latin typeface="微软雅黑"/>
               </a:rPr>
-              <a:t>不支持 ++ -- += %  ?:  等运算符</a:t>
+              <a:t>不支持 += %  ?:  等运算符（++ -- 已支持，前后缀均可）</a:t>
             </a:r>
           </a:p>
         </p:txBody>
@@ -13665,8 +13665,8 @@
         </p:nvSpPr>
         <p:spPr>
           <a:xfrm>
-            <a:off x="685800" y="4626864"/>
-            <a:ext cx="10789920" cy="841248"/>
+            <a:off x="685800" y="4553712"/>
+            <a:ext cx="10789920" cy="969264"/>
           </a:xfrm>
           <a:prstGeom prst="rect">
             <a:avLst/>
@@ -13711,7 +13711,7 @@
         </p:nvSpPr>
         <p:spPr>
           <a:xfrm>
-            <a:off x="896112" y="4754880"/>
+            <a:off x="896112" y="4663440"/>
             <a:ext cx="10332720" cy="274320"/>
           </a:xfrm>
           <a:prstGeom prst="rect">
@@ -13750,8 +13750,8 @@
         </p:nvSpPr>
         <p:spPr>
           <a:xfrm>
-            <a:off x="896112" y="5065776"/>
-            <a:ext cx="10332720" cy="365760"/>
+            <a:off x="896112" y="4974336"/>
+            <a:ext cx="10332720" cy="475488"/>
           </a:xfrm>
           <a:prstGeom prst="rect">
             <a:avLst/>
@@ -13766,7 +13766,7 @@
           <a:p>
             <a:pPr algn="l">
               <a:lnSpc>
-                <a:spcPct val="125000"/>
+                <a:spcPct val="122000"/>
               </a:lnSpc>
             </a:pPr>
             <a:r>
@@ -13789,8 +13789,8 @@
         </p:nvSpPr>
         <p:spPr>
           <a:xfrm>
-            <a:off x="685800" y="5687568"/>
-            <a:ext cx="10789920" cy="548640"/>
+            <a:off x="685800" y="5650992"/>
+            <a:ext cx="10789920" cy="603504"/>
           </a:xfrm>
           <a:prstGeom prst="rect">
             <a:avLst/>
@@ -25784,7 +25784,7 @@
                 </a:solidFill>
                 <a:latin typeface="微软雅黑"/>
               </a:rPr>
-              <a:t>四元式回归：14 例锁结构不锁输出</a:t>
+              <a:t>四元式回归：16 例锁结构不锁输出</a:t>
             </a:r>
           </a:p>
         </p:txBody>
@@ -25823,7 +25823,7 @@
                 </a:solidFill>
                 <a:latin typeface="微软雅黑"/>
               </a:rPr>
-              <a:t>端到端只比 stdout，表达式求值顺序、临时变量编号、标号编号、短路展开形态全变了</a:t>
+              <a:t>端到端只比 stdout：求值顺序、临时变量编号、标号编号、短路展开形态全变了</a:t>
             </a:r>
           </a:p>
           <a:p>
@@ -26656,7 +26656,7 @@
                 </a:solidFill>
                 <a:latin typeface="微软雅黑"/>
               </a:rPr>
-              <a:t>基线命名的坑（已规避）</a:t>
+              <a:t>常量折叠 + 基线命名的坑</a:t>
             </a:r>
           </a:p>
         </p:txBody>
@@ -26669,8 +26669,8 @@
         </p:nvSpPr>
         <p:spPr>
           <a:xfrm>
-            <a:off x="6473952" y="5413248"/>
-            <a:ext cx="4846320" cy="640080"/>
+            <a:off x="6473952" y="5358384"/>
+            <a:ext cx="4846320" cy="731520"/>
           </a:xfrm>
           <a:prstGeom prst="rect">
             <a:avLst/>
@@ -26685,33 +26685,49 @@
           <a:p>
             <a:pPr algn="l">
               <a:lnSpc>
-                <a:spcPct val="130000"/>
-              </a:lnSpc>
-            </a:pPr>
-            <a:r>
-              <a:rPr sz="1150" b="0">
+                <a:spcPct val="124000"/>
+              </a:lnSpc>
+            </a:pPr>
+            <a:r>
+              <a:rPr sz="1050" b="0">
                 <a:solidFill>
                   <a:srgbClr val="7A2A22"/>
                 </a:solidFill>
                 <a:latin typeface="微软雅黑"/>
               </a:rPr>
-              <a:t>基线叫 *.expected.quad.txt 而不是 *.quad.txt：</a:t>
+              <a:t>常量折叠：两侧皆常量时编译期算完，a = 1 + 2 * 3 → (=, 7, -, a)；</a:t>
             </a:r>
           </a:p>
           <a:p>
             <a:pPr algn="l">
               <a:lnSpc>
-                <a:spcPct val="130000"/>
-              </a:lnSpc>
-            </a:pPr>
-            <a:r>
-              <a:rPr sz="1150" b="0">
+                <a:spcPct val="124000"/>
+              </a:lnSpc>
+            </a:pPr>
+            <a:r>
+              <a:rPr sz="1050" b="0">
                 <a:solidFill>
                   <a:srgbClr val="7A2A22"/>
                 </a:solidFill>
                 <a:latin typeface="微软雅黑"/>
               </a:rPr>
-              <a:t>后者会被任何人随手编一次 test.mc 就覆盖掉。</a:t>
+              <a:t>除零/溢出/&amp;&amp; || 故意不折。基线叫 *.expected.quad.txt 而非 *.quad.txt，</a:t>
+            </a:r>
+          </a:p>
+          <a:p>
+            <a:pPr algn="l">
+              <a:lnSpc>
+                <a:spcPct val="124000"/>
+              </a:lnSpc>
+            </a:pPr>
+            <a:r>
+              <a:rPr sz="1050" b="0">
+                <a:solidFill>
+                  <a:srgbClr val="7A2A22"/>
+                </a:solidFill>
+                <a:latin typeface="微软雅黑"/>
+              </a:rPr>
+              <a:t>否则会被随手编一次 test.mc 覆盖掉。</a:t>
             </a:r>
           </a:p>
         </p:txBody>

--- a/docs/MiniC编译器_答辩演示.pptx
+++ b/docs/MiniC编译器_答辩演示.pptx
@@ -3491,7 +3491,7 @@
                 </a:solidFill>
                 <a:latin typeface="微软雅黑"/>
               </a:rPr>
-              <a:t>10 个源文件 6,940 行 C++17  ·  111 个用例  ·  11 套回归全绿  ·  912 例随机差分零不一致</a:t>
+              <a:t>10 个源文件 7,386 行 C++17  ·  117 个用例  ·  11 套回归全绿  ·  912 例随机差分零不一致</a:t>
             </a:r>
           </a:p>
         </p:txBody>
@@ -7088,7 +7088,7 @@
                 </a:solidFill>
                 <a:latin typeface="微软雅黑"/>
               </a:rPr>
-              <a:t>12 例</a:t>
+              <a:t>14 例</a:t>
             </a:r>
           </a:p>
         </p:txBody>
@@ -7295,7 +7295,7 @@
                 </a:solidFill>
                 <a:latin typeface="微软雅黑"/>
               </a:rPr>
-              <a:t>15 例</a:t>
+              <a:t>17 例</a:t>
             </a:r>
           </a:p>
         </p:txBody>
@@ -7502,7 +7502,7 @@
                 </a:solidFill>
                 <a:latin typeface="微软雅黑"/>
               </a:rPr>
-              <a:t>26 例</a:t>
+              <a:t>28 例</a:t>
             </a:r>
           </a:p>
         </p:txBody>
@@ -13198,7 +13198,7 @@
                 </a:solidFill>
                 <a:latin typeface="微软雅黑"/>
               </a:rPr>
-              <a:t>char 不参与算术运算，char 数组仅作字符序列存储</a:t>
+              <a:t>不支持结构体 / 枚举 / typedef（char 已按整型参与算术，同 C）</a:t>
             </a:r>
           </a:p>
         </p:txBody>
@@ -15296,7 +15296,7 @@
                 </a:solidFill>
                 <a:latin typeface="微软雅黑"/>
               </a:rPr>
-              <a:t>6,940</a:t>
+              <a:t>7,386</a:t>
             </a:r>
           </a:p>
         </p:txBody>
@@ -15664,7 +15664,7 @@
                 </a:solidFill>
                 <a:latin typeface="微软雅黑"/>
               </a:rPr>
-              <a:t>111</a:t>
+              <a:t>117</a:t>
             </a:r>
           </a:p>
         </p:txBody>
@@ -24627,7 +24627,7 @@
                 </a:solidFill>
                 <a:latin typeface="微软雅黑"/>
               </a:rPr>
-              <a:t>诊断实测：12 例语义回归逐字比对</a:t>
+              <a:t>诊断实测：14 例语义回归逐字比对</a:t>
             </a:r>
           </a:p>
         </p:txBody>
@@ -24640,8 +24640,8 @@
         </p:nvSpPr>
         <p:spPr>
           <a:xfrm>
-            <a:off x="6263640" y="1920240"/>
-            <a:ext cx="5212080" cy="2432304"/>
+            <a:off x="6263640" y="1883664"/>
+            <a:ext cx="5212080" cy="2596896"/>
           </a:xfrm>
           <a:prstGeom prst="rect">
             <a:avLst/>
@@ -24686,8 +24686,8 @@
         </p:nvSpPr>
         <p:spPr>
           <a:xfrm>
-            <a:off x="6263640" y="1920240"/>
-            <a:ext cx="41148" cy="2432304"/>
+            <a:off x="6263640" y="1883664"/>
+            <a:ext cx="41148" cy="2596896"/>
           </a:xfrm>
           <a:prstGeom prst="rect">
             <a:avLst/>
@@ -24730,8 +24730,8 @@
         </p:nvSpPr>
         <p:spPr>
           <a:xfrm>
-            <a:off x="6428231" y="2029968"/>
-            <a:ext cx="4937760" cy="2249424"/>
+            <a:off x="6428231" y="1993392"/>
+            <a:ext cx="4937760" cy="2414015"/>
           </a:xfrm>
           <a:prstGeom prst="rect">
             <a:avLst/>
@@ -24746,11 +24746,11 @@
           <a:p>
             <a:pPr>
               <a:lnSpc>
-                <a:spcPct val="116000"/>
-              </a:lnSpc>
-            </a:pPr>
-            <a:r>
-              <a:rPr sz="1050">
+                <a:spcPct val="120000"/>
+              </a:lnSpc>
+            </a:pPr>
+            <a:r>
+              <a:rPr sz="950">
                 <a:solidFill>
                   <a:srgbClr val="2D3A4A"/>
                 </a:solidFill>
@@ -24762,11 +24762,11 @@
           <a:p>
             <a:pPr>
               <a:lnSpc>
-                <a:spcPct val="116000"/>
-              </a:lnSpc>
-            </a:pPr>
-            <a:r>
-              <a:rPr sz="1050">
+                <a:spcPct val="120000"/>
+              </a:lnSpc>
+            </a:pPr>
+            <a:r>
+              <a:rPr sz="950">
                 <a:solidFill>
                   <a:srgbClr val="2D3A4A"/>
                 </a:solidFill>
@@ -24778,11 +24778,11 @@
           <a:p>
             <a:pPr>
               <a:lnSpc>
-                <a:spcPct val="116000"/>
-              </a:lnSpc>
-            </a:pPr>
-            <a:r>
-              <a:rPr sz="1050">
+                <a:spcPct val="120000"/>
+              </a:lnSpc>
+            </a:pPr>
+            <a:r>
+              <a:rPr sz="950">
                 <a:solidFill>
                   <a:srgbClr val="2D3A4A"/>
                 </a:solidFill>
@@ -24794,11 +24794,11 @@
           <a:p>
             <a:pPr>
               <a:lnSpc>
-                <a:spcPct val="116000"/>
-              </a:lnSpc>
-            </a:pPr>
-            <a:r>
-              <a:rPr sz="1050">
+                <a:spcPct val="120000"/>
+              </a:lnSpc>
+            </a:pPr>
+            <a:r>
+              <a:rPr sz="950">
                 <a:solidFill>
                   <a:srgbClr val="2D3A4A"/>
                 </a:solidFill>
@@ -24810,11 +24810,11 @@
           <a:p>
             <a:pPr>
               <a:lnSpc>
-                <a:spcPct val="116000"/>
-              </a:lnSpc>
-            </a:pPr>
-            <a:r>
-              <a:rPr sz="1050">
+                <a:spcPct val="120000"/>
+              </a:lnSpc>
+            </a:pPr>
+            <a:r>
+              <a:rPr sz="950">
                 <a:solidFill>
                   <a:srgbClr val="2D3A4A"/>
                 </a:solidFill>
@@ -24826,11 +24826,11 @@
           <a:p>
             <a:pPr>
               <a:lnSpc>
-                <a:spcPct val="116000"/>
-              </a:lnSpc>
-            </a:pPr>
-            <a:r>
-              <a:rPr sz="1050">
+                <a:spcPct val="120000"/>
+              </a:lnSpc>
+            </a:pPr>
+            <a:r>
+              <a:rPr sz="950">
                 <a:solidFill>
                   <a:srgbClr val="2D3A4A"/>
                 </a:solidFill>
@@ -24842,11 +24842,11 @@
           <a:p>
             <a:pPr>
               <a:lnSpc>
-                <a:spcPct val="116000"/>
-              </a:lnSpc>
-            </a:pPr>
-            <a:r>
-              <a:rPr sz="1050">
+                <a:spcPct val="120000"/>
+              </a:lnSpc>
+            </a:pPr>
+            <a:r>
+              <a:rPr sz="950">
                 <a:solidFill>
                   <a:srgbClr val="2D3A4A"/>
                 </a:solidFill>
@@ -24858,11 +24858,11 @@
           <a:p>
             <a:pPr>
               <a:lnSpc>
-                <a:spcPct val="116000"/>
-              </a:lnSpc>
-            </a:pPr>
-            <a:r>
-              <a:rPr sz="1050">
+                <a:spcPct val="120000"/>
+              </a:lnSpc>
+            </a:pPr>
+            <a:r>
+              <a:rPr sz="950">
                 <a:solidFill>
                   <a:srgbClr val="2D3A4A"/>
                 </a:solidFill>
@@ -24874,11 +24874,11 @@
           <a:p>
             <a:pPr>
               <a:lnSpc>
-                <a:spcPct val="116000"/>
-              </a:lnSpc>
-            </a:pPr>
-            <a:r>
-              <a:rPr sz="1050">
+                <a:spcPct val="120000"/>
+              </a:lnSpc>
+            </a:pPr>
+            <a:r>
+              <a:rPr sz="950">
                 <a:solidFill>
                   <a:srgbClr val="2D3A4A"/>
                 </a:solidFill>
@@ -24890,33 +24890,81 @@
           <a:p>
             <a:pPr>
               <a:lnSpc>
-                <a:spcPct val="116000"/>
-              </a:lnSpc>
-            </a:pPr>
-            <a:r>
-              <a:rPr sz="1050">
+                <a:spcPct val="120000"/>
+              </a:lnSpc>
+            </a:pPr>
+            <a:r>
+              <a:rPr sz="950">
                 <a:solidFill>
                   <a:srgbClr val="2D3A4A"/>
                 </a:solidFill>
                 <a:latin typeface="Consolas"/>
               </a:rPr>
+              <a:t>err_bool_arith.mc</a:t>
+            </a:r>
+          </a:p>
+          <a:p>
+            <a:pPr>
+              <a:lnSpc>
+                <a:spcPct val="120000"/>
+              </a:lnSpc>
+            </a:pPr>
+            <a:r>
+              <a:rPr sz="950">
+                <a:solidFill>
+                  <a:srgbClr val="2D3A4A"/>
+                </a:solidFill>
+                <a:latin typeface="Consolas"/>
+              </a:rPr>
+              <a:t>  error: 7:11: arithmetic operands must be numeric</a:t>
+            </a:r>
+          </a:p>
+          <a:p>
+            <a:pPr>
+              <a:lnSpc>
+                <a:spcPct val="120000"/>
+              </a:lnSpc>
+            </a:pPr>
+            <a:r>
+              <a:rPr sz="950">
+                <a:solidFill>
+                  <a:srgbClr val="2D3A4A"/>
+                </a:solidFill>
+                <a:latin typeface="Consolas"/>
+              </a:rPr>
+              <a:t/>
+            </a:r>
+          </a:p>
+          <a:p>
+            <a:pPr>
+              <a:lnSpc>
+                <a:spcPct val="120000"/>
+              </a:lnSpc>
+            </a:pPr>
+            <a:r>
+              <a:rPr sz="950">
+                <a:solidFill>
+                  <a:srgbClr val="2D3A4A"/>
+                </a:solidFill>
+                <a:latin typeface="Consolas"/>
+              </a:rPr>
               <a:t>ok_float2int_warn.mc</a:t>
             </a:r>
           </a:p>
           <a:p>
             <a:pPr>
               <a:lnSpc>
-                <a:spcPct val="116000"/>
-              </a:lnSpc>
-            </a:pPr>
-            <a:r>
-              <a:rPr sz="1050">
+                <a:spcPct val="120000"/>
+              </a:lnSpc>
+            </a:pPr>
+            <a:r>
+              <a:rPr sz="950">
                 <a:solidFill>
                   <a:srgbClr val="2D3A4A"/>
                 </a:solidFill>
                 <a:latin typeface="Consolas"/>
               </a:rPr>
-              <a:t>  warning: 7:5: implicit conversion from float to int (truncated, Q9)</a:t>
+              <a:t>  warning: 7:5: implicit conversion from float to int</a:t>
             </a:r>
           </a:p>
         </p:txBody>

--- a/docs/MiniC编译器_答辩演示.pptx
+++ b/docs/MiniC编译器_答辩演示.pptx
@@ -3491,7 +3491,7 @@
                 </a:solidFill>
                 <a:latin typeface="微软雅黑"/>
               </a:rPr>
-              <a:t>10 个源文件 7,386 行 C++17  ·  117 个用例  ·  11 套回归全绿  ·  912 例随机差分零不一致</a:t>
+              <a:t>10 个源文件 7,504 行 C++17  ·  122 个用例  ·  11 套回归全绿  ·  912 例随机差分零不一致</a:t>
             </a:r>
           </a:p>
         </p:txBody>
@@ -7088,7 +7088,7 @@
                 </a:solidFill>
                 <a:latin typeface="微软雅黑"/>
               </a:rPr>
-              <a:t>14 例</a:t>
+              <a:t>18 例</a:t>
             </a:r>
           </a:p>
         </p:txBody>
@@ -7502,7 +7502,7 @@
                 </a:solidFill>
                 <a:latin typeface="微软雅黑"/>
               </a:rPr>
-              <a:t>28 例</a:t>
+              <a:t>29 例</a:t>
             </a:r>
           </a:p>
         </p:txBody>
@@ -13403,7 +13403,7 @@
                 </a:solidFill>
                 <a:latin typeface="微软雅黑"/>
               </a:rPr>
-              <a:t>语义不检查数组下标越界、实参个数、return 类型匹配</a:t>
+              <a:t>语义检查实参个数与 return 类型；只剩数组下标越界不查</a:t>
             </a:r>
           </a:p>
         </p:txBody>
@@ -15296,7 +15296,7 @@
                 </a:solidFill>
                 <a:latin typeface="微软雅黑"/>
               </a:rPr>
-              <a:t>7,386</a:t>
+              <a:t>7,504</a:t>
             </a:r>
           </a:p>
         </p:txBody>
@@ -15664,7 +15664,7 @@
                 </a:solidFill>
                 <a:latin typeface="微软雅黑"/>
               </a:rPr>
-              <a:t>117</a:t>
+              <a:t>122</a:t>
             </a:r>
           </a:p>
         </p:txBody>
@@ -24627,7 +24627,7 @@
                 </a:solidFill>
                 <a:latin typeface="微软雅黑"/>
               </a:rPr>
-              <a:t>诊断实测：14 例语义回归逐字比对</a:t>
+              <a:t>诊断实测：18 例语义回归逐字比对</a:t>
             </a:r>
           </a:p>
         </p:txBody>

--- a/docs/MiniC编译器_答辩演示.pptx
+++ b/docs/MiniC编译器_答辩演示.pptx
@@ -12949,7 +12949,7 @@
                 </a:solidFill>
                 <a:latin typeface="微软雅黑"/>
               </a:rPr>
-              <a:t>不支持 for / do-while / break / continue / switch / goto</a:t>
+              <a:t>关系运算符已按 C++ 分层，唯 &lt; 与 &lt;= 之间仍同级左结合</a:t>
             </a:r>
           </a:p>
         </p:txBody>
@@ -13032,7 +13032,7 @@
                 </a:solidFill>
                 <a:latin typeface="微软雅黑"/>
               </a:rPr>
-              <a:t>不支持多维数组、字符串字面量赋值、逗号表达式、链式赋值</a:t>
+              <a:t>不支持 for / do-while / break / continue / switch / goto</a:t>
             </a:r>
           </a:p>
         </p:txBody>
@@ -13115,7 +13115,7 @@
                 </a:solidFill>
                 <a:latin typeface="微软雅黑"/>
               </a:rPr>
-              <a:t>不支持函数原型声明，函数须先定义后调用</a:t>
+              <a:t>不支持多维数组、字符串字面量赋值、逗号表达式、链式赋值</a:t>
             </a:r>
           </a:p>
         </p:txBody>
@@ -13198,59 +13198,20 @@
                 </a:solidFill>
                 <a:latin typeface="微软雅黑"/>
               </a:rPr>
-              <a:t>不支持结构体 / 枚举 / typedef（char 已按整型参与算术，同 C）</a:t>
-            </a:r>
-          </a:p>
-        </p:txBody>
-      </p:sp>
-      <p:sp>
-        <p:nvSpPr>
-          <p:cNvPr id="17" name="TextBox 16"/>
-          <p:cNvSpPr txBox="1"/>
-          <p:nvPr/>
-        </p:nvSpPr>
-        <p:spPr>
-          <a:xfrm>
-            <a:off x="6263640" y="1572768"/>
-            <a:ext cx="5212080" cy="274320"/>
-          </a:xfrm>
-          <a:prstGeom prst="rect">
-            <a:avLst/>
-          </a:prstGeom>
-          <a:noFill/>
-        </p:spPr>
-        <p:txBody>
-          <a:bodyPr wrap="square" anchor="t" lIns="0" rIns="0" tIns="0" bIns="0">
-            <a:spAutoFit/>
-          </a:bodyPr>
-          <a:lstStyle/>
-          <a:p>
-            <a:pPr algn="l">
-              <a:lnSpc>
-                <a:spcPct val="115000"/>
-              </a:lnSpc>
-            </a:pPr>
-            <a:r>
-              <a:rPr sz="1550" b="1">
-                <a:solidFill>
-                  <a:srgbClr val="141F38"/>
-                </a:solidFill>
-                <a:latin typeface="微软雅黑"/>
-              </a:rPr>
-              <a:t>语义与实现层面</a:t>
-            </a:r>
-          </a:p>
-        </p:txBody>
-      </p:sp>
-      <p:sp>
-        <p:nvSpPr>
-          <p:cNvPr id="18" name="Oval 17"/>
+              <a:t>不支持函数原型声明，函数须先定义后调用</a:t>
+            </a:r>
+          </a:p>
+        </p:txBody>
+      </p:sp>
+      <p:sp>
+        <p:nvSpPr>
+          <p:cNvPr id="17" name="Oval 16"/>
           <p:cNvSpPr/>
           <p:nvPr/>
         </p:nvSpPr>
         <p:spPr>
           <a:xfrm>
-            <a:off x="6263640" y="2020824"/>
+            <a:off x="685800" y="4581144"/>
             <a:ext cx="100584" cy="100584"/>
           </a:xfrm>
           <a:prstGeom prst="ellipse">
@@ -13288,14 +13249,53 @@
       </p:sp>
       <p:sp>
         <p:nvSpPr>
+          <p:cNvPr id="18" name="TextBox 17"/>
+          <p:cNvSpPr txBox="1"/>
+          <p:nvPr/>
+        </p:nvSpPr>
+        <p:spPr>
+          <a:xfrm>
+            <a:off x="960120" y="4498848"/>
+            <a:ext cx="4846320" cy="365760"/>
+          </a:xfrm>
+          <a:prstGeom prst="rect">
+            <a:avLst/>
+          </a:prstGeom>
+          <a:noFill/>
+        </p:spPr>
+        <p:txBody>
+          <a:bodyPr wrap="square" anchor="t" lIns="0" rIns="0" tIns="0" bIns="0">
+            <a:spAutoFit/>
+          </a:bodyPr>
+          <a:lstStyle/>
+          <a:p>
+            <a:pPr algn="l">
+              <a:lnSpc>
+                <a:spcPct val="115000"/>
+              </a:lnSpc>
+            </a:pPr>
+            <a:r>
+              <a:rPr sz="1200" b="0">
+                <a:solidFill>
+                  <a:srgbClr val="1F2937"/>
+                </a:solidFill>
+                <a:latin typeface="微软雅黑"/>
+              </a:rPr>
+              <a:t>不支持结构体 / 枚举 / typedef（char 已按整型参与算术，同 C）</a:t>
+            </a:r>
+          </a:p>
+        </p:txBody>
+      </p:sp>
+      <p:sp>
+        <p:nvSpPr>
           <p:cNvPr id="19" name="TextBox 18"/>
           <p:cNvSpPr txBox="1"/>
           <p:nvPr/>
         </p:nvSpPr>
         <p:spPr>
           <a:xfrm>
-            <a:off x="6537959" y="1938528"/>
-            <a:ext cx="4846320" cy="365760"/>
+            <a:off x="6263640" y="1572768"/>
+            <a:ext cx="5212080" cy="274320"/>
           </a:xfrm>
           <a:prstGeom prst="rect">
             <a:avLst/>
@@ -13314,13 +13314,13 @@
               </a:lnSpc>
             </a:pPr>
             <a:r>
-              <a:rPr sz="1200" b="0">
-                <a:solidFill>
-                  <a:srgbClr val="1F2937"/>
-                </a:solidFill>
-                <a:latin typeface="微软雅黑"/>
-              </a:rPr>
-              <a:t>顶层声明必须先于语句（LL(1) 的固有约束，块内不限）</a:t>
+              <a:rPr sz="1550" b="1">
+                <a:solidFill>
+                  <a:srgbClr val="141F38"/>
+                </a:solidFill>
+                <a:latin typeface="微软雅黑"/>
+              </a:rPr>
+              <a:t>语义与实现层面</a:t>
             </a:r>
           </a:p>
         </p:txBody>
@@ -13333,7 +13333,7 @@
         </p:nvSpPr>
         <p:spPr>
           <a:xfrm>
-            <a:off x="6263640" y="2532888"/>
+            <a:off x="6263640" y="2020824"/>
             <a:ext cx="100584" cy="100584"/>
           </a:xfrm>
           <a:prstGeom prst="ellipse">
@@ -13377,7 +13377,7 @@
         </p:nvSpPr>
         <p:spPr>
           <a:xfrm>
-            <a:off x="6537959" y="2450592"/>
+            <a:off x="6537959" y="1938528"/>
             <a:ext cx="4846320" cy="365760"/>
           </a:xfrm>
           <a:prstGeom prst="rect">
@@ -13403,7 +13403,7 @@
                 </a:solidFill>
                 <a:latin typeface="微软雅黑"/>
               </a:rPr>
-              <a:t>语义检查实参个数与 return 类型；只剩数组下标越界不查</a:t>
+              <a:t>顶层声明必须先于语句（LL(1) 的固有约束，块内不限）</a:t>
             </a:r>
           </a:p>
         </p:txBody>
@@ -13416,7 +13416,7 @@
         </p:nvSpPr>
         <p:spPr>
           <a:xfrm>
-            <a:off x="6263640" y="3044952"/>
+            <a:off x="6263640" y="2532888"/>
             <a:ext cx="100584" cy="100584"/>
           </a:xfrm>
           <a:prstGeom prst="ellipse">
@@ -13460,7 +13460,7 @@
         </p:nvSpPr>
         <p:spPr>
           <a:xfrm>
-            <a:off x="6537959" y="2962656"/>
+            <a:off x="6537959" y="2450592"/>
             <a:ext cx="4846320" cy="365760"/>
           </a:xfrm>
           <a:prstGeom prst="rect">
@@ -13486,7 +13486,7 @@
                 </a:solidFill>
                 <a:latin typeface="微软雅黑"/>
               </a:rPr>
-              <a:t>if 条件是 int 时不报错，只对 &amp;&amp; || 强制 bool</a:t>
+              <a:t>语义检查实参个数与 return 类型；只剩数组下标越界不查</a:t>
             </a:r>
           </a:p>
         </p:txBody>
@@ -13499,7 +13499,7 @@
         </p:nvSpPr>
         <p:spPr>
           <a:xfrm>
-            <a:off x="6263640" y="3557016"/>
+            <a:off x="6263640" y="3044952"/>
             <a:ext cx="100584" cy="100584"/>
           </a:xfrm>
           <a:prstGeom prst="ellipse">
@@ -13543,7 +13543,7 @@
         </p:nvSpPr>
         <p:spPr>
           <a:xfrm>
-            <a:off x="6537959" y="3474720"/>
+            <a:off x="6537959" y="2962656"/>
             <a:ext cx="4846320" cy="365760"/>
           </a:xfrm>
           <a:prstGeom prst="rect">
@@ -13569,7 +13569,7 @@
                 </a:solidFill>
                 <a:latin typeface="微软雅黑"/>
               </a:rPr>
-              <a:t>浮点常量 1. 合法、.5 非法</a:t>
+              <a:t>if 条件是 int 时不报错，只对 &amp;&amp; || 强制 bool</a:t>
             </a:r>
           </a:p>
         </p:txBody>
@@ -13582,7 +13582,7 @@
         </p:nvSpPr>
         <p:spPr>
           <a:xfrm>
-            <a:off x="6263640" y="4069080"/>
+            <a:off x="6263640" y="3557016"/>
             <a:ext cx="100584" cy="100584"/>
           </a:xfrm>
           <a:prstGeom prst="ellipse">
@@ -13626,6 +13626,89 @@
         </p:nvSpPr>
         <p:spPr>
           <a:xfrm>
+            <a:off x="6537959" y="3474720"/>
+            <a:ext cx="4846320" cy="365760"/>
+          </a:xfrm>
+          <a:prstGeom prst="rect">
+            <a:avLst/>
+          </a:prstGeom>
+          <a:noFill/>
+        </p:spPr>
+        <p:txBody>
+          <a:bodyPr wrap="square" anchor="t" lIns="0" rIns="0" tIns="0" bIns="0">
+            <a:spAutoFit/>
+          </a:bodyPr>
+          <a:lstStyle/>
+          <a:p>
+            <a:pPr algn="l">
+              <a:lnSpc>
+                <a:spcPct val="115000"/>
+              </a:lnSpc>
+            </a:pPr>
+            <a:r>
+              <a:rPr sz="1200" b="0">
+                <a:solidFill>
+                  <a:srgbClr val="1F2937"/>
+                </a:solidFill>
+                <a:latin typeface="微软雅黑"/>
+              </a:rPr>
+              <a:t>浮点常量 1. 合法、.5 非法</a:t>
+            </a:r>
+          </a:p>
+        </p:txBody>
+      </p:sp>
+      <p:sp>
+        <p:nvSpPr>
+          <p:cNvPr id="28" name="Oval 27"/>
+          <p:cNvSpPr/>
+          <p:nvPr/>
+        </p:nvSpPr>
+        <p:spPr>
+          <a:xfrm>
+            <a:off x="6263640" y="4069080"/>
+            <a:ext cx="100584" cy="100584"/>
+          </a:xfrm>
+          <a:prstGeom prst="ellipse">
+            <a:avLst/>
+          </a:prstGeom>
+          <a:solidFill>
+            <a:srgbClr val="2E6CE6"/>
+          </a:solidFill>
+          <a:ln>
+            <a:noFill/>
+          </a:ln>
+          <a:effectLst/>
+        </p:spPr>
+        <p:style>
+          <a:lnRef idx="1">
+            <a:schemeClr val="accent1"/>
+          </a:lnRef>
+          <a:fillRef idx="3">
+            <a:schemeClr val="accent1"/>
+          </a:fillRef>
+          <a:effectRef idx="2">
+            <a:schemeClr val="accent1"/>
+          </a:effectRef>
+          <a:fontRef idx="minor">
+            <a:schemeClr val="lt1"/>
+          </a:fontRef>
+        </p:style>
+        <p:txBody>
+          <a:bodyPr rtlCol="0" anchor="ctr"/>
+          <a:lstStyle/>
+          <a:p>
+            <a:pPr algn="ctr"/>
+          </a:p>
+        </p:txBody>
+      </p:sp>
+      <p:sp>
+        <p:nvSpPr>
+          <p:cNvPr id="29" name="TextBox 28"/>
+          <p:cNvSpPr txBox="1"/>
+          <p:nvPr/>
+        </p:nvSpPr>
+        <p:spPr>
+          <a:xfrm>
             <a:off x="6537959" y="3986784"/>
             <a:ext cx="4846320" cy="365760"/>
           </a:xfrm>
@@ -13659,7 +13742,7 @@
       </p:sp>
       <p:sp>
         <p:nvSpPr>
-          <p:cNvPr id="28" name="Rectangle 27"/>
+          <p:cNvPr id="30" name="Rectangle 29"/>
           <p:cNvSpPr/>
           <p:nvPr/>
         </p:nvSpPr>
@@ -13705,7 +13788,7 @@
       </p:sp>
       <p:sp>
         <p:nvSpPr>
-          <p:cNvPr id="29" name="TextBox 28"/>
+          <p:cNvPr id="31" name="TextBox 30"/>
           <p:cNvSpPr txBox="1"/>
           <p:nvPr/>
         </p:nvSpPr>
@@ -13744,7 +13827,7 @@
       </p:sp>
       <p:sp>
         <p:nvSpPr>
-          <p:cNvPr id="30" name="TextBox 29"/>
+          <p:cNvPr id="32" name="TextBox 31"/>
           <p:cNvSpPr txBox="1"/>
           <p:nvPr/>
         </p:nvSpPr>
@@ -13783,7 +13866,7 @@
       </p:sp>
       <p:sp>
         <p:nvSpPr>
-          <p:cNvPr id="31" name="TextBox 30"/>
+          <p:cNvPr id="33" name="TextBox 32"/>
           <p:cNvSpPr txBox="1"/>
           <p:nvPr/>
         </p:nvSpPr>
@@ -18671,7 +18754,7 @@
                 </a:solidFill>
                 <a:latin typeface="微软雅黑"/>
               </a:rPr>
-              <a:t>102 条产生式 + 预测分析表驱动，不是手写递归下降</a:t>
+              <a:t>105 条产生式 + 预测分析表驱动，不是手写递归下降</a:t>
             </a:r>
           </a:p>
         </p:txBody>
@@ -20930,7 +21013,7 @@
                 </a:solidFill>
                 <a:latin typeface="微软雅黑"/>
               </a:rPr>
-              <a:t>102 条产生式的 LL(1) 预测分析表，全程无回溯</a:t>
+              <a:t>105 条产生式的 LL(1) 预测分析表，全程无回溯</a:t>
             </a:r>
           </a:p>
         </p:txBody>
@@ -21648,7 +21731,7 @@
                 </a:solidFill>
                 <a:latin typeface="Consolas"/>
               </a:rPr>
-              <a:t>// 产生式 102 条 / 分析步骤 66 / 结果 接受</a:t>
+              <a:t>// 产生式 105 条 / 分析步骤 68 / 结果 接受</a:t>
             </a:r>
           </a:p>
           <a:p>
@@ -21744,7 +21827,7 @@
                 </a:solidFill>
                 <a:latin typeface="Consolas"/>
               </a:rPr>
-              <a:t>16   $ 语句部分        ... ;        声明部分→ε</a:t>
+              <a:t>48   $ 语句部分        ... ;        声明部分→ε</a:t>
             </a:r>
           </a:p>
           <a:p>
@@ -21776,7 +21859,7 @@
                 </a:solidFill>
                 <a:latin typeface="Consolas"/>
               </a:rPr>
-              <a:t>66   $               $            接受</a:t>
+              <a:t>68   $               $            接受</a:t>
             </a:r>
           </a:p>
         </p:txBody>
@@ -21815,7 +21898,7 @@
                 </a:solidFill>
                 <a:latin typeface="微软雅黑"/>
               </a:rPr>
-              <a:t>AST：18 类节点，前序打印带行列号</a:t>
+              <a:t>AST：19 项枚举 / 18 类在用，前序打印带行列号</a:t>
             </a:r>
           </a:p>
         </p:txBody>

--- a/docs/MiniC编译器_答辩演示.pptx
+++ b/docs/MiniC编译器_答辩演示.pptx
@@ -3491,7 +3491,7 @@
                 </a:solidFill>
                 <a:latin typeface="微软雅黑"/>
               </a:rPr>
-              <a:t>10 个源文件 7,504 行 C++17  ·  122 个用例  ·  11 套回归全绿  ·  912 例随机差分零不一致</a:t>
+              <a:t>10 个源文件 7,550 行 C++17  ·  126 个用例  ·  11 套回归全绿  ·  912 例随机差分零不一致</a:t>
             </a:r>
           </a:p>
         </p:txBody>
@@ -15379,7 +15379,7 @@
                 </a:solidFill>
                 <a:latin typeface="微软雅黑"/>
               </a:rPr>
-              <a:t>7,504</a:t>
+              <a:t>7,550</a:t>
             </a:r>
           </a:p>
         </p:txBody>
@@ -15747,7 +15747,7 @@
                 </a:solidFill>
                 <a:latin typeface="微软雅黑"/>
               </a:rPr>
-              <a:t>122</a:t>
+              <a:t>126</a:t>
             </a:r>
           </a:p>
         </p:txBody>

--- a/docs/MiniC编译器_答辩演示.pptx
+++ b/docs/MiniC编译器_答辩演示.pptx
@@ -3491,7 +3491,7 @@
                 </a:solidFill>
                 <a:latin typeface="微软雅黑"/>
               </a:rPr>
-              <a:t>10 个源文件 7,550 行 C++17  ·  126 个用例  ·  11 套回归全绿  ·  912 例随机差分零不一致</a:t>
+              <a:t>10 个源文件 8,129 行 C++17  ·  126 个用例  ·  11 套回归全绿  ·  912 例随机差分零不一致</a:t>
             </a:r>
           </a:p>
         </p:txBody>
@@ -6260,7 +6260,7 @@
                 </a:solidFill>
                 <a:latin typeface="微软雅黑"/>
               </a:rPr>
-              <a:t>49 例</a:t>
+              <a:t>50 例</a:t>
             </a:r>
           </a:p>
         </p:txBody>
@@ -7088,7 +7088,7 @@
                 </a:solidFill>
                 <a:latin typeface="微软雅黑"/>
               </a:rPr>
-              <a:t>18 例</a:t>
+              <a:t>19 例</a:t>
             </a:r>
           </a:p>
         </p:txBody>
@@ -7295,7 +7295,7 @@
                 </a:solidFill>
                 <a:latin typeface="微软雅黑"/>
               </a:rPr>
-              <a:t>17 例</a:t>
+              <a:t>18 例</a:t>
             </a:r>
           </a:p>
         </p:txBody>
@@ -7502,7 +7502,7 @@
                 </a:solidFill>
                 <a:latin typeface="微软雅黑"/>
               </a:rPr>
-              <a:t>29 例</a:t>
+              <a:t>30 例</a:t>
             </a:r>
           </a:p>
         </p:txBody>
@@ -15379,7 +15379,7 @@
                 </a:solidFill>
                 <a:latin typeface="微软雅黑"/>
               </a:rPr>
-              <a:t>7,550</a:t>
+              <a:t>8,129</a:t>
             </a:r>
           </a:p>
         </p:txBody>
@@ -25555,6 +25555,22 @@
                 </a:solidFill>
                 <a:latin typeface="Consolas"/>
               </a:rPr>
+              <a:t>// 操作码照参考书表 5-2：大类名 + 宽度后缀</a:t>
+            </a:r>
+          </a:p>
+          <a:p>
+            <a:pPr>
+              <a:lnSpc>
+                <a:spcPct val="116000"/>
+              </a:lnSpc>
+            </a:pPr>
+            <a:r>
+              <a:rPr sz="1050">
+                <a:solidFill>
+                  <a:srgbClr val="64748B"/>
+                </a:solidFill>
+                <a:latin typeface="Consolas"/>
+              </a:rPr>
               <a:t>// 修复前：a = a + 1 直接算，类型不匹配也不管</a:t>
             </a:r>
           </a:p>
@@ -25603,7 +25619,7 @@
                 </a:solidFill>
                 <a:latin typeface="Consolas"/>
               </a:rPr>
-              <a:t>(+, b, _T1, _T2)</a:t>
+              <a:t>(ADD_4F, b, _T1, _T2)     // 4 字节单精度加</a:t>
             </a:r>
           </a:p>
           <a:p>
@@ -25619,7 +25635,7 @@
                 </a:solidFill>
                 <a:latin typeface="Consolas"/>
               </a:rPr>
-              <a:t>(FTOI, _T2, -, _T3)   // 回写 int 时反向转换</a:t>
+              <a:t>(FTOI, _T2, -, _T3)       // 回写 int 时反向转换</a:t>
             </a:r>
           </a:p>
           <a:p>
@@ -25635,7 +25651,7 @@
                 </a:solidFill>
                 <a:latin typeface="Consolas"/>
               </a:rPr>
-              <a:t>(=, _T3, -, a)</a:t>
+              <a:t>(ASSIGN_4, _T3, -, a)</a:t>
             </a:r>
           </a:p>
         </p:txBody>
@@ -25796,7 +25812,7 @@
                 </a:solidFill>
                 <a:latin typeface="Consolas"/>
               </a:rPr>
-              <a:t>(JZ,  a, -, L1)</a:t>
+              <a:t>(JNT, a, -, L1)                 // 假则跳</a:t>
             </a:r>
           </a:p>
           <a:p>
@@ -25812,7 +25828,7 @@
                 </a:solidFill>
                 <a:latin typeface="Consolas"/>
               </a:rPr>
-              <a:t>(=,  b, -, _T1)      // 只有 a 为真才执行</a:t>
+              <a:t>(ASSIGN_4, b, -, _T1)           // 只有 a 为真才执行</a:t>
             </a:r>
           </a:p>
           <a:p>
@@ -25860,7 +25876,7 @@
                 </a:solidFill>
                 <a:latin typeface="Consolas"/>
               </a:rPr>
-              <a:t>(=,  0, -, _T1)</a:t>
+              <a:t>(ASSIGN_4, 0, -, _T1)</a:t>
             </a:r>
           </a:p>
           <a:p>
@@ -25915,7 +25931,7 @@
                 </a:solidFill>
                 <a:latin typeface="微软雅黑"/>
               </a:rPr>
-              <a:t>四元式回归：16 例锁结构不锁输出</a:t>
+              <a:t>四元式回归：18 例锁结构不锁输出</a:t>
             </a:r>
           </a:p>
         </p:txBody>
@@ -26458,7 +26474,7 @@
                 </a:solidFill>
                 <a:latin typeface="微软雅黑"/>
               </a:rPr>
-              <a:t>入口 LABEL + JZ + 回跳</a:t>
+              <a:t>入口 LABEL + JNT + 回跳</a:t>
             </a:r>
           </a:p>
         </p:txBody>
@@ -26702,7 +26718,7 @@
                 </a:solidFill>
                 <a:latin typeface="微软雅黑"/>
               </a:rPr>
-              <a:t>读写共用 Q_INDEX</a:t>
+              <a:t>读写共用 INDEX_4</a:t>
             </a:r>
           </a:p>
         </p:txBody>
@@ -26826,7 +26842,7 @@
                 </a:solidFill>
                 <a:latin typeface="微软雅黑"/>
               </a:rPr>
-              <a:t>常量折叠：两侧皆常量时编译期算完，a = 1 + 2 * 3 → (=, 7, -, a)；</a:t>
+              <a:t>常量折叠：两侧皆常量时编译期算完，a = 1 + 2 * 3 → (ASSIGN_4, 7, -, a)；</a:t>
             </a:r>
           </a:p>
           <a:p>
@@ -27226,7 +27242,7 @@
                 </a:solidFill>
                 <a:latin typeface="Consolas"/>
               </a:rPr>
-              <a:t>(+,    b, _T1, _T2)   addss     ...</a:t>
+              <a:t>(ADD_4F, b, _T1, _T2) addss    ...</a:t>
             </a:r>
           </a:p>
           <a:p>
@@ -27258,7 +27274,7 @@
                 </a:solidFill>
                 <a:latin typeface="Consolas"/>
               </a:rPr>
-              <a:t>(=,    _T3, -, a)     movl      ...</a:t>
+              <a:t>(ASSIGN_4, _T3, -, a) movl      ...</a:t>
             </a:r>
           </a:p>
         </p:txBody>
@@ -27988,7 +28004,7 @@
                 </a:solidFill>
                 <a:latin typeface="微软雅黑"/>
               </a:rPr>
-              <a:t>25 例端到端</a:t>
+              <a:t>30 例端到端</a:t>
             </a:r>
           </a:p>
         </p:txBody>

--- a/docs/MiniC编译器_答辩演示.pptx
+++ b/docs/MiniC编译器_答辩演示.pptx
@@ -9910,7 +9910,7 @@
                 </a:solidFill>
                 <a:latin typeface="微软雅黑"/>
               </a:rPr>
-              <a:t>10 章 67 条，逐条实跑过；59 条带可运行示例，F1 唤起</a:t>
+              <a:t>10 章 68 条，逐条实跑过；60 条带可运行示例，F1 唤起</a:t>
             </a:r>
           </a:p>
         </p:txBody>
@@ -10554,7 +10554,7 @@
                 </a:solidFill>
                 <a:latin typeface="微软雅黑"/>
               </a:rPr>
-              <a:t>渲染 67 个手册条目、10 个章按钮、搜索过滤、空态、开关、定位、徽标全部有断言。</a:t>
+              <a:t>渲染 68 个手册条目、10 个章按钮、搜索过滤、空态、开关、定位、徽标全部有断言。</a:t>
             </a:r>
           </a:p>
         </p:txBody>
@@ -19442,7 +19442,7 @@
                 </a:solidFill>
                 <a:latin typeface="微软雅黑"/>
               </a:rPr>
-              <a:t>基础版只有声明 / 赋值 / 表达式；挑战版新增字符串、字符、布尔、</a:t>
+              <a:t>基础版只有声明 / 赋值 / 表达式；挑战版新增字符、布尔、数组、函数、</a:t>
             </a:r>
           </a:p>
           <a:p>
@@ -19458,7 +19458,7 @@
                 </a:solidFill>
                 <a:latin typeface="微软雅黑"/>
               </a:rPr>
-              <a:t>数组、函数、控制流、短路求值</a:t>
+              <a:t>控制流、短路求值、++ / --、常量折叠（字符串字面量语法层不接受）</a:t>
             </a:r>
           </a:p>
         </p:txBody>
@@ -21911,8 +21911,8 @@
         </p:nvSpPr>
         <p:spPr>
           <a:xfrm>
-            <a:off x="6263640" y="5084064"/>
-            <a:ext cx="5212080" cy="1060704"/>
+            <a:off x="6263640" y="5029200"/>
+            <a:ext cx="5212080" cy="1207008"/>
           </a:xfrm>
           <a:prstGeom prst="rect">
             <a:avLst/>
@@ -21957,8 +21957,8 @@
         </p:nvSpPr>
         <p:spPr>
           <a:xfrm>
-            <a:off x="6263640" y="5084064"/>
-            <a:ext cx="41148" cy="1060704"/>
+            <a:off x="6263640" y="5029200"/>
+            <a:ext cx="41148" cy="1207008"/>
           </a:xfrm>
           <a:prstGeom prst="rect">
             <a:avLst/>
@@ -22001,8 +22001,8 @@
         </p:nvSpPr>
         <p:spPr>
           <a:xfrm>
-            <a:off x="6428231" y="5193792"/>
-            <a:ext cx="4937760" cy="877824"/>
+            <a:off x="6428231" y="5138928"/>
+            <a:ext cx="4937760" cy="1024128"/>
           </a:xfrm>
           <a:prstGeom prst="rect">
             <a:avLst/>
@@ -22017,7 +22017,7 @@
           <a:p>
             <a:pPr>
               <a:lnSpc>
-                <a:spcPct val="116000"/>
+                <a:spcPct val="112000"/>
               </a:lnSpc>
             </a:pPr>
             <a:r>
@@ -22033,7 +22033,7 @@
           <a:p>
             <a:pPr>
               <a:lnSpc>
-                <a:spcPct val="116000"/>
+                <a:spcPct val="112000"/>
               </a:lnSpc>
             </a:pPr>
             <a:r>
@@ -22049,7 +22049,7 @@
           <a:p>
             <a:pPr>
               <a:lnSpc>
-                <a:spcPct val="116000"/>
+                <a:spcPct val="112000"/>
               </a:lnSpc>
             </a:pPr>
             <a:r>
@@ -22059,13 +22059,13 @@
                 </a:solidFill>
                 <a:latin typeface="Consolas"/>
               </a:rPr>
-              <a:t>  Assign @3:1 → Ident(a) @3:1</a:t>
+              <a:t>  Assign @3:1 -&gt; Ident(a) @3:1</a:t>
             </a:r>
           </a:p>
           <a:p>
             <a:pPr>
               <a:lnSpc>
-                <a:spcPct val="116000"/>
+                <a:spcPct val="112000"/>
               </a:lnSpc>
             </a:pPr>
             <a:r>
@@ -22075,7 +22075,23 @@
                 </a:solidFill>
                 <a:latin typeface="Consolas"/>
               </a:rPr>
-              <a:t>    BinOp(PLUS) @3:7 → Ident(b) @3:5 / Num(1) @3:9</a:t>
+              <a:t>    BinOp(PLUS) @3:7 -&gt; Ident(b) @3:5 / Num(1) @3:9</a:t>
+            </a:r>
+          </a:p>
+          <a:p>
+            <a:pPr>
+              <a:lnSpc>
+                <a:spcPct val="112000"/>
+              </a:lnSpc>
+            </a:pPr>
+            <a:r>
+              <a:rPr sz="1050">
+                <a:solidFill>
+                  <a:srgbClr val="2D3A4A"/>
+                </a:solidFill>
+                <a:latin typeface="Consolas"/>
+              </a:rPr>
+              <a:t>  UnOp(INC) @4:1     UnOp(NOT) @5:1</a:t>
             </a:r>
           </a:p>
         </p:txBody>
@@ -22912,7 +22928,7 @@
                 </a:solidFill>
                 <a:latin typeface="微软雅黑"/>
               </a:rPr>
-              <a:t>int / float / bool</a:t>
+              <a:t>RecType / SearchTypeInfoTbl</a:t>
             </a:r>
           </a:p>
           <a:p>
@@ -22928,7 +22944,7 @@
                 </a:solidFill>
                 <a:latin typeface="微软雅黑"/>
               </a:rPr>
-              <a:t>char / void</a:t>
+              <a:t>参考书兼容层（见注）</a:t>
             </a:r>
           </a:p>
         </p:txBody>
@@ -23832,7 +23848,7 @@
         <p:spPr>
           <a:xfrm>
             <a:off x="6263640" y="3730752"/>
-            <a:ext cx="5212080" cy="2432304"/>
+            <a:ext cx="5212080" cy="1572768"/>
           </a:xfrm>
           <a:prstGeom prst="rect">
             <a:avLst/>
@@ -23878,7 +23894,7 @@
         <p:spPr>
           <a:xfrm>
             <a:off x="6263640" y="3730752"/>
-            <a:ext cx="41148" cy="2432304"/>
+            <a:ext cx="41148" cy="1572768"/>
           </a:xfrm>
           <a:prstGeom prst="rect">
             <a:avLst/>
@@ -23922,7 +23938,7 @@
         <p:spPr>
           <a:xfrm>
             <a:off x="6428231" y="3840480"/>
-            <a:ext cx="4937760" cy="2249424"/>
+            <a:ext cx="4937760" cy="1389888"/>
           </a:xfrm>
           <a:prstGeom prst="rect">
             <a:avLst/>
@@ -24027,7 +24043,7 @@
                 </a:solidFill>
                 <a:latin typeface="Consolas"/>
               </a:rPr>
-              <a:t>// --- Types ---   // --- Procedures ---</a:t>
+              <a:t>// --- Types ---   （空节）</a:t>
             </a:r>
           </a:p>
           <a:p>
@@ -24043,7 +24059,124 @@
                 </a:solidFill>
                 <a:latin typeface="Consolas"/>
               </a:rPr>
-              <a:t>// --- Labels ---</a:t>
+              <a:t>// --- Procedures ---   // --- Labels ---</a:t>
+            </a:r>
+          </a:p>
+        </p:txBody>
+      </p:sp>
+      <p:sp>
+        <p:nvSpPr>
+          <p:cNvPr id="45" name="Rectangle 44"/>
+          <p:cNvSpPr/>
+          <p:nvPr/>
+        </p:nvSpPr>
+        <p:spPr>
+          <a:xfrm>
+            <a:off x="6263640" y="5431536"/>
+            <a:ext cx="5212080" cy="786384"/>
+          </a:xfrm>
+          <a:prstGeom prst="rect">
+            <a:avLst/>
+          </a:prstGeom>
+          <a:solidFill>
+            <a:srgbClr val="FDF8F0"/>
+          </a:solidFill>
+          <a:ln w="12700">
+            <a:solidFill>
+              <a:srgbClr val="E8D5B0"/>
+            </a:solidFill>
+          </a:ln>
+          <a:effectLst/>
+        </p:spPr>
+        <p:style>
+          <a:lnRef idx="1">
+            <a:schemeClr val="accent1"/>
+          </a:lnRef>
+          <a:fillRef idx="3">
+            <a:schemeClr val="accent1"/>
+          </a:fillRef>
+          <a:effectRef idx="2">
+            <a:schemeClr val="accent1"/>
+          </a:effectRef>
+          <a:fontRef idx="minor">
+            <a:schemeClr val="lt1"/>
+          </a:fontRef>
+        </p:style>
+        <p:txBody>
+          <a:bodyPr rtlCol="0" anchor="ctr"/>
+          <a:lstStyle/>
+          <a:p>
+            <a:pPr algn="ctr"/>
+          </a:p>
+        </p:txBody>
+      </p:sp>
+      <p:sp>
+        <p:nvSpPr>
+          <p:cNvPr id="46" name="TextBox 45"/>
+          <p:cNvSpPr txBox="1"/>
+          <p:nvPr/>
+        </p:nvSpPr>
+        <p:spPr>
+          <a:xfrm>
+            <a:off x="6400800" y="5504688"/>
+            <a:ext cx="4937760" cy="658368"/>
+          </a:xfrm>
+          <a:prstGeom prst="rect">
+            <a:avLst/>
+          </a:prstGeom>
+          <a:noFill/>
+        </p:spPr>
+        <p:txBody>
+          <a:bodyPr wrap="square" anchor="t" lIns="0" rIns="0" tIns="0" bIns="0">
+            <a:spAutoFit/>
+          </a:bodyPr>
+          <a:lstStyle/>
+          <a:p>
+            <a:pPr algn="l">
+              <a:lnSpc>
+                <a:spcPct val="120000"/>
+              </a:lnSpc>
+            </a:pPr>
+            <a:r>
+              <a:rPr sz="950" b="0">
+                <a:solidFill>
+                  <a:srgbClr val="6B4E1E"/>
+                </a:solidFill>
+                <a:latin typeface="微软雅黑"/>
+              </a:rPr>
+              <a:t>如注：类型没有单独建表，直接内嵌在 VarEntry::m_type 里。</a:t>
+            </a:r>
+          </a:p>
+          <a:p>
+            <a:pPr algn="l">
+              <a:lnSpc>
+                <a:spcPct val="120000"/>
+              </a:lnSpc>
+            </a:pPr>
+            <a:r>
+              <a:rPr sz="950" b="0">
+                <a:solidFill>
+                  <a:srgbClr val="6B4E1E"/>
+                </a:solidFill>
+                <a:latin typeface="微软雅黑"/>
+              </a:rPr>
+              <a:t>TypeTbl 的三条接口是参考书兼容层（RecType 零调用），</a:t>
+            </a:r>
+          </a:p>
+          <a:p>
+            <a:pPr algn="l">
+              <a:lnSpc>
+                <a:spcPct val="120000"/>
+              </a:lnSpc>
+            </a:pPr>
+            <a:r>
+              <a:rPr sz="950" b="0">
+                <a:solidFill>
+                  <a:srgbClr val="6B4E1E"/>
+                </a:solidFill>
+                <a:latin typeface="微软雅黑"/>
+              </a:rPr>
+              <a:t>所以 --dump-symtab 的 Types 节恒为空 —— 这是设计取舍，不是漏做。</a:t>
             </a:r>
           </a:p>
         </p:txBody>
@@ -24710,7 +24843,7 @@
                 </a:solidFill>
                 <a:latin typeface="微软雅黑"/>
               </a:rPr>
-              <a:t>诊断实测：18 例语义回归逐字比对</a:t>
+              <a:t>诊断实测：19 例语义回归逐字比对</a:t>
             </a:r>
           </a:p>
         </p:txBody>

--- a/docs/MiniC编译器_答辩演示.pptx
+++ b/docs/MiniC编译器_答辩演示.pptx
@@ -22928,7 +22928,7 @@
                 </a:solidFill>
                 <a:latin typeface="微软雅黑"/>
               </a:rPr>
-              <a:t>RecType / SearchTypeInfoTbl</a:t>
+              <a:t>RecBuiltinTypes</a:t>
             </a:r>
           </a:p>
           <a:p>
@@ -22944,7 +22944,7 @@
                 </a:solidFill>
                 <a:latin typeface="微软雅黑"/>
               </a:rPr>
-              <a:t>参考书兼容层（见注）</a:t>
+              <a:t>5 个内建类型 × 字节宽度</a:t>
             </a:r>
           </a:p>
         </p:txBody>
@@ -23847,8 +23847,8 @@
         </p:nvSpPr>
         <p:spPr>
           <a:xfrm>
-            <a:off x="6263640" y="3730752"/>
-            <a:ext cx="5212080" cy="1572768"/>
+            <a:off x="6263640" y="3675887"/>
+            <a:ext cx="5212080" cy="1755648"/>
           </a:xfrm>
           <a:prstGeom prst="rect">
             <a:avLst/>
@@ -23893,8 +23893,8 @@
         </p:nvSpPr>
         <p:spPr>
           <a:xfrm>
-            <a:off x="6263640" y="3730752"/>
-            <a:ext cx="41148" cy="1572768"/>
+            <a:off x="6263640" y="3675887"/>
+            <a:ext cx="41148" cy="1755648"/>
           </a:xfrm>
           <a:prstGeom prst="rect">
             <a:avLst/>
@@ -23937,8 +23937,8 @@
         </p:nvSpPr>
         <p:spPr>
           <a:xfrm>
-            <a:off x="6428231" y="3840480"/>
-            <a:ext cx="4937760" cy="1389888"/>
+            <a:off x="6428231" y="3785615"/>
+            <a:ext cx="4937760" cy="1572768"/>
           </a:xfrm>
           <a:prstGeom prst="rect">
             <a:avLst/>
@@ -23953,11 +23953,11 @@
           <a:p>
             <a:pPr>
               <a:lnSpc>
-                <a:spcPct val="116000"/>
-              </a:lnSpc>
-            </a:pPr>
-            <a:r>
-              <a:rPr sz="1050">
+                <a:spcPct val="108000"/>
+              </a:lnSpc>
+            </a:pPr>
+            <a:r>
+              <a:rPr sz="1000">
                 <a:solidFill>
                   <a:srgbClr val="64748B"/>
                 </a:solidFill>
@@ -23969,11 +23969,11 @@
           <a:p>
             <a:pPr>
               <a:lnSpc>
-                <a:spcPct val="116000"/>
-              </a:lnSpc>
-            </a:pPr>
-            <a:r>
-              <a:rPr sz="1050">
+                <a:spcPct val="108000"/>
+              </a:lnSpc>
+            </a:pPr>
+            <a:r>
+              <a:rPr sz="1000">
                 <a:solidFill>
                   <a:srgbClr val="2D3A4A"/>
                 </a:solidFill>
@@ -23985,11 +23985,11 @@
           <a:p>
             <a:pPr>
               <a:lnSpc>
-                <a:spcPct val="116000"/>
-              </a:lnSpc>
-            </a:pPr>
-            <a:r>
-              <a:rPr sz="1050">
+                <a:spcPct val="108000"/>
+              </a:lnSpc>
+            </a:pPr>
+            <a:r>
+              <a:rPr sz="1000">
                 <a:solidFill>
                   <a:srgbClr val="2D3A4A"/>
                 </a:solidFill>
@@ -24001,11 +24001,11 @@
           <a:p>
             <a:pPr>
               <a:lnSpc>
-                <a:spcPct val="116000"/>
-              </a:lnSpc>
-            </a:pPr>
-            <a:r>
-              <a:rPr sz="1050">
+                <a:spcPct val="108000"/>
+              </a:lnSpc>
+            </a:pPr>
+            <a:r>
+              <a:rPr sz="1000">
                 <a:solidFill>
                   <a:srgbClr val="64748B"/>
                 </a:solidFill>
@@ -24017,11 +24017,11 @@
           <a:p>
             <a:pPr>
               <a:lnSpc>
-                <a:spcPct val="116000"/>
-              </a:lnSpc>
-            </a:pPr>
-            <a:r>
-              <a:rPr sz="1050">
+                <a:spcPct val="108000"/>
+              </a:lnSpc>
+            </a:pPr>
+            <a:r>
+              <a:rPr sz="1000">
                 <a:solidFill>
                   <a:srgbClr val="2D3A4A"/>
                 </a:solidFill>
@@ -24033,27 +24033,59 @@
           <a:p>
             <a:pPr>
               <a:lnSpc>
-                <a:spcPct val="116000"/>
-              </a:lnSpc>
-            </a:pPr>
-            <a:r>
-              <a:rPr sz="1050">
+                <a:spcPct val="108000"/>
+              </a:lnSpc>
+            </a:pPr>
+            <a:r>
+              <a:rPr sz="1000">
                 <a:solidFill>
                   <a:srgbClr val="64748B"/>
                 </a:solidFill>
                 <a:latin typeface="Consolas"/>
               </a:rPr>
-              <a:t>// --- Types ---   （空节）</a:t>
+              <a:t>// --- Types ---</a:t>
             </a:r>
           </a:p>
           <a:p>
             <a:pPr>
               <a:lnSpc>
-                <a:spcPct val="116000"/>
-              </a:lnSpc>
-            </a:pPr>
-            <a:r>
-              <a:rPr sz="1050">
+                <a:spcPct val="108000"/>
+              </a:lnSpc>
+            </a:pPr>
+            <a:r>
+              <a:rPr sz="1000">
+                <a:solidFill>
+                  <a:srgbClr val="2D3A4A"/>
+                </a:solidFill>
+                <a:latin typeface="Consolas"/>
+              </a:rPr>
+              <a:t>int : INT  size 4      float : FLOAT  size 4</a:t>
+            </a:r>
+          </a:p>
+          <a:p>
+            <a:pPr>
+              <a:lnSpc>
+                <a:spcPct val="108000"/>
+              </a:lnSpc>
+            </a:pPr>
+            <a:r>
+              <a:rPr sz="1000">
+                <a:solidFill>
+                  <a:srgbClr val="2D3A4A"/>
+                </a:solidFill>
+                <a:latin typeface="Consolas"/>
+              </a:rPr>
+              <a:t>char : CHAR  size 1    void : VOID  size 0</a:t>
+            </a:r>
+          </a:p>
+          <a:p>
+            <a:pPr>
+              <a:lnSpc>
+                <a:spcPct val="108000"/>
+              </a:lnSpc>
+            </a:pPr>
+            <a:r>
+              <a:rPr sz="1000">
                 <a:solidFill>
                   <a:srgbClr val="64748B"/>
                 </a:solidFill>
@@ -24072,8 +24104,8 @@
         </p:nvSpPr>
         <p:spPr>
           <a:xfrm>
-            <a:off x="6263640" y="5431536"/>
-            <a:ext cx="5212080" cy="786384"/>
+            <a:off x="6263640" y="5541264"/>
+            <a:ext cx="5212080" cy="676656"/>
           </a:xfrm>
           <a:prstGeom prst="rect">
             <a:avLst/>
@@ -24118,8 +24150,8 @@
         </p:nvSpPr>
         <p:spPr>
           <a:xfrm>
-            <a:off x="6400800" y="5504688"/>
-            <a:ext cx="4937760" cy="658368"/>
+            <a:off x="6400800" y="5596128"/>
+            <a:ext cx="4937760" cy="566928"/>
           </a:xfrm>
           <a:prstGeom prst="rect">
             <a:avLst/>
@@ -24144,7 +24176,7 @@
                 </a:solidFill>
                 <a:latin typeface="微软雅黑"/>
               </a:rPr>
-              <a:t>如注：类型没有单独建表，直接内嵌在 VarEntry::m_type 里。</a:t>
+              <a:t>如注：Types 节此前恒空 —— RecType 是零调用的死接口。</a:t>
             </a:r>
           </a:p>
           <a:p>
@@ -24160,7 +24192,7 @@
                 </a:solidFill>
                 <a:latin typeface="微软雅黑"/>
               </a:rPr>
-              <a:t>TypeTbl 的三条接口是参考书兼容层（RecType 零调用），</a:t>
+              <a:t>现由 Analyze() 入口调 RecBuiltinTypes() 登记 5 行，</a:t>
             </a:r>
           </a:p>
           <a:p>
@@ -24176,7 +24208,7 @@
                 </a:solidFill>
                 <a:latin typeface="微软雅黑"/>
               </a:rPr>
-              <a:t>所以 --dump-symtab 的 Types 节恒为空 —— 这是设计取舍，不是漏做。</a:t>
+              <a:t>m_iSize 与 codegen 的 movb / movl 口径一致。</a:t>
             </a:r>
           </a:p>
         </p:txBody>

--- a/docs/MiniC编译器_答辩演示.pptx
+++ b/docs/MiniC编译器_答辩演示.pptx
@@ -22,6 +22,7 @@
     <p:sldId id="270" r:id="rId21"/>
     <p:sldId id="271" r:id="rId22"/>
     <p:sldId id="272" r:id="rId23"/>
+    <p:sldId id="273" r:id="rId24"/>
   </p:sldIdLst>
   <p:sldSz cx="12191695" cy="6858000" type="screen4x3"/>
   <p:notesSz cx="6858000" cy="9144000"/>
@@ -3491,7 +3492,7 @@
                 </a:solidFill>
                 <a:latin typeface="微软雅黑"/>
               </a:rPr>
-              <a:t>10 个源文件 8,129 行 C++17  ·  126 个用例  ·  11 套回归全绿  ·  912 例随机差分零不一致</a:t>
+              <a:t>21 个源文件 8,919 行 C++17  ·  135 个用例  ·  11 套回归全绿  ·  912 例随机差分零不一致</a:t>
             </a:r>
           </a:p>
         </p:txBody>
@@ -6881,7 +6882,7 @@
                 </a:solidFill>
                 <a:latin typeface="微软雅黑"/>
               </a:rPr>
-              <a:t>1 例</a:t>
+              <a:t>2 例</a:t>
             </a:r>
           </a:p>
         </p:txBody>
@@ -7088,7 +7089,7 @@
                 </a:solidFill>
                 <a:latin typeface="微软雅黑"/>
               </a:rPr>
-              <a:t>19 例</a:t>
+              <a:t>27 例</a:t>
             </a:r>
           </a:p>
         </p:txBody>
@@ -12796,7 +12797,7 @@
         </p:nvSpPr>
         <p:spPr>
           <a:xfrm>
-            <a:off x="685800" y="2020824"/>
+            <a:off x="685800" y="1947672"/>
             <a:ext cx="100584" cy="100584"/>
           </a:xfrm>
           <a:prstGeom prst="ellipse">
@@ -12840,7 +12841,7 @@
         </p:nvSpPr>
         <p:spPr>
           <a:xfrm>
-            <a:off x="960120" y="1938528"/>
+            <a:off x="960120" y="1865376"/>
             <a:ext cx="4846320" cy="365760"/>
           </a:xfrm>
           <a:prstGeom prst="rect">
@@ -12860,13 +12861,13 @@
               </a:lnSpc>
             </a:pPr>
             <a:r>
-              <a:rPr sz="1200" b="0">
+              <a:rPr sz="1150" b="0">
                 <a:solidFill>
                   <a:srgbClr val="1F2937"/>
                 </a:solidFill>
                 <a:latin typeface="微软雅黑"/>
               </a:rPr>
-              <a:t>不支持 += %  ?:  等运算符（++ -- 已支持，前后缀均可）</a:t>
+              <a:t>不支持 += %= 等复合赋值、取模 %、位运算、三目 ?:</a:t>
             </a:r>
           </a:p>
         </p:txBody>
@@ -12879,7 +12880,7 @@
         </p:nvSpPr>
         <p:spPr>
           <a:xfrm>
-            <a:off x="685800" y="2532888"/>
+            <a:off x="685800" y="2423160"/>
             <a:ext cx="100584" cy="100584"/>
           </a:xfrm>
           <a:prstGeom prst="ellipse">
@@ -12923,7 +12924,7 @@
         </p:nvSpPr>
         <p:spPr>
           <a:xfrm>
-            <a:off x="960120" y="2450592"/>
+            <a:off x="960120" y="2340864"/>
             <a:ext cx="4846320" cy="365760"/>
           </a:xfrm>
           <a:prstGeom prst="rect">
@@ -12943,13 +12944,13 @@
               </a:lnSpc>
             </a:pPr>
             <a:r>
-              <a:rPr sz="1200" b="0">
+              <a:rPr sz="1150" b="0">
                 <a:solidFill>
                   <a:srgbClr val="1F2937"/>
                 </a:solidFill>
                 <a:latin typeface="微软雅黑"/>
               </a:rPr>
-              <a:t>关系运算符已按 C++ 分层，唯 &lt; 与 &lt;= 之间仍同级左结合</a:t>
+              <a:t>关系运算符按 C++ 分层（== != 低于 &lt; &lt;= &gt; &gt;=）</a:t>
             </a:r>
           </a:p>
         </p:txBody>
@@ -12962,7 +12963,7 @@
         </p:nvSpPr>
         <p:spPr>
           <a:xfrm>
-            <a:off x="685800" y="3044952"/>
+            <a:off x="685800" y="2898648"/>
             <a:ext cx="100584" cy="100584"/>
           </a:xfrm>
           <a:prstGeom prst="ellipse">
@@ -13006,7 +13007,7 @@
         </p:nvSpPr>
         <p:spPr>
           <a:xfrm>
-            <a:off x="960120" y="2962656"/>
+            <a:off x="960120" y="2816352"/>
             <a:ext cx="4846320" cy="365760"/>
           </a:xfrm>
           <a:prstGeom prst="rect">
@@ -13026,7 +13027,7 @@
               </a:lnSpc>
             </a:pPr>
             <a:r>
-              <a:rPr sz="1200" b="0">
+              <a:rPr sz="1150" b="0">
                 <a:solidFill>
                   <a:srgbClr val="1F2937"/>
                 </a:solidFill>
@@ -13045,7 +13046,7 @@
         </p:nvSpPr>
         <p:spPr>
           <a:xfrm>
-            <a:off x="685800" y="3557016"/>
+            <a:off x="685800" y="3374136"/>
             <a:ext cx="100584" cy="100584"/>
           </a:xfrm>
           <a:prstGeom prst="ellipse">
@@ -13089,7 +13090,7 @@
         </p:nvSpPr>
         <p:spPr>
           <a:xfrm>
-            <a:off x="960120" y="3474720"/>
+            <a:off x="960120" y="3291840"/>
             <a:ext cx="4846320" cy="365760"/>
           </a:xfrm>
           <a:prstGeom prst="rect">
@@ -13109,7 +13110,7 @@
               </a:lnSpc>
             </a:pPr>
             <a:r>
-              <a:rPr sz="1200" b="0">
+              <a:rPr sz="1150" b="0">
                 <a:solidFill>
                   <a:srgbClr val="1F2937"/>
                 </a:solidFill>
@@ -13128,7 +13129,7 @@
         </p:nvSpPr>
         <p:spPr>
           <a:xfrm>
-            <a:off x="685800" y="4069080"/>
+            <a:off x="685800" y="3849624"/>
             <a:ext cx="100584" cy="100584"/>
           </a:xfrm>
           <a:prstGeom prst="ellipse">
@@ -13172,7 +13173,7 @@
         </p:nvSpPr>
         <p:spPr>
           <a:xfrm>
-            <a:off x="960120" y="3986784"/>
+            <a:off x="960120" y="3767328"/>
             <a:ext cx="4846320" cy="365760"/>
           </a:xfrm>
           <a:prstGeom prst="rect">
@@ -13192,7 +13193,7 @@
               </a:lnSpc>
             </a:pPr>
             <a:r>
-              <a:rPr sz="1200" b="0">
+              <a:rPr sz="1150" b="0">
                 <a:solidFill>
                   <a:srgbClr val="1F2937"/>
                 </a:solidFill>
@@ -13211,7 +13212,7 @@
         </p:nvSpPr>
         <p:spPr>
           <a:xfrm>
-            <a:off x="685800" y="4581144"/>
+            <a:off x="685800" y="4325112"/>
             <a:ext cx="100584" cy="100584"/>
           </a:xfrm>
           <a:prstGeom prst="ellipse">
@@ -13255,7 +13256,7 @@
         </p:nvSpPr>
         <p:spPr>
           <a:xfrm>
-            <a:off x="960120" y="4498848"/>
+            <a:off x="960120" y="4242816"/>
             <a:ext cx="4846320" cy="365760"/>
           </a:xfrm>
           <a:prstGeom prst="rect">
@@ -13275,7 +13276,7 @@
               </a:lnSpc>
             </a:pPr>
             <a:r>
-              <a:rPr sz="1200" b="0">
+              <a:rPr sz="1150" b="0">
                 <a:solidFill>
                   <a:srgbClr val="1F2937"/>
                 </a:solidFill>
@@ -13333,7 +13334,7 @@
         </p:nvSpPr>
         <p:spPr>
           <a:xfrm>
-            <a:off x="6263640" y="2020824"/>
+            <a:off x="6263640" y="1947672"/>
             <a:ext cx="100584" cy="100584"/>
           </a:xfrm>
           <a:prstGeom prst="ellipse">
@@ -13377,7 +13378,7 @@
         </p:nvSpPr>
         <p:spPr>
           <a:xfrm>
-            <a:off x="6537959" y="1938528"/>
+            <a:off x="6537959" y="1865376"/>
             <a:ext cx="4846320" cy="365760"/>
           </a:xfrm>
           <a:prstGeom prst="rect">
@@ -13397,7 +13398,7 @@
               </a:lnSpc>
             </a:pPr>
             <a:r>
-              <a:rPr sz="1200" b="0">
+              <a:rPr sz="1150" b="0">
                 <a:solidFill>
                   <a:srgbClr val="1F2937"/>
                 </a:solidFill>
@@ -13416,7 +13417,7 @@
         </p:nvSpPr>
         <p:spPr>
           <a:xfrm>
-            <a:off x="6263640" y="2532888"/>
+            <a:off x="6263640" y="2423160"/>
             <a:ext cx="100584" cy="100584"/>
           </a:xfrm>
           <a:prstGeom prst="ellipse">
@@ -13460,7 +13461,7 @@
         </p:nvSpPr>
         <p:spPr>
           <a:xfrm>
-            <a:off x="6537959" y="2450592"/>
+            <a:off x="6537959" y="2340864"/>
             <a:ext cx="4846320" cy="365760"/>
           </a:xfrm>
           <a:prstGeom prst="rect">
@@ -13480,13 +13481,13 @@
               </a:lnSpc>
             </a:pPr>
             <a:r>
-              <a:rPr sz="1200" b="0">
+              <a:rPr sz="1150" b="0">
                 <a:solidFill>
                   <a:srgbClr val="1F2937"/>
                 </a:solidFill>
                 <a:latin typeface="微软雅黑"/>
               </a:rPr>
-              <a:t>语义检查实参个数与 return 类型；只剩数组下标越界不查</a:t>
+              <a:t>语义已查实参个数 / return 类型 / 常量下标越界；变量下标越界不查</a:t>
             </a:r>
           </a:p>
         </p:txBody>
@@ -13499,7 +13500,7 @@
         </p:nvSpPr>
         <p:spPr>
           <a:xfrm>
-            <a:off x="6263640" y="3044952"/>
+            <a:off x="6263640" y="2898648"/>
             <a:ext cx="100584" cy="100584"/>
           </a:xfrm>
           <a:prstGeom prst="ellipse">
@@ -13543,7 +13544,7 @@
         </p:nvSpPr>
         <p:spPr>
           <a:xfrm>
-            <a:off x="6537959" y="2962656"/>
+            <a:off x="6537959" y="2816352"/>
             <a:ext cx="4846320" cy="365760"/>
           </a:xfrm>
           <a:prstGeom prst="rect">
@@ -13563,7 +13564,7 @@
               </a:lnSpc>
             </a:pPr>
             <a:r>
-              <a:rPr sz="1200" b="0">
+              <a:rPr sz="1150" b="0">
                 <a:solidFill>
                   <a:srgbClr val="1F2937"/>
                 </a:solidFill>
@@ -13582,7 +13583,7 @@
         </p:nvSpPr>
         <p:spPr>
           <a:xfrm>
-            <a:off x="6263640" y="3557016"/>
+            <a:off x="6263640" y="3374136"/>
             <a:ext cx="100584" cy="100584"/>
           </a:xfrm>
           <a:prstGeom prst="ellipse">
@@ -13626,7 +13627,7 @@
         </p:nvSpPr>
         <p:spPr>
           <a:xfrm>
-            <a:off x="6537959" y="3474720"/>
+            <a:off x="6537959" y="3291840"/>
             <a:ext cx="4846320" cy="365760"/>
           </a:xfrm>
           <a:prstGeom prst="rect">
@@ -13646,7 +13647,7 @@
               </a:lnSpc>
             </a:pPr>
             <a:r>
-              <a:rPr sz="1200" b="0">
+              <a:rPr sz="1150" b="0">
                 <a:solidFill>
                   <a:srgbClr val="1F2937"/>
                 </a:solidFill>
@@ -13665,7 +13666,7 @@
         </p:nvSpPr>
         <p:spPr>
           <a:xfrm>
-            <a:off x="6263640" y="4069080"/>
+            <a:off x="6263640" y="3849624"/>
             <a:ext cx="100584" cy="100584"/>
           </a:xfrm>
           <a:prstGeom prst="ellipse">
@@ -13709,7 +13710,7 @@
         </p:nvSpPr>
         <p:spPr>
           <a:xfrm>
-            <a:off x="6537959" y="3986784"/>
+            <a:off x="6537959" y="3767328"/>
             <a:ext cx="4846320" cy="365760"/>
           </a:xfrm>
           <a:prstGeom prst="rect">
@@ -13729,7 +13730,7 @@
               </a:lnSpc>
             </a:pPr>
             <a:r>
-              <a:rPr sz="1200" b="0">
+              <a:rPr sz="1150" b="0">
                 <a:solidFill>
                   <a:srgbClr val="1F2937"/>
                 </a:solidFill>
@@ -13742,14 +13743,97 @@
       </p:sp>
       <p:sp>
         <p:nvSpPr>
-          <p:cNvPr id="30" name="Rectangle 29"/>
+          <p:cNvPr id="30" name="Oval 29"/>
           <p:cNvSpPr/>
           <p:nvPr/>
         </p:nvSpPr>
         <p:spPr>
           <a:xfrm>
-            <a:off x="685800" y="4553712"/>
-            <a:ext cx="10789920" cy="969264"/>
+            <a:off x="6263640" y="4325112"/>
+            <a:ext cx="100584" cy="100584"/>
+          </a:xfrm>
+          <a:prstGeom prst="ellipse">
+            <a:avLst/>
+          </a:prstGeom>
+          <a:solidFill>
+            <a:srgbClr val="2E6CE6"/>
+          </a:solidFill>
+          <a:ln>
+            <a:noFill/>
+          </a:ln>
+          <a:effectLst/>
+        </p:spPr>
+        <p:style>
+          <a:lnRef idx="1">
+            <a:schemeClr val="accent1"/>
+          </a:lnRef>
+          <a:fillRef idx="3">
+            <a:schemeClr val="accent1"/>
+          </a:fillRef>
+          <a:effectRef idx="2">
+            <a:schemeClr val="accent1"/>
+          </a:effectRef>
+          <a:fontRef idx="minor">
+            <a:schemeClr val="lt1"/>
+          </a:fontRef>
+        </p:style>
+        <p:txBody>
+          <a:bodyPr rtlCol="0" anchor="ctr"/>
+          <a:lstStyle/>
+          <a:p>
+            <a:pPr algn="ctr"/>
+          </a:p>
+        </p:txBody>
+      </p:sp>
+      <p:sp>
+        <p:nvSpPr>
+          <p:cNvPr id="31" name="TextBox 30"/>
+          <p:cNvSpPr txBox="1"/>
+          <p:nvPr/>
+        </p:nvSpPr>
+        <p:spPr>
+          <a:xfrm>
+            <a:off x="6537959" y="4242816"/>
+            <a:ext cx="4846320" cy="365760"/>
+          </a:xfrm>
+          <a:prstGeom prst="rect">
+            <a:avLst/>
+          </a:prstGeom>
+          <a:noFill/>
+        </p:spPr>
+        <p:txBody>
+          <a:bodyPr wrap="square" anchor="t" lIns="0" rIns="0" tIns="0" bIns="0">
+            <a:spAutoFit/>
+          </a:bodyPr>
+          <a:lstStyle/>
+          <a:p>
+            <a:pPr algn="l">
+              <a:lnSpc>
+                <a:spcPct val="115000"/>
+              </a:lnSpc>
+            </a:pPr>
+            <a:r>
+              <a:rPr sz="1150" b="0">
+                <a:solidFill>
+                  <a:srgbClr val="1F2937"/>
+                </a:solidFill>
+                <a:latin typeface="微软雅黑"/>
+              </a:rPr>
+              <a:t>代码生成不做寄存器分配与 CSE，只有常量折叠 + -O 窥孔</a:t>
+            </a:r>
+          </a:p>
+        </p:txBody>
+      </p:sp>
+      <p:sp>
+        <p:nvSpPr>
+          <p:cNvPr id="32" name="Rectangle 31"/>
+          <p:cNvSpPr/>
+          <p:nvPr/>
+        </p:nvSpPr>
+        <p:spPr>
+          <a:xfrm>
+            <a:off x="685800" y="4626864"/>
+            <a:ext cx="10789920" cy="914400"/>
           </a:xfrm>
           <a:prstGeom prst="rect">
             <a:avLst/>
@@ -13788,13 +13872,13 @@
       </p:sp>
       <p:sp>
         <p:nvSpPr>
-          <p:cNvPr id="31" name="TextBox 30"/>
-          <p:cNvSpPr txBox="1"/>
-          <p:nvPr/>
-        </p:nvSpPr>
-        <p:spPr>
-          <a:xfrm>
-            <a:off x="896112" y="4663440"/>
+          <p:cNvPr id="33" name="TextBox 32"/>
+          <p:cNvSpPr txBox="1"/>
+          <p:nvPr/>
+        </p:nvSpPr>
+        <p:spPr>
+          <a:xfrm>
+            <a:off x="896112" y="4718304"/>
             <a:ext cx="10332720" cy="274320"/>
           </a:xfrm>
           <a:prstGeom prst="rect">
@@ -13827,14 +13911,14 @@
       </p:sp>
       <p:sp>
         <p:nvSpPr>
-          <p:cNvPr id="32" name="TextBox 31"/>
-          <p:cNvSpPr txBox="1"/>
-          <p:nvPr/>
-        </p:nvSpPr>
-        <p:spPr>
-          <a:xfrm>
-            <a:off x="896112" y="4974336"/>
-            <a:ext cx="10332720" cy="475488"/>
+          <p:cNvPr id="34" name="TextBox 33"/>
+          <p:cNvSpPr txBox="1"/>
+          <p:nvPr/>
+        </p:nvSpPr>
+        <p:spPr>
+          <a:xfrm>
+            <a:off x="896112" y="5029200"/>
+            <a:ext cx="10332720" cy="457200"/>
           </a:xfrm>
           <a:prstGeom prst="rect">
             <a:avLst/>
@@ -13866,7 +13950,7 @@
       </p:sp>
       <p:sp>
         <p:nvSpPr>
-          <p:cNvPr id="33" name="TextBox 32"/>
+          <p:cNvPr id="35" name="TextBox 34"/>
           <p:cNvSpPr txBox="1"/>
           <p:nvPr/>
         </p:nvSpPr>
@@ -13999,7 +14083,7 @@
                 </a:solidFill>
                 <a:latin typeface="微软雅黑"/>
               </a:rPr>
-              <a:t>15  项目总结</a:t>
+              <a:t>15  工程化加固</a:t>
             </a:r>
           </a:p>
         </p:txBody>
@@ -14038,7 +14122,7 @@
                 </a:solidFill>
                 <a:latin typeface="微软雅黑"/>
               </a:rPr>
-              <a:t>三个值得讲的收获</a:t>
+              <a:t>以代码行为为准的十项收口 —— 不新增语言特性，只修真实缺陷</a:t>
             </a:r>
           </a:p>
         </p:txBody>
@@ -14095,8 +14179,8 @@
         </p:nvSpPr>
         <p:spPr>
           <a:xfrm>
-            <a:off x="685800" y="1627632"/>
-            <a:ext cx="10789920" cy="1298448"/>
+            <a:off x="685800" y="1481328"/>
+            <a:ext cx="2542032" cy="1207008"/>
           </a:xfrm>
           <a:prstGeom prst="rect">
             <a:avLst/>
@@ -14141,14 +14225,14 @@
         </p:nvSpPr>
         <p:spPr>
           <a:xfrm>
-            <a:off x="685800" y="1627632"/>
-            <a:ext cx="54864" cy="1298448"/>
+            <a:off x="685800" y="1481328"/>
+            <a:ext cx="2542032" cy="45720"/>
           </a:xfrm>
           <a:prstGeom prst="rect">
             <a:avLst/>
           </a:prstGeom>
           <a:solidFill>
-            <a:srgbClr val="2E6CE6"/>
+            <a:srgbClr val="C0392B"/>
           </a:solidFill>
           <a:ln>
             <a:noFill/>
@@ -14185,33 +14269,33 @@
         </p:nvSpPr>
         <p:spPr>
           <a:xfrm>
-            <a:off x="932688" y="1810512"/>
-            <a:ext cx="640080" cy="457200"/>
-          </a:xfrm>
-          <a:prstGeom prst="rect">
-            <a:avLst/>
-          </a:prstGeom>
-          <a:noFill/>
-        </p:spPr>
-        <p:txBody>
-          <a:bodyPr wrap="square" anchor="t" lIns="0" rIns="0" tIns="0" bIns="0">
-            <a:spAutoFit/>
-          </a:bodyPr>
-          <a:lstStyle/>
-          <a:p>
-            <a:pPr algn="l">
+            <a:off x="685800" y="1682496"/>
+            <a:ext cx="2542032" cy="502920"/>
+          </a:xfrm>
+          <a:prstGeom prst="rect">
+            <a:avLst/>
+          </a:prstGeom>
+          <a:noFill/>
+        </p:spPr>
+        <p:txBody>
+          <a:bodyPr wrap="square" anchor="t" lIns="0" rIns="0" tIns="0" bIns="0">
+            <a:spAutoFit/>
+          </a:bodyPr>
+          <a:lstStyle/>
+          <a:p>
+            <a:pPr algn="ctr">
               <a:lnSpc>
                 <a:spcPct val="115000"/>
               </a:lnSpc>
             </a:pPr>
             <a:r>
-              <a:rPr sz="2200" b="1">
-                <a:solidFill>
-                  <a:srgbClr val="2E6CE6"/>
-                </a:solidFill>
-                <a:latin typeface="微软雅黑"/>
-              </a:rPr>
-              <a:t>01</a:t>
+              <a:rPr sz="3000" b="1">
+                <a:solidFill>
+                  <a:srgbClr val="C0392B"/>
+                </a:solidFill>
+                <a:latin typeface="微软雅黑"/>
+              </a:rPr>
+              <a:t>189 ms</a:t>
             </a:r>
           </a:p>
         </p:txBody>
@@ -14224,78 +14308,39 @@
         </p:nvSpPr>
         <p:spPr>
           <a:xfrm>
-            <a:off x="1627632" y="1810512"/>
-            <a:ext cx="9509760" cy="292608"/>
-          </a:xfrm>
-          <a:prstGeom prst="rect">
-            <a:avLst/>
-          </a:prstGeom>
-          <a:noFill/>
-        </p:spPr>
-        <p:txBody>
-          <a:bodyPr wrap="square" anchor="t" lIns="0" rIns="0" tIns="0" bIns="0">
-            <a:spAutoFit/>
-          </a:bodyPr>
-          <a:lstStyle/>
-          <a:p>
-            <a:pPr algn="l">
+            <a:off x="685800" y="2231136"/>
+            <a:ext cx="2542032" cy="548640"/>
+          </a:xfrm>
+          <a:prstGeom prst="rect">
+            <a:avLst/>
+          </a:prstGeom>
+          <a:noFill/>
+        </p:spPr>
+        <p:txBody>
+          <a:bodyPr wrap="square" anchor="t" lIns="0" rIns="0" tIns="0" bIns="0">
+            <a:spAutoFit/>
+          </a:bodyPr>
+          <a:lstStyle/>
+          <a:p>
+            <a:pPr algn="ctr">
               <a:lnSpc>
                 <a:spcPct val="115000"/>
               </a:lnSpc>
             </a:pPr>
             <a:r>
-              <a:rPr sz="1500" b="1">
-                <a:solidFill>
-                  <a:srgbClr val="141F38"/>
-                </a:solidFill>
-                <a:latin typeface="微软雅黑"/>
-              </a:rPr>
-              <a:t>中间产物落盘，是最便宜的调试手段</a:t>
-            </a:r>
-          </a:p>
-        </p:txBody>
-      </p:sp>
-      <p:sp>
-        <p:nvSpPr>
-          <p:cNvPr id="10" name="TextBox 9"/>
-          <p:cNvSpPr txBox="1"/>
-          <p:nvPr/>
-        </p:nvSpPr>
-        <p:spPr>
-          <a:xfrm>
-            <a:off x="1627632" y="2194560"/>
-            <a:ext cx="9601200" cy="640080"/>
-          </a:xfrm>
-          <a:prstGeom prst="rect">
-            <a:avLst/>
-          </a:prstGeom>
-          <a:noFill/>
-        </p:spPr>
-        <p:txBody>
-          <a:bodyPr wrap="square" anchor="t" lIns="0" rIns="0" tIns="0" bIns="0">
-            <a:spAutoFit/>
-          </a:bodyPr>
-          <a:lstStyle/>
-          <a:p>
-            <a:pPr algn="l">
-              <a:lnSpc>
-                <a:spcPct val="135000"/>
-              </a:lnSpc>
-            </a:pPr>
-            <a:r>
               <a:rPr sz="1150" b="0">
                 <a:solidFill>
                   <a:srgbClr val="64748B"/>
                 </a:solidFill>
                 <a:latin typeface="微软雅黑"/>
               </a:rPr>
-              <a:t>把 Token、AST、符号表、四元式、汇编全部写成文件，出问题时不用打断点猜。</a:t>
-            </a:r>
-          </a:p>
-          <a:p>
-            <a:pPr algn="l">
-              <a:lnSpc>
-                <a:spcPct val="135000"/>
+              <a:t>1000 个空函数编译</a:t>
+            </a:r>
+          </a:p>
+          <a:p>
+            <a:pPr algn="ctr">
+              <a:lnSpc>
+                <a:spcPct val="115000"/>
               </a:lnSpc>
             </a:pPr>
             <a:r>
@@ -14305,21 +14350,21 @@
                 </a:solidFill>
                 <a:latin typeface="微软雅黑"/>
               </a:rPr>
-              <a:t>答辩时也是最好的证据：说"类型转换插对了"，直接把 .quad.txt 和 .asm 并排一放。</a:t>
-            </a:r>
-          </a:p>
-        </p:txBody>
-      </p:sp>
-      <p:sp>
-        <p:nvSpPr>
-          <p:cNvPr id="11" name="Rectangle 10"/>
+              <a:t>修复前 68 150 ms</a:t>
+            </a:r>
+          </a:p>
+        </p:txBody>
+      </p:sp>
+      <p:sp>
+        <p:nvSpPr>
+          <p:cNvPr id="10" name="Rectangle 9"/>
           <p:cNvSpPr/>
           <p:nvPr/>
         </p:nvSpPr>
         <p:spPr>
           <a:xfrm>
-            <a:off x="685800" y="3108960"/>
-            <a:ext cx="10789920" cy="1298448"/>
+            <a:off x="3419856" y="1481328"/>
+            <a:ext cx="2542032" cy="1207008"/>
           </a:xfrm>
           <a:prstGeom prst="rect">
             <a:avLst/>
@@ -14358,20 +14403,20 @@
       </p:sp>
       <p:sp>
         <p:nvSpPr>
-          <p:cNvPr id="12" name="Rectangle 11"/>
+          <p:cNvPr id="11" name="Rectangle 10"/>
           <p:cNvSpPr/>
           <p:nvPr/>
         </p:nvSpPr>
         <p:spPr>
           <a:xfrm>
-            <a:off x="685800" y="3108960"/>
-            <a:ext cx="54864" cy="1298448"/>
+            <a:off x="3419856" y="1481328"/>
+            <a:ext cx="2542032" cy="45720"/>
           </a:xfrm>
           <a:prstGeom prst="rect">
             <a:avLst/>
           </a:prstGeom>
           <a:solidFill>
-            <a:srgbClr val="0EA5A5"/>
+            <a:srgbClr val="C2770A"/>
           </a:solidFill>
           <a:ln>
             <a:noFill/>
@@ -14402,147 +14447,108 @@
       </p:sp>
       <p:sp>
         <p:nvSpPr>
+          <p:cNvPr id="12" name="TextBox 11"/>
+          <p:cNvSpPr txBox="1"/>
+          <p:nvPr/>
+        </p:nvSpPr>
+        <p:spPr>
+          <a:xfrm>
+            <a:off x="3419856" y="1682496"/>
+            <a:ext cx="2542032" cy="502920"/>
+          </a:xfrm>
+          <a:prstGeom prst="rect">
+            <a:avLst/>
+          </a:prstGeom>
+          <a:noFill/>
+        </p:spPr>
+        <p:txBody>
+          <a:bodyPr wrap="square" anchor="t" lIns="0" rIns="0" tIns="0" bIns="0">
+            <a:spAutoFit/>
+          </a:bodyPr>
+          <a:lstStyle/>
+          <a:p>
+            <a:pPr algn="ctr">
+              <a:lnSpc>
+                <a:spcPct val="115000"/>
+              </a:lnSpc>
+            </a:pPr>
+            <a:r>
+              <a:rPr sz="3000" b="1">
+                <a:solidFill>
+                  <a:srgbClr val="C2770A"/>
+                </a:solidFill>
+                <a:latin typeface="微软雅黑"/>
+              </a:rPr>
+              <a:t>4 项</a:t>
+            </a:r>
+          </a:p>
+        </p:txBody>
+      </p:sp>
+      <p:sp>
+        <p:nvSpPr>
           <p:cNvPr id="13" name="TextBox 12"/>
           <p:cNvSpPr txBox="1"/>
           <p:nvPr/>
         </p:nvSpPr>
         <p:spPr>
           <a:xfrm>
-            <a:off x="932688" y="3291840"/>
-            <a:ext cx="640080" cy="457200"/>
-          </a:xfrm>
-          <a:prstGeom prst="rect">
-            <a:avLst/>
-          </a:prstGeom>
-          <a:noFill/>
-        </p:spPr>
-        <p:txBody>
-          <a:bodyPr wrap="square" anchor="t" lIns="0" rIns="0" tIns="0" bIns="0">
-            <a:spAutoFit/>
-          </a:bodyPr>
-          <a:lstStyle/>
-          <a:p>
-            <a:pPr algn="l">
+            <a:off x="3419856" y="2231136"/>
+            <a:ext cx="2542032" cy="548640"/>
+          </a:xfrm>
+          <a:prstGeom prst="rect">
+            <a:avLst/>
+          </a:prstGeom>
+          <a:noFill/>
+        </p:spPr>
+        <p:txBody>
+          <a:bodyPr wrap="square" anchor="t" lIns="0" rIns="0" tIns="0" bIns="0">
+            <a:spAutoFit/>
+          </a:bodyPr>
+          <a:lstStyle/>
+          <a:p>
+            <a:pPr algn="ctr">
               <a:lnSpc>
                 <a:spcPct val="115000"/>
               </a:lnSpc>
             </a:pPr>
             <a:r>
-              <a:rPr sz="2200" b="1">
-                <a:solidFill>
-                  <a:srgbClr val="0EA5A5"/>
-                </a:solidFill>
-                <a:latin typeface="微软雅黑"/>
-              </a:rPr>
-              <a:t>02</a:t>
-            </a:r>
-          </a:p>
-        </p:txBody>
-      </p:sp>
-      <p:sp>
-        <p:nvSpPr>
-          <p:cNvPr id="14" name="TextBox 13"/>
-          <p:cNvSpPr txBox="1"/>
-          <p:nvPr/>
-        </p:nvSpPr>
-        <p:spPr>
-          <a:xfrm>
-            <a:off x="1627632" y="3291840"/>
-            <a:ext cx="9509760" cy="292608"/>
-          </a:xfrm>
-          <a:prstGeom prst="rect">
-            <a:avLst/>
-          </a:prstGeom>
-          <a:noFill/>
-        </p:spPr>
-        <p:txBody>
-          <a:bodyPr wrap="square" anchor="t" lIns="0" rIns="0" tIns="0" bIns="0">
-            <a:spAutoFit/>
-          </a:bodyPr>
-          <a:lstStyle/>
-          <a:p>
-            <a:pPr algn="l">
+              <a:rPr sz="1150" b="0">
+                <a:solidFill>
+                  <a:srgbClr val="64748B"/>
+                </a:solidFill>
+                <a:latin typeface="微软雅黑"/>
+              </a:rPr>
+              <a:t>新增静态检查</a:t>
+            </a:r>
+          </a:p>
+          <a:p>
+            <a:pPr algn="ctr">
               <a:lnSpc>
                 <a:spcPct val="115000"/>
               </a:lnSpc>
             </a:pPr>
             <a:r>
-              <a:rPr sz="1500" b="1">
-                <a:solidFill>
-                  <a:srgbClr val="141F38"/>
-                </a:solidFill>
-                <a:latin typeface="微软雅黑"/>
-              </a:rPr>
-              <a:t>测试要锁住每一层的结构，而不是只看最终输出</a:t>
-            </a:r>
-          </a:p>
-        </p:txBody>
-      </p:sp>
-      <p:sp>
-        <p:nvSpPr>
-          <p:cNvPr id="15" name="TextBox 14"/>
-          <p:cNvSpPr txBox="1"/>
-          <p:nvPr/>
-        </p:nvSpPr>
-        <p:spPr>
-          <a:xfrm>
-            <a:off x="1627632" y="3675888"/>
-            <a:ext cx="9601200" cy="640080"/>
-          </a:xfrm>
-          <a:prstGeom prst="rect">
-            <a:avLst/>
-          </a:prstGeom>
-          <a:noFill/>
-        </p:spPr>
-        <p:txBody>
-          <a:bodyPr wrap="square" anchor="t" lIns="0" rIns="0" tIns="0" bIns="0">
-            <a:spAutoFit/>
-          </a:bodyPr>
-          <a:lstStyle/>
-          <a:p>
-            <a:pPr algn="l">
-              <a:lnSpc>
-                <a:spcPct val="135000"/>
-              </a:lnSpc>
-            </a:pPr>
-            <a:r>
               <a:rPr sz="1150" b="0">
                 <a:solidFill>
                   <a:srgbClr val="64748B"/>
                 </a:solidFill>
                 <a:latin typeface="微软雅黑"/>
               </a:rPr>
-              <a:t>端到端只比 stdout 的话，求值顺序错了、临时变量编号乱了，输出照样是对的。</a:t>
-            </a:r>
-          </a:p>
-          <a:p>
-            <a:pPr algn="l">
-              <a:lnSpc>
-                <a:spcPct val="135000"/>
-              </a:lnSpc>
-            </a:pPr>
-            <a:r>
-              <a:rPr sz="1150" b="0">
-                <a:solidFill>
-                  <a:srgbClr val="64748B"/>
-                </a:solidFill>
-                <a:latin typeface="微软雅黑"/>
-              </a:rPr>
-              <a:t>所以 11 套回归各自锁自己那一层的产物；语义甚至锁到"行列号 + 措辞"。</a:t>
-            </a:r>
-          </a:p>
-        </p:txBody>
-      </p:sp>
-      <p:sp>
-        <p:nvSpPr>
-          <p:cNvPr id="16" name="Rectangle 15"/>
+              <a:t>2 个错误 + 2 个警告</a:t>
+            </a:r>
+          </a:p>
+        </p:txBody>
+      </p:sp>
+      <p:sp>
+        <p:nvSpPr>
+          <p:cNvPr id="14" name="Rectangle 13"/>
           <p:cNvSpPr/>
           <p:nvPr/>
         </p:nvSpPr>
         <p:spPr>
           <a:xfrm>
-            <a:off x="685800" y="4590288"/>
-            <a:ext cx="10789920" cy="1298448"/>
+            <a:off x="6153912" y="1481328"/>
+            <a:ext cx="2542032" cy="1207008"/>
           </a:xfrm>
           <a:prstGeom prst="rect">
             <a:avLst/>
@@ -14581,20 +14587,20 @@
       </p:sp>
       <p:sp>
         <p:nvSpPr>
-          <p:cNvPr id="17" name="Rectangle 16"/>
+          <p:cNvPr id="15" name="Rectangle 14"/>
           <p:cNvSpPr/>
           <p:nvPr/>
         </p:nvSpPr>
         <p:spPr>
           <a:xfrm>
-            <a:off x="685800" y="4590288"/>
-            <a:ext cx="54864" cy="1298448"/>
+            <a:off x="6153912" y="1481328"/>
+            <a:ext cx="2542032" cy="45720"/>
           </a:xfrm>
           <a:prstGeom prst="rect">
             <a:avLst/>
           </a:prstGeom>
           <a:solidFill>
-            <a:srgbClr val="C2770A"/>
+            <a:srgbClr val="158A3E"/>
           </a:solidFill>
           <a:ln>
             <a:noFill/>
@@ -14625,14 +14631,336 @@
       </p:sp>
       <p:sp>
         <p:nvSpPr>
-          <p:cNvPr id="18" name="TextBox 17"/>
-          <p:cNvSpPr txBox="1"/>
-          <p:nvPr/>
-        </p:nvSpPr>
-        <p:spPr>
-          <a:xfrm>
-            <a:off x="932688" y="4773168"/>
-            <a:ext cx="640080" cy="457200"/>
+          <p:cNvPr id="16" name="TextBox 15"/>
+          <p:cNvSpPr txBox="1"/>
+          <p:nvPr/>
+        </p:nvSpPr>
+        <p:spPr>
+          <a:xfrm>
+            <a:off x="6153912" y="1682496"/>
+            <a:ext cx="2542032" cy="502920"/>
+          </a:xfrm>
+          <a:prstGeom prst="rect">
+            <a:avLst/>
+          </a:prstGeom>
+          <a:noFill/>
+        </p:spPr>
+        <p:txBody>
+          <a:bodyPr wrap="square" anchor="t" lIns="0" rIns="0" tIns="0" bIns="0">
+            <a:spAutoFit/>
+          </a:bodyPr>
+          <a:lstStyle/>
+          <a:p>
+            <a:pPr algn="ctr">
+              <a:lnSpc>
+                <a:spcPct val="115000"/>
+              </a:lnSpc>
+            </a:pPr>
+            <a:r>
+              <a:rPr sz="3000" b="1">
+                <a:solidFill>
+                  <a:srgbClr val="158A3E"/>
+                </a:solidFill>
+                <a:latin typeface="微软雅黑"/>
+              </a:rPr>
+              <a:t>3 张</a:t>
+            </a:r>
+          </a:p>
+        </p:txBody>
+      </p:sp>
+      <p:sp>
+        <p:nvSpPr>
+          <p:cNvPr id="17" name="TextBox 16"/>
+          <p:cNvSpPr txBox="1"/>
+          <p:nvPr/>
+        </p:nvSpPr>
+        <p:spPr>
+          <a:xfrm>
+            <a:off x="6153912" y="2231136"/>
+            <a:ext cx="2542032" cy="548640"/>
+          </a:xfrm>
+          <a:prstGeom prst="rect">
+            <a:avLst/>
+          </a:prstGeom>
+          <a:noFill/>
+        </p:spPr>
+        <p:txBody>
+          <a:bodyPr wrap="square" anchor="t" lIns="0" rIns="0" tIns="0" bIns="0">
+            <a:spAutoFit/>
+          </a:bodyPr>
+          <a:lstStyle/>
+          <a:p>
+            <a:pPr algn="ctr">
+              <a:lnSpc>
+                <a:spcPct val="115000"/>
+              </a:lnSpc>
+            </a:pPr>
+            <a:r>
+              <a:rPr sz="1150" b="0">
+                <a:solidFill>
+                  <a:srgbClr val="64748B"/>
+                </a:solidFill>
+                <a:latin typeface="微软雅黑"/>
+              </a:rPr>
+              <a:t>符号表死表接上</a:t>
+            </a:r>
+          </a:p>
+          <a:p>
+            <a:pPr algn="ctr">
+              <a:lnSpc>
+                <a:spcPct val="115000"/>
+              </a:lnSpc>
+            </a:pPr>
+            <a:r>
+              <a:rPr sz="1150" b="0">
+                <a:solidFill>
+                  <a:srgbClr val="64748B"/>
+                </a:solidFill>
+                <a:latin typeface="微软雅黑"/>
+              </a:rPr>
+              <a:t>类型 / 形参 / 标号</a:t>
+            </a:r>
+          </a:p>
+        </p:txBody>
+      </p:sp>
+      <p:sp>
+        <p:nvSpPr>
+          <p:cNvPr id="18" name="Rectangle 17"/>
+          <p:cNvSpPr/>
+          <p:nvPr/>
+        </p:nvSpPr>
+        <p:spPr>
+          <a:xfrm>
+            <a:off x="8887968" y="1481328"/>
+            <a:ext cx="2542032" cy="1207008"/>
+          </a:xfrm>
+          <a:prstGeom prst="rect">
+            <a:avLst/>
+          </a:prstGeom>
+          <a:solidFill>
+            <a:srgbClr val="FFFFFF"/>
+          </a:solidFill>
+          <a:ln w="9525">
+            <a:solidFill>
+              <a:srgbClr val="D8E0EA"/>
+            </a:solidFill>
+          </a:ln>
+          <a:effectLst/>
+        </p:spPr>
+        <p:style>
+          <a:lnRef idx="1">
+            <a:schemeClr val="accent1"/>
+          </a:lnRef>
+          <a:fillRef idx="3">
+            <a:schemeClr val="accent1"/>
+          </a:fillRef>
+          <a:effectRef idx="2">
+            <a:schemeClr val="accent1"/>
+          </a:effectRef>
+          <a:fontRef idx="minor">
+            <a:schemeClr val="lt1"/>
+          </a:fontRef>
+        </p:style>
+        <p:txBody>
+          <a:bodyPr rtlCol="0" anchor="ctr"/>
+          <a:lstStyle/>
+          <a:p>
+            <a:pPr algn="ctr"/>
+          </a:p>
+        </p:txBody>
+      </p:sp>
+      <p:sp>
+        <p:nvSpPr>
+          <p:cNvPr id="19" name="Rectangle 18"/>
+          <p:cNvSpPr/>
+          <p:nvPr/>
+        </p:nvSpPr>
+        <p:spPr>
+          <a:xfrm>
+            <a:off x="8887968" y="1481328"/>
+            <a:ext cx="2542032" cy="45720"/>
+          </a:xfrm>
+          <a:prstGeom prst="rect">
+            <a:avLst/>
+          </a:prstGeom>
+          <a:solidFill>
+            <a:srgbClr val="0EA5A5"/>
+          </a:solidFill>
+          <a:ln>
+            <a:noFill/>
+          </a:ln>
+          <a:effectLst/>
+        </p:spPr>
+        <p:style>
+          <a:lnRef idx="1">
+            <a:schemeClr val="accent1"/>
+          </a:lnRef>
+          <a:fillRef idx="3">
+            <a:schemeClr val="accent1"/>
+          </a:fillRef>
+          <a:effectRef idx="2">
+            <a:schemeClr val="accent1"/>
+          </a:effectRef>
+          <a:fontRef idx="minor">
+            <a:schemeClr val="lt1"/>
+          </a:fontRef>
+        </p:style>
+        <p:txBody>
+          <a:bodyPr rtlCol="0" anchor="ctr"/>
+          <a:lstStyle/>
+          <a:p>
+            <a:pPr algn="ctr"/>
+          </a:p>
+        </p:txBody>
+      </p:sp>
+      <p:sp>
+        <p:nvSpPr>
+          <p:cNvPr id="20" name="TextBox 19"/>
+          <p:cNvSpPr txBox="1"/>
+          <p:nvPr/>
+        </p:nvSpPr>
+        <p:spPr>
+          <a:xfrm>
+            <a:off x="8887968" y="1682496"/>
+            <a:ext cx="2542032" cy="502920"/>
+          </a:xfrm>
+          <a:prstGeom prst="rect">
+            <a:avLst/>
+          </a:prstGeom>
+          <a:noFill/>
+        </p:spPr>
+        <p:txBody>
+          <a:bodyPr wrap="square" anchor="t" lIns="0" rIns="0" tIns="0" bIns="0">
+            <a:spAutoFit/>
+          </a:bodyPr>
+          <a:lstStyle/>
+          <a:p>
+            <a:pPr algn="ctr">
+              <a:lnSpc>
+                <a:spcPct val="115000"/>
+              </a:lnSpc>
+            </a:pPr>
+            <a:r>
+              <a:rPr sz="3000" b="1">
+                <a:solidFill>
+                  <a:srgbClr val="0EA5A5"/>
+                </a:solidFill>
+                <a:latin typeface="微软雅黑"/>
+              </a:rPr>
+              <a:t>89 例</a:t>
+            </a:r>
+          </a:p>
+        </p:txBody>
+      </p:sp>
+      <p:sp>
+        <p:nvSpPr>
+          <p:cNvPr id="21" name="TextBox 20"/>
+          <p:cNvSpPr txBox="1"/>
+          <p:nvPr/>
+        </p:nvSpPr>
+        <p:spPr>
+          <a:xfrm>
+            <a:off x="8887968" y="2231136"/>
+            <a:ext cx="2542032" cy="548640"/>
+          </a:xfrm>
+          <a:prstGeom prst="rect">
+            <a:avLst/>
+          </a:prstGeom>
+          <a:noFill/>
+        </p:spPr>
+        <p:txBody>
+          <a:bodyPr wrap="square" anchor="t" lIns="0" rIns="0" tIns="0" bIns="0">
+            <a:spAutoFit/>
+          </a:bodyPr>
+          <a:lstStyle/>
+          <a:p>
+            <a:pPr algn="ctr">
+              <a:lnSpc>
+                <a:spcPct val="115000"/>
+              </a:lnSpc>
+            </a:pPr>
+            <a:r>
+              <a:rPr sz="1150" b="0">
+                <a:solidFill>
+                  <a:srgbClr val="64748B"/>
+                </a:solidFill>
+                <a:latin typeface="微软雅黑"/>
+              </a:rPr>
+              <a:t>-O 前后零差异</a:t>
+            </a:r>
+          </a:p>
+          <a:p>
+            <a:pPr algn="ctr">
+              <a:lnSpc>
+                <a:spcPct val="115000"/>
+              </a:lnSpc>
+            </a:pPr>
+            <a:r>
+              <a:rPr sz="1150" b="0">
+                <a:solidFill>
+                  <a:srgbClr val="64748B"/>
+                </a:solidFill>
+                <a:latin typeface="微软雅黑"/>
+              </a:rPr>
+              <a:t>stdout + 退出码</a:t>
+            </a:r>
+          </a:p>
+        </p:txBody>
+      </p:sp>
+      <p:sp>
+        <p:nvSpPr>
+          <p:cNvPr id="22" name="Oval 21"/>
+          <p:cNvSpPr/>
+          <p:nvPr/>
+        </p:nvSpPr>
+        <p:spPr>
+          <a:xfrm>
+            <a:off x="685800" y="3044952"/>
+            <a:ext cx="100584" cy="100584"/>
+          </a:xfrm>
+          <a:prstGeom prst="ellipse">
+            <a:avLst/>
+          </a:prstGeom>
+          <a:solidFill>
+            <a:srgbClr val="2E6CE6"/>
+          </a:solidFill>
+          <a:ln>
+            <a:noFill/>
+          </a:ln>
+          <a:effectLst/>
+        </p:spPr>
+        <p:style>
+          <a:lnRef idx="1">
+            <a:schemeClr val="accent1"/>
+          </a:lnRef>
+          <a:fillRef idx="3">
+            <a:schemeClr val="accent1"/>
+          </a:fillRef>
+          <a:effectRef idx="2">
+            <a:schemeClr val="accent1"/>
+          </a:effectRef>
+          <a:fontRef idx="minor">
+            <a:schemeClr val="lt1"/>
+          </a:fontRef>
+        </p:style>
+        <p:txBody>
+          <a:bodyPr rtlCol="0" anchor="ctr"/>
+          <a:lstStyle/>
+          <a:p>
+            <a:pPr algn="ctr"/>
+          </a:p>
+        </p:txBody>
+      </p:sp>
+      <p:sp>
+        <p:nvSpPr>
+          <p:cNvPr id="23" name="TextBox 22"/>
+          <p:cNvSpPr txBox="1"/>
+          <p:nvPr/>
+        </p:nvSpPr>
+        <p:spPr>
+          <a:xfrm>
+            <a:off x="960120" y="2962656"/>
+            <a:ext cx="4983480" cy="365760"/>
           </a:xfrm>
           <a:prstGeom prst="rect">
             <a:avLst/>
@@ -14651,27 +14979,27 @@
               </a:lnSpc>
             </a:pPr>
             <a:r>
-              <a:rPr sz="2200" b="1">
-                <a:solidFill>
-                  <a:srgbClr val="C2770A"/>
-                </a:solidFill>
-                <a:latin typeface="微软雅黑"/>
-              </a:rPr>
-              <a:t>03</a:t>
-            </a:r>
-          </a:p>
-        </p:txBody>
-      </p:sp>
-      <p:sp>
-        <p:nvSpPr>
-          <p:cNvPr id="19" name="TextBox 18"/>
-          <p:cNvSpPr txBox="1"/>
-          <p:nvPr/>
-        </p:nvSpPr>
-        <p:spPr>
-          <a:xfrm>
-            <a:off x="1627632" y="4773168"/>
-            <a:ext cx="9509760" cy="292608"/>
+              <a:rPr sz="1300" b="1">
+                <a:solidFill>
+                  <a:srgbClr val="1F2937"/>
+                </a:solidFill>
+                <a:latin typeface="微软雅黑"/>
+              </a:rPr>
+              <a:t>①  分析轨迹按需记录</a:t>
+            </a:r>
+          </a:p>
+        </p:txBody>
+      </p:sp>
+      <p:sp>
+        <p:nvSpPr>
+          <p:cNvPr id="24" name="TextBox 23"/>
+          <p:cNvSpPr txBox="1"/>
+          <p:nvPr/>
+        </p:nvSpPr>
+        <p:spPr>
+          <a:xfrm>
+            <a:off x="960120" y="3186684"/>
+            <a:ext cx="4983480" cy="365760"/>
           </a:xfrm>
           <a:prstGeom prst="rect">
             <a:avLst/>
@@ -14690,68 +15018,804 @@
               </a:lnSpc>
             </a:pPr>
             <a:r>
-              <a:rPr sz="1500" b="1">
+              <a:rPr sz="1100" b="0">
+                <a:solidFill>
+                  <a:srgbClr val="64748B"/>
+                </a:solidFill>
+                <a:latin typeface="微软雅黑"/>
+              </a:rPr>
+              <a:t>RecordStep 每步都拼「整栈 + 剩余全部 Token」，退化成 O(n²)；</a:t>
+            </a:r>
+          </a:p>
+          <a:p>
+            <a:pPr algn="l">
+              <a:lnSpc>
+                <a:spcPct val="115000"/>
+              </a:lnSpc>
+            </a:pPr>
+            <a:r>
+              <a:rPr sz="1100" b="0">
+                <a:solidFill>
+                  <a:srgbClr val="64748B"/>
+                </a:solidFill>
+                <a:latin typeface="微软雅黑"/>
+              </a:rPr>
+              <a:t>改为默认关闭，只有 --dump-parse 打开。.parse.txt 8 212 字符逐字不变。</a:t>
+            </a:r>
+          </a:p>
+        </p:txBody>
+      </p:sp>
+      <p:sp>
+        <p:nvSpPr>
+          <p:cNvPr id="25" name="Oval 24"/>
+          <p:cNvSpPr/>
+          <p:nvPr/>
+        </p:nvSpPr>
+        <p:spPr>
+          <a:xfrm>
+            <a:off x="685800" y="3941064"/>
+            <a:ext cx="100584" cy="100584"/>
+          </a:xfrm>
+          <a:prstGeom prst="ellipse">
+            <a:avLst/>
+          </a:prstGeom>
+          <a:solidFill>
+            <a:srgbClr val="2E6CE6"/>
+          </a:solidFill>
+          <a:ln>
+            <a:noFill/>
+          </a:ln>
+          <a:effectLst/>
+        </p:spPr>
+        <p:style>
+          <a:lnRef idx="1">
+            <a:schemeClr val="accent1"/>
+          </a:lnRef>
+          <a:fillRef idx="3">
+            <a:schemeClr val="accent1"/>
+          </a:fillRef>
+          <a:effectRef idx="2">
+            <a:schemeClr val="accent1"/>
+          </a:effectRef>
+          <a:fontRef idx="minor">
+            <a:schemeClr val="lt1"/>
+          </a:fontRef>
+        </p:style>
+        <p:txBody>
+          <a:bodyPr rtlCol="0" anchor="ctr"/>
+          <a:lstStyle/>
+          <a:p>
+            <a:pPr algn="ctr"/>
+          </a:p>
+        </p:txBody>
+      </p:sp>
+      <p:sp>
+        <p:nvSpPr>
+          <p:cNvPr id="26" name="TextBox 25"/>
+          <p:cNvSpPr txBox="1"/>
+          <p:nvPr/>
+        </p:nvSpPr>
+        <p:spPr>
+          <a:xfrm>
+            <a:off x="960120" y="3858768"/>
+            <a:ext cx="4983480" cy="365760"/>
+          </a:xfrm>
+          <a:prstGeom prst="rect">
+            <a:avLst/>
+          </a:prstGeom>
+          <a:noFill/>
+        </p:spPr>
+        <p:txBody>
+          <a:bodyPr wrap="square" anchor="t" lIns="0" rIns="0" tIns="0" bIns="0">
+            <a:spAutoFit/>
+          </a:bodyPr>
+          <a:lstStyle/>
+          <a:p>
+            <a:pPr algn="l">
+              <a:lnSpc>
+                <a:spcPct val="115000"/>
+              </a:lnSpc>
+            </a:pPr>
+            <a:r>
+              <a:rPr sz="1300" b="1">
+                <a:solidFill>
+                  <a:srgbClr val="1F2937"/>
+                </a:solidFill>
+                <a:latin typeface="微软雅黑"/>
+              </a:rPr>
+              <a:t>②  四项静态检查</a:t>
+            </a:r>
+          </a:p>
+        </p:txBody>
+      </p:sp>
+      <p:sp>
+        <p:nvSpPr>
+          <p:cNvPr id="27" name="TextBox 26"/>
+          <p:cNvSpPr txBox="1"/>
+          <p:nvPr/>
+        </p:nvSpPr>
+        <p:spPr>
+          <a:xfrm>
+            <a:off x="960120" y="4082796"/>
+            <a:ext cx="4983480" cy="365760"/>
+          </a:xfrm>
+          <a:prstGeom prst="rect">
+            <a:avLst/>
+          </a:prstGeom>
+          <a:noFill/>
+        </p:spPr>
+        <p:txBody>
+          <a:bodyPr wrap="square" anchor="t" lIns="0" rIns="0" tIns="0" bIns="0">
+            <a:spAutoFit/>
+          </a:bodyPr>
+          <a:lstStyle/>
+          <a:p>
+            <a:pPr algn="l">
+              <a:lnSpc>
+                <a:spcPct val="115000"/>
+              </a:lnSpc>
+            </a:pPr>
+            <a:r>
+              <a:rPr sz="1100" b="0">
+                <a:solidFill>
+                  <a:srgbClr val="64748B"/>
+                </a:solidFill>
+                <a:latin typeface="微软雅黑"/>
+              </a:rPr>
+              <a:t>数组名不带下标 / 常量下标越界或为负 / 非 void 无 return /</a:t>
+            </a:r>
+          </a:p>
+          <a:p>
+            <a:pPr algn="l">
+              <a:lnSpc>
+                <a:spcPct val="115000"/>
+              </a:lnSpc>
+            </a:pPr>
+            <a:r>
+              <a:rPr sz="1100" b="0">
+                <a:solidFill>
+                  <a:srgbClr val="64748B"/>
+                </a:solidFill>
+                <a:latin typeface="微软雅黑"/>
+              </a:rPr>
+              <a:t>无入口也无顶层语句。后两项只能是警告，否则 10 个既有用例全崩。</a:t>
+            </a:r>
+          </a:p>
+        </p:txBody>
+      </p:sp>
+      <p:sp>
+        <p:nvSpPr>
+          <p:cNvPr id="28" name="Oval 27"/>
+          <p:cNvSpPr/>
+          <p:nvPr/>
+        </p:nvSpPr>
+        <p:spPr>
+          <a:xfrm>
+            <a:off x="685800" y="4837176"/>
+            <a:ext cx="100584" cy="100584"/>
+          </a:xfrm>
+          <a:prstGeom prst="ellipse">
+            <a:avLst/>
+          </a:prstGeom>
+          <a:solidFill>
+            <a:srgbClr val="2E6CE6"/>
+          </a:solidFill>
+          <a:ln>
+            <a:noFill/>
+          </a:ln>
+          <a:effectLst/>
+        </p:spPr>
+        <p:style>
+          <a:lnRef idx="1">
+            <a:schemeClr val="accent1"/>
+          </a:lnRef>
+          <a:fillRef idx="3">
+            <a:schemeClr val="accent1"/>
+          </a:fillRef>
+          <a:effectRef idx="2">
+            <a:schemeClr val="accent1"/>
+          </a:effectRef>
+          <a:fontRef idx="minor">
+            <a:schemeClr val="lt1"/>
+          </a:fontRef>
+        </p:style>
+        <p:txBody>
+          <a:bodyPr rtlCol="0" anchor="ctr"/>
+          <a:lstStyle/>
+          <a:p>
+            <a:pPr algn="ctr"/>
+          </a:p>
+        </p:txBody>
+      </p:sp>
+      <p:sp>
+        <p:nvSpPr>
+          <p:cNvPr id="29" name="TextBox 28"/>
+          <p:cNvSpPr txBox="1"/>
+          <p:nvPr/>
+        </p:nvSpPr>
+        <p:spPr>
+          <a:xfrm>
+            <a:off x="960120" y="4754880"/>
+            <a:ext cx="4983480" cy="365760"/>
+          </a:xfrm>
+          <a:prstGeom prst="rect">
+            <a:avLst/>
+          </a:prstGeom>
+          <a:noFill/>
+        </p:spPr>
+        <p:txBody>
+          <a:bodyPr wrap="square" anchor="t" lIns="0" rIns="0" tIns="0" bIns="0">
+            <a:spAutoFit/>
+          </a:bodyPr>
+          <a:lstStyle/>
+          <a:p>
+            <a:pPr algn="l">
+              <a:lnSpc>
+                <a:spcPct val="115000"/>
+              </a:lnSpc>
+            </a:pPr>
+            <a:r>
+              <a:rPr sz="1300" b="1">
+                <a:solidFill>
+                  <a:srgbClr val="1F2937"/>
+                </a:solidFill>
+                <a:latin typeface="微软雅黑"/>
+              </a:rPr>
+              <a:t>③  符号表三张空表</a:t>
+            </a:r>
+          </a:p>
+        </p:txBody>
+      </p:sp>
+      <p:sp>
+        <p:nvSpPr>
+          <p:cNvPr id="30" name="TextBox 29"/>
+          <p:cNvSpPr txBox="1"/>
+          <p:nvPr/>
+        </p:nvSpPr>
+        <p:spPr>
+          <a:xfrm>
+            <a:off x="960120" y="4978908"/>
+            <a:ext cx="4983480" cy="365760"/>
+          </a:xfrm>
+          <a:prstGeom prst="rect">
+            <a:avLst/>
+          </a:prstGeom>
+          <a:noFill/>
+        </p:spPr>
+        <p:txBody>
+          <a:bodyPr wrap="square" anchor="t" lIns="0" rIns="0" tIns="0" bIns="0">
+            <a:spAutoFit/>
+          </a:bodyPr>
+          <a:lstStyle/>
+          <a:p>
+            <a:pPr algn="l">
+              <a:lnSpc>
+                <a:spcPct val="115000"/>
+              </a:lnSpc>
+            </a:pPr>
+            <a:r>
+              <a:rPr sz="1100" b="0">
+                <a:solidFill>
+                  <a:srgbClr val="64748B"/>
+                </a:solidFill>
+                <a:latin typeface="微软雅黑"/>
+              </a:rPr>
+              <a:t>INT[5] 数组类型行、-- Params 节、RecLabel 接上；</a:t>
+            </a:r>
+          </a:p>
+          <a:p>
+            <a:pPr algn="l">
+              <a:lnSpc>
+                <a:spcPct val="115000"/>
+              </a:lnSpc>
+            </a:pPr>
+            <a:r>
+              <a:rPr sz="1100" b="0">
+                <a:solidFill>
+                  <a:srgbClr val="64748B"/>
+                </a:solidFill>
+                <a:latin typeface="微软雅黑"/>
+              </a:rPr>
+              <a:t>标号由 IR 的 LABEL 四元式登记，dump 必须挪到 IR 之后。</a:t>
+            </a:r>
+          </a:p>
+        </p:txBody>
+      </p:sp>
+      <p:sp>
+        <p:nvSpPr>
+          <p:cNvPr id="31" name="Oval 30"/>
+          <p:cNvSpPr/>
+          <p:nvPr/>
+        </p:nvSpPr>
+        <p:spPr>
+          <a:xfrm>
+            <a:off x="6263640" y="3044952"/>
+            <a:ext cx="100584" cy="100584"/>
+          </a:xfrm>
+          <a:prstGeom prst="ellipse">
+            <a:avLst/>
+          </a:prstGeom>
+          <a:solidFill>
+            <a:srgbClr val="2E6CE6"/>
+          </a:solidFill>
+          <a:ln>
+            <a:noFill/>
+          </a:ln>
+          <a:effectLst/>
+        </p:spPr>
+        <p:style>
+          <a:lnRef idx="1">
+            <a:schemeClr val="accent1"/>
+          </a:lnRef>
+          <a:fillRef idx="3">
+            <a:schemeClr val="accent1"/>
+          </a:fillRef>
+          <a:effectRef idx="2">
+            <a:schemeClr val="accent1"/>
+          </a:effectRef>
+          <a:fontRef idx="minor">
+            <a:schemeClr val="lt1"/>
+          </a:fontRef>
+        </p:style>
+        <p:txBody>
+          <a:bodyPr rtlCol="0" anchor="ctr"/>
+          <a:lstStyle/>
+          <a:p>
+            <a:pPr algn="ctr"/>
+          </a:p>
+        </p:txBody>
+      </p:sp>
+      <p:sp>
+        <p:nvSpPr>
+          <p:cNvPr id="32" name="TextBox 31"/>
+          <p:cNvSpPr txBox="1"/>
+          <p:nvPr/>
+        </p:nvSpPr>
+        <p:spPr>
+          <a:xfrm>
+            <a:off x="6537959" y="2962656"/>
+            <a:ext cx="4983480" cy="365760"/>
+          </a:xfrm>
+          <a:prstGeom prst="rect">
+            <a:avLst/>
+          </a:prstGeom>
+          <a:noFill/>
+        </p:spPr>
+        <p:txBody>
+          <a:bodyPr wrap="square" anchor="t" lIns="0" rIns="0" tIns="0" bIns="0">
+            <a:spAutoFit/>
+          </a:bodyPr>
+          <a:lstStyle/>
+          <a:p>
+            <a:pPr algn="l">
+              <a:lnSpc>
+                <a:spcPct val="115000"/>
+              </a:lnSpc>
+            </a:pPr>
+            <a:r>
+              <a:rPr sz="1300" b="1">
+                <a:solidFill>
+                  <a:srgbClr val="1F2937"/>
+                </a:solidFill>
+                <a:latin typeface="微软雅黑"/>
+              </a:rPr>
+              <a:t>④  命令行</a:t>
+            </a:r>
+          </a:p>
+        </p:txBody>
+      </p:sp>
+      <p:sp>
+        <p:nvSpPr>
+          <p:cNvPr id="33" name="TextBox 32"/>
+          <p:cNvSpPr txBox="1"/>
+          <p:nvPr/>
+        </p:nvSpPr>
+        <p:spPr>
+          <a:xfrm>
+            <a:off x="6537959" y="3186684"/>
+            <a:ext cx="4983480" cy="365760"/>
+          </a:xfrm>
+          <a:prstGeom prst="rect">
+            <a:avLst/>
+          </a:prstGeom>
+          <a:noFill/>
+        </p:spPr>
+        <p:txBody>
+          <a:bodyPr wrap="square" anchor="t" lIns="0" rIns="0" tIns="0" bIns="0">
+            <a:spAutoFit/>
+          </a:bodyPr>
+          <a:lstStyle/>
+          <a:p>
+            <a:pPr algn="l">
+              <a:lnSpc>
+                <a:spcPct val="115000"/>
+              </a:lnSpc>
+            </a:pPr>
+            <a:r>
+              <a:rPr sz="1100" b="0">
+                <a:solidFill>
+                  <a:srgbClr val="64748B"/>
+                </a:solidFill>
+                <a:latin typeface="微软雅黑"/>
+              </a:rPr>
+              <a:t>-h / --help、-V / --version；错误上限 100 条，超出只计数不打印，</a:t>
+            </a:r>
+          </a:p>
+          <a:p>
+            <a:pPr algn="l">
+              <a:lnSpc>
+                <a:spcPct val="115000"/>
+              </a:lnSpc>
+            </a:pPr>
+            <a:r>
+              <a:rPr sz="1100" b="0">
+                <a:solidFill>
+                  <a:srgbClr val="64748B"/>
+                </a:solidFill>
+                <a:latin typeface="微软雅黑"/>
+              </a:rPr>
+              <a:t>末尾汇总一行说明省略了多少条。</a:t>
+            </a:r>
+          </a:p>
+        </p:txBody>
+      </p:sp>
+      <p:sp>
+        <p:nvSpPr>
+          <p:cNvPr id="34" name="Oval 33"/>
+          <p:cNvSpPr/>
+          <p:nvPr/>
+        </p:nvSpPr>
+        <p:spPr>
+          <a:xfrm>
+            <a:off x="6263640" y="3941064"/>
+            <a:ext cx="100584" cy="100584"/>
+          </a:xfrm>
+          <a:prstGeom prst="ellipse">
+            <a:avLst/>
+          </a:prstGeom>
+          <a:solidFill>
+            <a:srgbClr val="2E6CE6"/>
+          </a:solidFill>
+          <a:ln>
+            <a:noFill/>
+          </a:ln>
+          <a:effectLst/>
+        </p:spPr>
+        <p:style>
+          <a:lnRef idx="1">
+            <a:schemeClr val="accent1"/>
+          </a:lnRef>
+          <a:fillRef idx="3">
+            <a:schemeClr val="accent1"/>
+          </a:fillRef>
+          <a:effectRef idx="2">
+            <a:schemeClr val="accent1"/>
+          </a:effectRef>
+          <a:fontRef idx="minor">
+            <a:schemeClr val="lt1"/>
+          </a:fontRef>
+        </p:style>
+        <p:txBody>
+          <a:bodyPr rtlCol="0" anchor="ctr"/>
+          <a:lstStyle/>
+          <a:p>
+            <a:pPr algn="ctr"/>
+          </a:p>
+        </p:txBody>
+      </p:sp>
+      <p:sp>
+        <p:nvSpPr>
+          <p:cNvPr id="35" name="TextBox 34"/>
+          <p:cNvSpPr txBox="1"/>
+          <p:nvPr/>
+        </p:nvSpPr>
+        <p:spPr>
+          <a:xfrm>
+            <a:off x="6537959" y="3858768"/>
+            <a:ext cx="4983480" cy="365760"/>
+          </a:xfrm>
+          <a:prstGeom prst="rect">
+            <a:avLst/>
+          </a:prstGeom>
+          <a:noFill/>
+        </p:spPr>
+        <p:txBody>
+          <a:bodyPr wrap="square" anchor="t" lIns="0" rIns="0" tIns="0" bIns="0">
+            <a:spAutoFit/>
+          </a:bodyPr>
+          <a:lstStyle/>
+          <a:p>
+            <a:pPr algn="l">
+              <a:lnSpc>
+                <a:spcPct val="115000"/>
+              </a:lnSpc>
+            </a:pPr>
+            <a:r>
+              <a:rPr sz="1300" b="1">
+                <a:solidFill>
+                  <a:srgbClr val="1F2937"/>
+                </a:solidFill>
+                <a:latin typeface="微软雅黑"/>
+              </a:rPr>
+              <a:t>⑤  -O 窥孔优化</a:t>
+            </a:r>
+          </a:p>
+        </p:txBody>
+      </p:sp>
+      <p:sp>
+        <p:nvSpPr>
+          <p:cNvPr id="36" name="TextBox 35"/>
+          <p:cNvSpPr txBox="1"/>
+          <p:nvPr/>
+        </p:nvSpPr>
+        <p:spPr>
+          <a:xfrm>
+            <a:off x="6537959" y="4082796"/>
+            <a:ext cx="4983480" cy="365760"/>
+          </a:xfrm>
+          <a:prstGeom prst="rect">
+            <a:avLst/>
+          </a:prstGeom>
+          <a:noFill/>
+        </p:spPr>
+        <p:txBody>
+          <a:bodyPr wrap="square" anchor="t" lIns="0" rIns="0" tIns="0" bIns="0">
+            <a:spAutoFit/>
+          </a:bodyPr>
+          <a:lstStyle/>
+          <a:p>
+            <a:pPr algn="l">
+              <a:lnSpc>
+                <a:spcPct val="115000"/>
+              </a:lnSpc>
+            </a:pPr>
+            <a:r>
+              <a:rPr sz="1100" b="0">
+                <a:solidFill>
+                  <a:srgbClr val="64748B"/>
+                </a:solidFill>
+                <a:latin typeface="微软雅黑"/>
+              </a:rPr>
+              <a:t>常量条件跳转 / 删不可达 / 删空跳 / 删死临时量与死标号，共四轮。</a:t>
+            </a:r>
+          </a:p>
+          <a:p>
+            <a:pPr algn="l">
+              <a:lnSpc>
+                <a:spcPct val="115000"/>
+              </a:lnSpc>
+            </a:pPr>
+            <a:r>
+              <a:rPr sz="1100" b="0">
+                <a:solidFill>
+                  <a:srgbClr val="64748B"/>
+                </a:solidFill>
+                <a:latin typeface="微软雅黑"/>
+              </a:rPr>
+              <a:t>第一版把条件跳转当块结束，删掉 if 真分支 —— 16 个用例输出变了。</a:t>
+            </a:r>
+          </a:p>
+        </p:txBody>
+      </p:sp>
+      <p:sp>
+        <p:nvSpPr>
+          <p:cNvPr id="37" name="Oval 36"/>
+          <p:cNvSpPr/>
+          <p:nvPr/>
+        </p:nvSpPr>
+        <p:spPr>
+          <a:xfrm>
+            <a:off x="6263640" y="4837176"/>
+            <a:ext cx="100584" cy="100584"/>
+          </a:xfrm>
+          <a:prstGeom prst="ellipse">
+            <a:avLst/>
+          </a:prstGeom>
+          <a:solidFill>
+            <a:srgbClr val="2E6CE6"/>
+          </a:solidFill>
+          <a:ln>
+            <a:noFill/>
+          </a:ln>
+          <a:effectLst/>
+        </p:spPr>
+        <p:style>
+          <a:lnRef idx="1">
+            <a:schemeClr val="accent1"/>
+          </a:lnRef>
+          <a:fillRef idx="3">
+            <a:schemeClr val="accent1"/>
+          </a:fillRef>
+          <a:effectRef idx="2">
+            <a:schemeClr val="accent1"/>
+          </a:effectRef>
+          <a:fontRef idx="minor">
+            <a:schemeClr val="lt1"/>
+          </a:fontRef>
+        </p:style>
+        <p:txBody>
+          <a:bodyPr rtlCol="0" anchor="ctr"/>
+          <a:lstStyle/>
+          <a:p>
+            <a:pPr algn="ctr"/>
+          </a:p>
+        </p:txBody>
+      </p:sp>
+      <p:sp>
+        <p:nvSpPr>
+          <p:cNvPr id="38" name="TextBox 37"/>
+          <p:cNvSpPr txBox="1"/>
+          <p:nvPr/>
+        </p:nvSpPr>
+        <p:spPr>
+          <a:xfrm>
+            <a:off x="6537959" y="4754880"/>
+            <a:ext cx="4983480" cy="365760"/>
+          </a:xfrm>
+          <a:prstGeom prst="rect">
+            <a:avLst/>
+          </a:prstGeom>
+          <a:noFill/>
+        </p:spPr>
+        <p:txBody>
+          <a:bodyPr wrap="square" anchor="t" lIns="0" rIns="0" tIns="0" bIns="0">
+            <a:spAutoFit/>
+          </a:bodyPr>
+          <a:lstStyle/>
+          <a:p>
+            <a:pPr algn="l">
+              <a:lnSpc>
+                <a:spcPct val="115000"/>
+              </a:lnSpc>
+            </a:pPr>
+            <a:r>
+              <a:rPr sz="1300" b="1">
+                <a:solidFill>
+                  <a:srgbClr val="1F2937"/>
+                </a:solidFill>
+                <a:latin typeface="微软雅黑"/>
+              </a:rPr>
+              <a:t>⑥  持续集成</a:t>
+            </a:r>
+          </a:p>
+        </p:txBody>
+      </p:sp>
+      <p:sp>
+        <p:nvSpPr>
+          <p:cNvPr id="39" name="TextBox 38"/>
+          <p:cNvSpPr txBox="1"/>
+          <p:nvPr/>
+        </p:nvSpPr>
+        <p:spPr>
+          <a:xfrm>
+            <a:off x="6537959" y="4978908"/>
+            <a:ext cx="4983480" cy="365760"/>
+          </a:xfrm>
+          <a:prstGeom prst="rect">
+            <a:avLst/>
+          </a:prstGeom>
+          <a:noFill/>
+        </p:spPr>
+        <p:txBody>
+          <a:bodyPr wrap="square" anchor="t" lIns="0" rIns="0" tIns="0" bIns="0">
+            <a:spAutoFit/>
+          </a:bodyPr>
+          <a:lstStyle/>
+          <a:p>
+            <a:pPr algn="l">
+              <a:lnSpc>
+                <a:spcPct val="115000"/>
+              </a:lnSpc>
+            </a:pPr>
+            <a:r>
+              <a:rPr sz="1100" b="0">
+                <a:solidFill>
+                  <a:srgbClr val="64748B"/>
+                </a:solidFill>
+                <a:latin typeface="微软雅黑"/>
+              </a:rPr>
+              <a:t>windows-latest + MinGW-w64：工具链 → build.bat test → 五类产物 →</a:t>
+            </a:r>
+          </a:p>
+          <a:p>
+            <a:pPr algn="l">
+              <a:lnSpc>
+                <a:spcPct val="115000"/>
+              </a:lnSpc>
+            </a:pPr>
+            <a:r>
+              <a:rPr sz="1100" b="0">
+                <a:solidFill>
+                  <a:srgbClr val="64748B"/>
+                </a:solidFill>
+                <a:latin typeface="微软雅黑"/>
+              </a:rPr>
+              <a:t>-O 行为一致性冒烟。已在本机逐步骤复现，待补令牌权限启用。</a:t>
+            </a:r>
+          </a:p>
+        </p:txBody>
+      </p:sp>
+      <p:sp>
+        <p:nvSpPr>
+          <p:cNvPr id="40" name="Rectangle 39"/>
+          <p:cNvSpPr/>
+          <p:nvPr/>
+        </p:nvSpPr>
+        <p:spPr>
+          <a:xfrm>
+            <a:off x="685800" y="5687568"/>
+            <a:ext cx="10789920" cy="603504"/>
+          </a:xfrm>
+          <a:prstGeom prst="rect">
+            <a:avLst/>
+          </a:prstGeom>
+          <a:solidFill>
+            <a:srgbClr val="F6F9FF"/>
+          </a:solidFill>
+          <a:ln w="12700">
+            <a:solidFill>
+              <a:srgbClr val="C8DAF5"/>
+            </a:solidFill>
+          </a:ln>
+          <a:effectLst/>
+        </p:spPr>
+        <p:style>
+          <a:lnRef idx="1">
+            <a:schemeClr val="accent1"/>
+          </a:lnRef>
+          <a:fillRef idx="3">
+            <a:schemeClr val="accent1"/>
+          </a:fillRef>
+          <a:effectRef idx="2">
+            <a:schemeClr val="accent1"/>
+          </a:effectRef>
+          <a:fontRef idx="minor">
+            <a:schemeClr val="lt1"/>
+          </a:fontRef>
+        </p:style>
+        <p:txBody>
+          <a:bodyPr rtlCol="0" anchor="ctr"/>
+          <a:lstStyle/>
+          <a:p>
+            <a:pPr algn="ctr"/>
+          </a:p>
+        </p:txBody>
+      </p:sp>
+      <p:sp>
+        <p:nvSpPr>
+          <p:cNvPr id="41" name="TextBox 40"/>
+          <p:cNvSpPr txBox="1"/>
+          <p:nvPr/>
+        </p:nvSpPr>
+        <p:spPr>
+          <a:xfrm>
+            <a:off x="896112" y="5833872"/>
+            <a:ext cx="10332720" cy="310896"/>
+          </a:xfrm>
+          <a:prstGeom prst="rect">
+            <a:avLst/>
+          </a:prstGeom>
+          <a:noFill/>
+        </p:spPr>
+        <p:txBody>
+          <a:bodyPr wrap="square" anchor="t" lIns="0" rIns="0" tIns="0" bIns="0">
+            <a:spAutoFit/>
+          </a:bodyPr>
+          <a:lstStyle/>
+          <a:p>
+            <a:pPr algn="l">
+              <a:lnSpc>
+                <a:spcPct val="115000"/>
+              </a:lnSpc>
+            </a:pPr>
+            <a:r>
+              <a:rPr sz="1250" b="0">
                 <a:solidFill>
                   <a:srgbClr val="141F38"/>
                 </a:solidFill>
                 <a:latin typeface="微软雅黑"/>
               </a:rPr>
-              <a:t>假绿灯比红灯更危险</a:t>
-            </a:r>
-          </a:p>
-        </p:txBody>
-      </p:sp>
-      <p:sp>
-        <p:nvSpPr>
-          <p:cNvPr id="20" name="TextBox 19"/>
-          <p:cNvSpPr txBox="1"/>
-          <p:nvPr/>
-        </p:nvSpPr>
-        <p:spPr>
-          <a:xfrm>
-            <a:off x="1627632" y="5157216"/>
-            <a:ext cx="9601200" cy="640080"/>
-          </a:xfrm>
-          <a:prstGeom prst="rect">
-            <a:avLst/>
-          </a:prstGeom>
-          <a:noFill/>
-        </p:spPr>
-        <p:txBody>
-          <a:bodyPr wrap="square" anchor="t" lIns="0" rIns="0" tIns="0" bIns="0">
-            <a:spAutoFit/>
-          </a:bodyPr>
-          <a:lstStyle/>
-          <a:p>
-            <a:pPr algn="l">
-              <a:lnSpc>
-                <a:spcPct val="135000"/>
-              </a:lnSpc>
-            </a:pPr>
-            <a:r>
-              <a:rPr sz="1150" b="0">
-                <a:solidFill>
-                  <a:srgbClr val="64748B"/>
-                </a:solidFill>
-                <a:latin typeface="微软雅黑"/>
-              </a:rPr>
-              <a:t>语义模块最初四轮提交都"能编译"，实际是文件放错目录、没进编译列表，</a:t>
-            </a:r>
-          </a:p>
-          <a:p>
-            <a:pPr algn="l">
-              <a:lnSpc>
-                <a:spcPct val="135000"/>
-              </a:lnSpc>
-            </a:pPr>
-            <a:r>
-              <a:rPr sz="1150" b="0">
-                <a:solidFill>
-                  <a:srgbClr val="64748B"/>
-                </a:solidFill>
-                <a:latin typeface="微软雅黑"/>
-              </a:rPr>
-              <a:t>等于什么都没测。最后靠 build.bat list 的文件数才查出来。</a:t>
+              <a:t>唯一不变量：默认编译路径的产物逐字不变 —— 18 个 quad 基线、30 个 codegen 基线、27 个语义基线一字节未改。</a:t>
             </a:r>
           </a:p>
         </p:txBody>
@@ -14783,6 +15847,859 @@
         <p:spPr>
           <a:xfrm>
             <a:off x="0" y="0"/>
+            <a:ext cx="12191695" cy="54864"/>
+          </a:xfrm>
+          <a:prstGeom prst="rect">
+            <a:avLst/>
+          </a:prstGeom>
+          <a:solidFill>
+            <a:srgbClr val="2E6CE6"/>
+          </a:solidFill>
+          <a:ln>
+            <a:noFill/>
+          </a:ln>
+          <a:effectLst/>
+        </p:spPr>
+        <p:style>
+          <a:lnRef idx="1">
+            <a:schemeClr val="accent1"/>
+          </a:lnRef>
+          <a:fillRef idx="3">
+            <a:schemeClr val="accent1"/>
+          </a:fillRef>
+          <a:effectRef idx="2">
+            <a:schemeClr val="accent1"/>
+          </a:effectRef>
+          <a:fontRef idx="minor">
+            <a:schemeClr val="lt1"/>
+          </a:fontRef>
+        </p:style>
+        <p:txBody>
+          <a:bodyPr rtlCol="0" anchor="ctr"/>
+          <a:lstStyle/>
+          <a:p>
+            <a:pPr algn="ctr"/>
+          </a:p>
+        </p:txBody>
+      </p:sp>
+      <p:sp>
+        <p:nvSpPr>
+          <p:cNvPr id="3" name="TextBox 2"/>
+          <p:cNvSpPr txBox="1"/>
+          <p:nvPr/>
+        </p:nvSpPr>
+        <p:spPr>
+          <a:xfrm>
+            <a:off x="685800" y="384048"/>
+            <a:ext cx="10789920" cy="256032"/>
+          </a:xfrm>
+          <a:prstGeom prst="rect">
+            <a:avLst/>
+          </a:prstGeom>
+          <a:noFill/>
+        </p:spPr>
+        <p:txBody>
+          <a:bodyPr wrap="square" anchor="t" lIns="0" rIns="0" tIns="0" bIns="0">
+            <a:spAutoFit/>
+          </a:bodyPr>
+          <a:lstStyle/>
+          <a:p>
+            <a:pPr algn="l">
+              <a:lnSpc>
+                <a:spcPct val="115000"/>
+              </a:lnSpc>
+            </a:pPr>
+            <a:r>
+              <a:rPr sz="1150" b="1">
+                <a:solidFill>
+                  <a:srgbClr val="2E6CE6"/>
+                </a:solidFill>
+                <a:latin typeface="微软雅黑"/>
+              </a:rPr>
+              <a:t>16  项目总结</a:t>
+            </a:r>
+          </a:p>
+        </p:txBody>
+      </p:sp>
+      <p:sp>
+        <p:nvSpPr>
+          <p:cNvPr id="4" name="TextBox 3"/>
+          <p:cNvSpPr txBox="1"/>
+          <p:nvPr/>
+        </p:nvSpPr>
+        <p:spPr>
+          <a:xfrm>
+            <a:off x="685800" y="658368"/>
+            <a:ext cx="10789920" cy="548640"/>
+          </a:xfrm>
+          <a:prstGeom prst="rect">
+            <a:avLst/>
+          </a:prstGeom>
+          <a:noFill/>
+        </p:spPr>
+        <p:txBody>
+          <a:bodyPr wrap="square" anchor="t" lIns="0" rIns="0" tIns="0" bIns="0">
+            <a:spAutoFit/>
+          </a:bodyPr>
+          <a:lstStyle/>
+          <a:p>
+            <a:pPr algn="l">
+              <a:lnSpc>
+                <a:spcPct val="115000"/>
+              </a:lnSpc>
+            </a:pPr>
+            <a:r>
+              <a:rPr sz="2700" b="1">
+                <a:solidFill>
+                  <a:srgbClr val="141F38"/>
+                </a:solidFill>
+                <a:latin typeface="微软雅黑"/>
+              </a:rPr>
+              <a:t>三个值得讲的收获</a:t>
+            </a:r>
+          </a:p>
+        </p:txBody>
+      </p:sp>
+      <p:sp>
+        <p:nvSpPr>
+          <p:cNvPr id="5" name="Rectangle 4"/>
+          <p:cNvSpPr/>
+          <p:nvPr/>
+        </p:nvSpPr>
+        <p:spPr>
+          <a:xfrm>
+            <a:off x="704088" y="1298448"/>
+            <a:ext cx="822960" cy="41148"/>
+          </a:xfrm>
+          <a:prstGeom prst="rect">
+            <a:avLst/>
+          </a:prstGeom>
+          <a:solidFill>
+            <a:srgbClr val="2E6CE6"/>
+          </a:solidFill>
+          <a:ln>
+            <a:noFill/>
+          </a:ln>
+          <a:effectLst/>
+        </p:spPr>
+        <p:style>
+          <a:lnRef idx="1">
+            <a:schemeClr val="accent1"/>
+          </a:lnRef>
+          <a:fillRef idx="3">
+            <a:schemeClr val="accent1"/>
+          </a:fillRef>
+          <a:effectRef idx="2">
+            <a:schemeClr val="accent1"/>
+          </a:effectRef>
+          <a:fontRef idx="minor">
+            <a:schemeClr val="lt1"/>
+          </a:fontRef>
+        </p:style>
+        <p:txBody>
+          <a:bodyPr rtlCol="0" anchor="ctr"/>
+          <a:lstStyle/>
+          <a:p>
+            <a:pPr algn="ctr"/>
+          </a:p>
+        </p:txBody>
+      </p:sp>
+      <p:sp>
+        <p:nvSpPr>
+          <p:cNvPr id="6" name="Rectangle 5"/>
+          <p:cNvSpPr/>
+          <p:nvPr/>
+        </p:nvSpPr>
+        <p:spPr>
+          <a:xfrm>
+            <a:off x="685800" y="1627632"/>
+            <a:ext cx="10789920" cy="1298448"/>
+          </a:xfrm>
+          <a:prstGeom prst="rect">
+            <a:avLst/>
+          </a:prstGeom>
+          <a:solidFill>
+            <a:srgbClr val="FFFFFF"/>
+          </a:solidFill>
+          <a:ln w="9525">
+            <a:solidFill>
+              <a:srgbClr val="D8E0EA"/>
+            </a:solidFill>
+          </a:ln>
+          <a:effectLst/>
+        </p:spPr>
+        <p:style>
+          <a:lnRef idx="1">
+            <a:schemeClr val="accent1"/>
+          </a:lnRef>
+          <a:fillRef idx="3">
+            <a:schemeClr val="accent1"/>
+          </a:fillRef>
+          <a:effectRef idx="2">
+            <a:schemeClr val="accent1"/>
+          </a:effectRef>
+          <a:fontRef idx="minor">
+            <a:schemeClr val="lt1"/>
+          </a:fontRef>
+        </p:style>
+        <p:txBody>
+          <a:bodyPr rtlCol="0" anchor="ctr"/>
+          <a:lstStyle/>
+          <a:p>
+            <a:pPr algn="ctr"/>
+          </a:p>
+        </p:txBody>
+      </p:sp>
+      <p:sp>
+        <p:nvSpPr>
+          <p:cNvPr id="7" name="Rectangle 6"/>
+          <p:cNvSpPr/>
+          <p:nvPr/>
+        </p:nvSpPr>
+        <p:spPr>
+          <a:xfrm>
+            <a:off x="685800" y="1627632"/>
+            <a:ext cx="54864" cy="1298448"/>
+          </a:xfrm>
+          <a:prstGeom prst="rect">
+            <a:avLst/>
+          </a:prstGeom>
+          <a:solidFill>
+            <a:srgbClr val="2E6CE6"/>
+          </a:solidFill>
+          <a:ln>
+            <a:noFill/>
+          </a:ln>
+          <a:effectLst/>
+        </p:spPr>
+        <p:style>
+          <a:lnRef idx="1">
+            <a:schemeClr val="accent1"/>
+          </a:lnRef>
+          <a:fillRef idx="3">
+            <a:schemeClr val="accent1"/>
+          </a:fillRef>
+          <a:effectRef idx="2">
+            <a:schemeClr val="accent1"/>
+          </a:effectRef>
+          <a:fontRef idx="minor">
+            <a:schemeClr val="lt1"/>
+          </a:fontRef>
+        </p:style>
+        <p:txBody>
+          <a:bodyPr rtlCol="0" anchor="ctr"/>
+          <a:lstStyle/>
+          <a:p>
+            <a:pPr algn="ctr"/>
+          </a:p>
+        </p:txBody>
+      </p:sp>
+      <p:sp>
+        <p:nvSpPr>
+          <p:cNvPr id="8" name="TextBox 7"/>
+          <p:cNvSpPr txBox="1"/>
+          <p:nvPr/>
+        </p:nvSpPr>
+        <p:spPr>
+          <a:xfrm>
+            <a:off x="932688" y="1810512"/>
+            <a:ext cx="640080" cy="457200"/>
+          </a:xfrm>
+          <a:prstGeom prst="rect">
+            <a:avLst/>
+          </a:prstGeom>
+          <a:noFill/>
+        </p:spPr>
+        <p:txBody>
+          <a:bodyPr wrap="square" anchor="t" lIns="0" rIns="0" tIns="0" bIns="0">
+            <a:spAutoFit/>
+          </a:bodyPr>
+          <a:lstStyle/>
+          <a:p>
+            <a:pPr algn="l">
+              <a:lnSpc>
+                <a:spcPct val="115000"/>
+              </a:lnSpc>
+            </a:pPr>
+            <a:r>
+              <a:rPr sz="2200" b="1">
+                <a:solidFill>
+                  <a:srgbClr val="2E6CE6"/>
+                </a:solidFill>
+                <a:latin typeface="微软雅黑"/>
+              </a:rPr>
+              <a:t>01</a:t>
+            </a:r>
+          </a:p>
+        </p:txBody>
+      </p:sp>
+      <p:sp>
+        <p:nvSpPr>
+          <p:cNvPr id="9" name="TextBox 8"/>
+          <p:cNvSpPr txBox="1"/>
+          <p:nvPr/>
+        </p:nvSpPr>
+        <p:spPr>
+          <a:xfrm>
+            <a:off x="1627632" y="1810512"/>
+            <a:ext cx="9509760" cy="292608"/>
+          </a:xfrm>
+          <a:prstGeom prst="rect">
+            <a:avLst/>
+          </a:prstGeom>
+          <a:noFill/>
+        </p:spPr>
+        <p:txBody>
+          <a:bodyPr wrap="square" anchor="t" lIns="0" rIns="0" tIns="0" bIns="0">
+            <a:spAutoFit/>
+          </a:bodyPr>
+          <a:lstStyle/>
+          <a:p>
+            <a:pPr algn="l">
+              <a:lnSpc>
+                <a:spcPct val="115000"/>
+              </a:lnSpc>
+            </a:pPr>
+            <a:r>
+              <a:rPr sz="1500" b="1">
+                <a:solidFill>
+                  <a:srgbClr val="141F38"/>
+                </a:solidFill>
+                <a:latin typeface="微软雅黑"/>
+              </a:rPr>
+              <a:t>中间产物落盘，是最便宜的调试手段</a:t>
+            </a:r>
+          </a:p>
+        </p:txBody>
+      </p:sp>
+      <p:sp>
+        <p:nvSpPr>
+          <p:cNvPr id="10" name="TextBox 9"/>
+          <p:cNvSpPr txBox="1"/>
+          <p:nvPr/>
+        </p:nvSpPr>
+        <p:spPr>
+          <a:xfrm>
+            <a:off x="1627632" y="2194560"/>
+            <a:ext cx="9601200" cy="640080"/>
+          </a:xfrm>
+          <a:prstGeom prst="rect">
+            <a:avLst/>
+          </a:prstGeom>
+          <a:noFill/>
+        </p:spPr>
+        <p:txBody>
+          <a:bodyPr wrap="square" anchor="t" lIns="0" rIns="0" tIns="0" bIns="0">
+            <a:spAutoFit/>
+          </a:bodyPr>
+          <a:lstStyle/>
+          <a:p>
+            <a:pPr algn="l">
+              <a:lnSpc>
+                <a:spcPct val="135000"/>
+              </a:lnSpc>
+            </a:pPr>
+            <a:r>
+              <a:rPr sz="1150" b="0">
+                <a:solidFill>
+                  <a:srgbClr val="64748B"/>
+                </a:solidFill>
+                <a:latin typeface="微软雅黑"/>
+              </a:rPr>
+              <a:t>把 Token、AST、符号表、四元式、汇编全部写成文件，出问题时不用打断点猜。</a:t>
+            </a:r>
+          </a:p>
+          <a:p>
+            <a:pPr algn="l">
+              <a:lnSpc>
+                <a:spcPct val="135000"/>
+              </a:lnSpc>
+            </a:pPr>
+            <a:r>
+              <a:rPr sz="1150" b="0">
+                <a:solidFill>
+                  <a:srgbClr val="64748B"/>
+                </a:solidFill>
+                <a:latin typeface="微软雅黑"/>
+              </a:rPr>
+              <a:t>答辩时也是最好的证据：说"类型转换插对了"，直接把 .quad.txt 和 .asm 并排一放。</a:t>
+            </a:r>
+          </a:p>
+        </p:txBody>
+      </p:sp>
+      <p:sp>
+        <p:nvSpPr>
+          <p:cNvPr id="11" name="Rectangle 10"/>
+          <p:cNvSpPr/>
+          <p:nvPr/>
+        </p:nvSpPr>
+        <p:spPr>
+          <a:xfrm>
+            <a:off x="685800" y="3108960"/>
+            <a:ext cx="10789920" cy="1298448"/>
+          </a:xfrm>
+          <a:prstGeom prst="rect">
+            <a:avLst/>
+          </a:prstGeom>
+          <a:solidFill>
+            <a:srgbClr val="FFFFFF"/>
+          </a:solidFill>
+          <a:ln w="9525">
+            <a:solidFill>
+              <a:srgbClr val="D8E0EA"/>
+            </a:solidFill>
+          </a:ln>
+          <a:effectLst/>
+        </p:spPr>
+        <p:style>
+          <a:lnRef idx="1">
+            <a:schemeClr val="accent1"/>
+          </a:lnRef>
+          <a:fillRef idx="3">
+            <a:schemeClr val="accent1"/>
+          </a:fillRef>
+          <a:effectRef idx="2">
+            <a:schemeClr val="accent1"/>
+          </a:effectRef>
+          <a:fontRef idx="minor">
+            <a:schemeClr val="lt1"/>
+          </a:fontRef>
+        </p:style>
+        <p:txBody>
+          <a:bodyPr rtlCol="0" anchor="ctr"/>
+          <a:lstStyle/>
+          <a:p>
+            <a:pPr algn="ctr"/>
+          </a:p>
+        </p:txBody>
+      </p:sp>
+      <p:sp>
+        <p:nvSpPr>
+          <p:cNvPr id="12" name="Rectangle 11"/>
+          <p:cNvSpPr/>
+          <p:nvPr/>
+        </p:nvSpPr>
+        <p:spPr>
+          <a:xfrm>
+            <a:off x="685800" y="3108960"/>
+            <a:ext cx="54864" cy="1298448"/>
+          </a:xfrm>
+          <a:prstGeom prst="rect">
+            <a:avLst/>
+          </a:prstGeom>
+          <a:solidFill>
+            <a:srgbClr val="0EA5A5"/>
+          </a:solidFill>
+          <a:ln>
+            <a:noFill/>
+          </a:ln>
+          <a:effectLst/>
+        </p:spPr>
+        <p:style>
+          <a:lnRef idx="1">
+            <a:schemeClr val="accent1"/>
+          </a:lnRef>
+          <a:fillRef idx="3">
+            <a:schemeClr val="accent1"/>
+          </a:fillRef>
+          <a:effectRef idx="2">
+            <a:schemeClr val="accent1"/>
+          </a:effectRef>
+          <a:fontRef idx="minor">
+            <a:schemeClr val="lt1"/>
+          </a:fontRef>
+        </p:style>
+        <p:txBody>
+          <a:bodyPr rtlCol="0" anchor="ctr"/>
+          <a:lstStyle/>
+          <a:p>
+            <a:pPr algn="ctr"/>
+          </a:p>
+        </p:txBody>
+      </p:sp>
+      <p:sp>
+        <p:nvSpPr>
+          <p:cNvPr id="13" name="TextBox 12"/>
+          <p:cNvSpPr txBox="1"/>
+          <p:nvPr/>
+        </p:nvSpPr>
+        <p:spPr>
+          <a:xfrm>
+            <a:off x="932688" y="3291840"/>
+            <a:ext cx="640080" cy="457200"/>
+          </a:xfrm>
+          <a:prstGeom prst="rect">
+            <a:avLst/>
+          </a:prstGeom>
+          <a:noFill/>
+        </p:spPr>
+        <p:txBody>
+          <a:bodyPr wrap="square" anchor="t" lIns="0" rIns="0" tIns="0" bIns="0">
+            <a:spAutoFit/>
+          </a:bodyPr>
+          <a:lstStyle/>
+          <a:p>
+            <a:pPr algn="l">
+              <a:lnSpc>
+                <a:spcPct val="115000"/>
+              </a:lnSpc>
+            </a:pPr>
+            <a:r>
+              <a:rPr sz="2200" b="1">
+                <a:solidFill>
+                  <a:srgbClr val="0EA5A5"/>
+                </a:solidFill>
+                <a:latin typeface="微软雅黑"/>
+              </a:rPr>
+              <a:t>02</a:t>
+            </a:r>
+          </a:p>
+        </p:txBody>
+      </p:sp>
+      <p:sp>
+        <p:nvSpPr>
+          <p:cNvPr id="14" name="TextBox 13"/>
+          <p:cNvSpPr txBox="1"/>
+          <p:nvPr/>
+        </p:nvSpPr>
+        <p:spPr>
+          <a:xfrm>
+            <a:off x="1627632" y="3291840"/>
+            <a:ext cx="9509760" cy="292608"/>
+          </a:xfrm>
+          <a:prstGeom prst="rect">
+            <a:avLst/>
+          </a:prstGeom>
+          <a:noFill/>
+        </p:spPr>
+        <p:txBody>
+          <a:bodyPr wrap="square" anchor="t" lIns="0" rIns="0" tIns="0" bIns="0">
+            <a:spAutoFit/>
+          </a:bodyPr>
+          <a:lstStyle/>
+          <a:p>
+            <a:pPr algn="l">
+              <a:lnSpc>
+                <a:spcPct val="115000"/>
+              </a:lnSpc>
+            </a:pPr>
+            <a:r>
+              <a:rPr sz="1500" b="1">
+                <a:solidFill>
+                  <a:srgbClr val="141F38"/>
+                </a:solidFill>
+                <a:latin typeface="微软雅黑"/>
+              </a:rPr>
+              <a:t>测试要锁住每一层的结构，而不是只看最终输出</a:t>
+            </a:r>
+          </a:p>
+        </p:txBody>
+      </p:sp>
+      <p:sp>
+        <p:nvSpPr>
+          <p:cNvPr id="15" name="TextBox 14"/>
+          <p:cNvSpPr txBox="1"/>
+          <p:nvPr/>
+        </p:nvSpPr>
+        <p:spPr>
+          <a:xfrm>
+            <a:off x="1627632" y="3675888"/>
+            <a:ext cx="9601200" cy="640080"/>
+          </a:xfrm>
+          <a:prstGeom prst="rect">
+            <a:avLst/>
+          </a:prstGeom>
+          <a:noFill/>
+        </p:spPr>
+        <p:txBody>
+          <a:bodyPr wrap="square" anchor="t" lIns="0" rIns="0" tIns="0" bIns="0">
+            <a:spAutoFit/>
+          </a:bodyPr>
+          <a:lstStyle/>
+          <a:p>
+            <a:pPr algn="l">
+              <a:lnSpc>
+                <a:spcPct val="135000"/>
+              </a:lnSpc>
+            </a:pPr>
+            <a:r>
+              <a:rPr sz="1150" b="0">
+                <a:solidFill>
+                  <a:srgbClr val="64748B"/>
+                </a:solidFill>
+                <a:latin typeface="微软雅黑"/>
+              </a:rPr>
+              <a:t>端到端只比 stdout 的话，求值顺序错了、临时变量编号乱了，输出照样是对的。</a:t>
+            </a:r>
+          </a:p>
+          <a:p>
+            <a:pPr algn="l">
+              <a:lnSpc>
+                <a:spcPct val="135000"/>
+              </a:lnSpc>
+            </a:pPr>
+            <a:r>
+              <a:rPr sz="1150" b="0">
+                <a:solidFill>
+                  <a:srgbClr val="64748B"/>
+                </a:solidFill>
+                <a:latin typeface="微软雅黑"/>
+              </a:rPr>
+              <a:t>所以 11 套回归各自锁自己那一层的产物；语义甚至锁到"行列号 + 措辞"。</a:t>
+            </a:r>
+          </a:p>
+        </p:txBody>
+      </p:sp>
+      <p:sp>
+        <p:nvSpPr>
+          <p:cNvPr id="16" name="Rectangle 15"/>
+          <p:cNvSpPr/>
+          <p:nvPr/>
+        </p:nvSpPr>
+        <p:spPr>
+          <a:xfrm>
+            <a:off x="685800" y="4590288"/>
+            <a:ext cx="10789920" cy="1298448"/>
+          </a:xfrm>
+          <a:prstGeom prst="rect">
+            <a:avLst/>
+          </a:prstGeom>
+          <a:solidFill>
+            <a:srgbClr val="FFFFFF"/>
+          </a:solidFill>
+          <a:ln w="9525">
+            <a:solidFill>
+              <a:srgbClr val="D8E0EA"/>
+            </a:solidFill>
+          </a:ln>
+          <a:effectLst/>
+        </p:spPr>
+        <p:style>
+          <a:lnRef idx="1">
+            <a:schemeClr val="accent1"/>
+          </a:lnRef>
+          <a:fillRef idx="3">
+            <a:schemeClr val="accent1"/>
+          </a:fillRef>
+          <a:effectRef idx="2">
+            <a:schemeClr val="accent1"/>
+          </a:effectRef>
+          <a:fontRef idx="minor">
+            <a:schemeClr val="lt1"/>
+          </a:fontRef>
+        </p:style>
+        <p:txBody>
+          <a:bodyPr rtlCol="0" anchor="ctr"/>
+          <a:lstStyle/>
+          <a:p>
+            <a:pPr algn="ctr"/>
+          </a:p>
+        </p:txBody>
+      </p:sp>
+      <p:sp>
+        <p:nvSpPr>
+          <p:cNvPr id="17" name="Rectangle 16"/>
+          <p:cNvSpPr/>
+          <p:nvPr/>
+        </p:nvSpPr>
+        <p:spPr>
+          <a:xfrm>
+            <a:off x="685800" y="4590288"/>
+            <a:ext cx="54864" cy="1298448"/>
+          </a:xfrm>
+          <a:prstGeom prst="rect">
+            <a:avLst/>
+          </a:prstGeom>
+          <a:solidFill>
+            <a:srgbClr val="C2770A"/>
+          </a:solidFill>
+          <a:ln>
+            <a:noFill/>
+          </a:ln>
+          <a:effectLst/>
+        </p:spPr>
+        <p:style>
+          <a:lnRef idx="1">
+            <a:schemeClr val="accent1"/>
+          </a:lnRef>
+          <a:fillRef idx="3">
+            <a:schemeClr val="accent1"/>
+          </a:fillRef>
+          <a:effectRef idx="2">
+            <a:schemeClr val="accent1"/>
+          </a:effectRef>
+          <a:fontRef idx="minor">
+            <a:schemeClr val="lt1"/>
+          </a:fontRef>
+        </p:style>
+        <p:txBody>
+          <a:bodyPr rtlCol="0" anchor="ctr"/>
+          <a:lstStyle/>
+          <a:p>
+            <a:pPr algn="ctr"/>
+          </a:p>
+        </p:txBody>
+      </p:sp>
+      <p:sp>
+        <p:nvSpPr>
+          <p:cNvPr id="18" name="TextBox 17"/>
+          <p:cNvSpPr txBox="1"/>
+          <p:nvPr/>
+        </p:nvSpPr>
+        <p:spPr>
+          <a:xfrm>
+            <a:off x="932688" y="4773168"/>
+            <a:ext cx="640080" cy="457200"/>
+          </a:xfrm>
+          <a:prstGeom prst="rect">
+            <a:avLst/>
+          </a:prstGeom>
+          <a:noFill/>
+        </p:spPr>
+        <p:txBody>
+          <a:bodyPr wrap="square" anchor="t" lIns="0" rIns="0" tIns="0" bIns="0">
+            <a:spAutoFit/>
+          </a:bodyPr>
+          <a:lstStyle/>
+          <a:p>
+            <a:pPr algn="l">
+              <a:lnSpc>
+                <a:spcPct val="115000"/>
+              </a:lnSpc>
+            </a:pPr>
+            <a:r>
+              <a:rPr sz="2200" b="1">
+                <a:solidFill>
+                  <a:srgbClr val="C2770A"/>
+                </a:solidFill>
+                <a:latin typeface="微软雅黑"/>
+              </a:rPr>
+              <a:t>03</a:t>
+            </a:r>
+          </a:p>
+        </p:txBody>
+      </p:sp>
+      <p:sp>
+        <p:nvSpPr>
+          <p:cNvPr id="19" name="TextBox 18"/>
+          <p:cNvSpPr txBox="1"/>
+          <p:nvPr/>
+        </p:nvSpPr>
+        <p:spPr>
+          <a:xfrm>
+            <a:off x="1627632" y="4773168"/>
+            <a:ext cx="9509760" cy="292608"/>
+          </a:xfrm>
+          <a:prstGeom prst="rect">
+            <a:avLst/>
+          </a:prstGeom>
+          <a:noFill/>
+        </p:spPr>
+        <p:txBody>
+          <a:bodyPr wrap="square" anchor="t" lIns="0" rIns="0" tIns="0" bIns="0">
+            <a:spAutoFit/>
+          </a:bodyPr>
+          <a:lstStyle/>
+          <a:p>
+            <a:pPr algn="l">
+              <a:lnSpc>
+                <a:spcPct val="115000"/>
+              </a:lnSpc>
+            </a:pPr>
+            <a:r>
+              <a:rPr sz="1500" b="1">
+                <a:solidFill>
+                  <a:srgbClr val="141F38"/>
+                </a:solidFill>
+                <a:latin typeface="微软雅黑"/>
+              </a:rPr>
+              <a:t>假绿灯比红灯更危险</a:t>
+            </a:r>
+          </a:p>
+        </p:txBody>
+      </p:sp>
+      <p:sp>
+        <p:nvSpPr>
+          <p:cNvPr id="20" name="TextBox 19"/>
+          <p:cNvSpPr txBox="1"/>
+          <p:nvPr/>
+        </p:nvSpPr>
+        <p:spPr>
+          <a:xfrm>
+            <a:off x="1627632" y="5157216"/>
+            <a:ext cx="9601200" cy="640080"/>
+          </a:xfrm>
+          <a:prstGeom prst="rect">
+            <a:avLst/>
+          </a:prstGeom>
+          <a:noFill/>
+        </p:spPr>
+        <p:txBody>
+          <a:bodyPr wrap="square" anchor="t" lIns="0" rIns="0" tIns="0" bIns="0">
+            <a:spAutoFit/>
+          </a:bodyPr>
+          <a:lstStyle/>
+          <a:p>
+            <a:pPr algn="l">
+              <a:lnSpc>
+                <a:spcPct val="135000"/>
+              </a:lnSpc>
+            </a:pPr>
+            <a:r>
+              <a:rPr sz="1150" b="0">
+                <a:solidFill>
+                  <a:srgbClr val="64748B"/>
+                </a:solidFill>
+                <a:latin typeface="微软雅黑"/>
+              </a:rPr>
+              <a:t>语义模块最初四轮提交都"能编译"，实际是文件放错目录、没进编译列表，</a:t>
+            </a:r>
+          </a:p>
+          <a:p>
+            <a:pPr algn="l">
+              <a:lnSpc>
+                <a:spcPct val="135000"/>
+              </a:lnSpc>
+            </a:pPr>
+            <a:r>
+              <a:rPr sz="1150" b="0">
+                <a:solidFill>
+                  <a:srgbClr val="64748B"/>
+                </a:solidFill>
+                <a:latin typeface="微软雅黑"/>
+              </a:rPr>
+              <a:t>等于什么都没测。最后靠 build.bat list 的文件数才查出来。</a:t>
+            </a:r>
+          </a:p>
+        </p:txBody>
+      </p:sp>
+    </p:spTree>
+  </p:cSld>
+  <p:clrMapOvr>
+    <a:masterClrMapping/>
+  </p:clrMapOvr>
+</p:sld>
+</file>
+
+<file path=ppt/slides/slide18.xml><?xml version="1.0" encoding="utf-8"?>
+<p:sld xmlns:a="http://schemas.openxmlformats.org/drawingml/2006/main" xmlns:p="http://schemas.openxmlformats.org/presentationml/2006/main" xmlns:r="http://schemas.openxmlformats.org/officeDocument/2006/relationships">
+  <p:cSld>
+    <p:spTree>
+      <p:nvGrpSpPr>
+        <p:cNvPr id="1" name=""/>
+        <p:cNvGrpSpPr/>
+        <p:nvPr/>
+      </p:nvGrpSpPr>
+      <p:grpSpPr/>
+      <p:sp>
+        <p:nvSpPr>
+          <p:cNvPr id="2" name="Rectangle 1"/>
+          <p:cNvSpPr/>
+          <p:nvPr/>
+        </p:nvSpPr>
+        <p:spPr>
+          <a:xfrm>
+            <a:off x="0" y="0"/>
             <a:ext cx="12191695" cy="6858000"/>
           </a:xfrm>
           <a:prstGeom prst="rect">
@@ -15379,7 +17296,7 @@
                 </a:solidFill>
                 <a:latin typeface="微软雅黑"/>
               </a:rPr>
-              <a:t>8,129</a:t>
+              <a:t>8,919</a:t>
             </a:r>
           </a:p>
         </p:txBody>
@@ -15434,7 +17351,7 @@
                 </a:solidFill>
                 <a:latin typeface="微软雅黑"/>
               </a:rPr>
-              <a:t>10 个 .cpp + 9 个头文件</a:t>
+              <a:t>11 个 .cpp + 10 个头文件</a:t>
             </a:r>
           </a:p>
         </p:txBody>
@@ -15747,7 +17664,7 @@
                 </a:solidFill>
                 <a:latin typeface="微软雅黑"/>
               </a:rPr>
-              <a:t>126</a:t>
+              <a:t>135</a:t>
             </a:r>
           </a:p>
         </p:txBody>
@@ -16791,7 +18708,7 @@
                 </a:solidFill>
                 <a:latin typeface="微软雅黑"/>
               </a:rPr>
-              <a:t>本 PPT（17 页）+ docs/项目总结.md</a:t>
+              <a:t>本 PPT（18 页）+ docs/项目总结.md（901 行）</a:t>
             </a:r>
           </a:p>
         </p:txBody>
@@ -22231,7 +24148,7 @@
                 </a:solidFill>
                 <a:latin typeface="微软雅黑"/>
               </a:rPr>
-              <a:t>五张分表 + 作用域栈，让每次查名都只看得见该看见的</a:t>
+              <a:t>七张分表 + 作用域栈，让每次查名都只看得见该看见的</a:t>
             </a:r>
           </a:p>
         </p:txBody>
@@ -22928,7 +24845,7 @@
                 </a:solidFill>
                 <a:latin typeface="微软雅黑"/>
               </a:rPr>
-              <a:t>RecBuiltinTypes</a:t>
+              <a:t>RecBuiltinTypes / RecArrayType</a:t>
             </a:r>
           </a:p>
           <a:p>
@@ -22944,7 +24861,7 @@
                 </a:solidFill>
                 <a:latin typeface="微软雅黑"/>
               </a:rPr>
-              <a:t>5 个内建类型 × 字节宽度</a:t>
+              <a:t>5 个内建 + 数组类型 × 宽度</a:t>
             </a:r>
           </a:p>
         </p:txBody>
@@ -23374,7 +25291,7 @@
                 </a:solidFill>
                 <a:latin typeface="微软雅黑"/>
               </a:rPr>
-              <a:t>if / while 生成的</a:t>
+              <a:t>由 IR 的 LABEL 四元式登记</a:t>
             </a:r>
           </a:p>
           <a:p>
@@ -23834,7 +25751,7 @@
                 </a:solidFill>
                 <a:latin typeface="微软雅黑"/>
               </a:rPr>
-              <a:t>产物实样：.sym.txt 五节分表</a:t>
+              <a:t>产物实样：.sym.txt 六节分表</a:t>
             </a:r>
           </a:p>
         </p:txBody>
@@ -23953,11 +25870,11 @@
           <a:p>
             <a:pPr>
               <a:lnSpc>
-                <a:spcPct val="108000"/>
-              </a:lnSpc>
-            </a:pPr>
-            <a:r>
-              <a:rPr sz="1000">
+                <a:spcPct val="112000"/>
+              </a:lnSpc>
+            </a:pPr>
+            <a:r>
+              <a:rPr sz="950">
                 <a:solidFill>
                   <a:srgbClr val="64748B"/>
                 </a:solidFill>
@@ -23969,129 +25886,129 @@
           <a:p>
             <a:pPr>
               <a:lnSpc>
-                <a:spcPct val="108000"/>
-              </a:lnSpc>
-            </a:pPr>
-            <a:r>
-              <a:rPr sz="1000">
+                <a:spcPct val="112000"/>
+              </a:lnSpc>
+            </a:pPr>
+            <a:r>
+              <a:rPr sz="950">
                 <a:solidFill>
                   <a:srgbClr val="2D3A4A"/>
                 </a:solidFill>
                 <a:latin typeface="Consolas"/>
               </a:rPr>
-              <a:t>a : INT    @line 1  scope 1</a:t>
+              <a:t>a : INT  @line 1  scope 1   b : FLOAT  @line 2</a:t>
             </a:r>
           </a:p>
           <a:p>
             <a:pPr>
               <a:lnSpc>
-                <a:spcPct val="108000"/>
-              </a:lnSpc>
-            </a:pPr>
-            <a:r>
-              <a:rPr sz="1000">
+                <a:spcPct val="112000"/>
+              </a:lnSpc>
+            </a:pPr>
+            <a:r>
+              <a:rPr sz="950">
+                <a:solidFill>
+                  <a:srgbClr val="64748B"/>
+                </a:solidFill>
+                <a:latin typeface="Consolas"/>
+              </a:rPr>
+              <a:t>// --- Constants ---   1 : INT = 1  @line 3</a:t>
+            </a:r>
+          </a:p>
+          <a:p>
+            <a:pPr>
+              <a:lnSpc>
+                <a:spcPct val="112000"/>
+              </a:lnSpc>
+            </a:pPr>
+            <a:r>
+              <a:rPr sz="950">
+                <a:solidFill>
+                  <a:srgbClr val="64748B"/>
+                </a:solidFill>
+                <a:latin typeface="Consolas"/>
+              </a:rPr>
+              <a:t>// --- Types ---</a:t>
+            </a:r>
+          </a:p>
+          <a:p>
+            <a:pPr>
+              <a:lnSpc>
+                <a:spcPct val="112000"/>
+              </a:lnSpc>
+            </a:pPr>
+            <a:r>
+              <a:rPr sz="950">
                 <a:solidFill>
                   <a:srgbClr val="2D3A4A"/>
                 </a:solidFill>
                 <a:latin typeface="Consolas"/>
               </a:rPr>
-              <a:t>b : FLOAT  @line 2  scope 1</a:t>
+              <a:t>int : INT  size 4    char : CHAR  size 1</a:t>
             </a:r>
           </a:p>
           <a:p>
             <a:pPr>
               <a:lnSpc>
-                <a:spcPct val="108000"/>
-              </a:lnSpc>
-            </a:pPr>
-            <a:r>
-              <a:rPr sz="1000">
+                <a:spcPct val="112000"/>
+              </a:lnSpc>
+            </a:pPr>
+            <a:r>
+              <a:rPr sz="950">
+                <a:solidFill>
+                  <a:srgbClr val="2D3A4A"/>
+                </a:solidFill>
+                <a:latin typeface="Consolas"/>
+              </a:rPr>
+              <a:t>INT[5] : INT  array 5  size 20</a:t>
+            </a:r>
+          </a:p>
+          <a:p>
+            <a:pPr>
+              <a:lnSpc>
+                <a:spcPct val="112000"/>
+              </a:lnSpc>
+            </a:pPr>
+            <a:r>
+              <a:rPr sz="950">
                 <a:solidFill>
                   <a:srgbClr val="64748B"/>
                 </a:solidFill>
                 <a:latin typeface="Consolas"/>
               </a:rPr>
-              <a:t>// --- Constants ---</a:t>
+              <a:t>// --- Procedures ---   // --- Params ---</a:t>
             </a:r>
           </a:p>
           <a:p>
             <a:pPr>
               <a:lnSpc>
-                <a:spcPct val="108000"/>
-              </a:lnSpc>
-            </a:pPr>
-            <a:r>
-              <a:rPr sz="1000">
+                <a:spcPct val="112000"/>
+              </a:lnSpc>
+            </a:pPr>
+            <a:r>
+              <a:rPr sz="950">
                 <a:solidFill>
                   <a:srgbClr val="2D3A4A"/>
                 </a:solidFill>
                 <a:latin typeface="Consolas"/>
               </a:rPr>
-              <a:t>1 : INT = 1  @line 3</a:t>
+              <a:t>add.x : INT  #1  @line 6  scope 2</a:t>
             </a:r>
           </a:p>
           <a:p>
             <a:pPr>
               <a:lnSpc>
-                <a:spcPct val="108000"/>
-              </a:lnSpc>
-            </a:pPr>
-            <a:r>
-              <a:rPr sz="1000">
+                <a:spcPct val="112000"/>
+              </a:lnSpc>
+            </a:pPr>
+            <a:r>
+              <a:rPr sz="950">
                 <a:solidFill>
                   <a:srgbClr val="64748B"/>
                 </a:solidFill>
                 <a:latin typeface="Consolas"/>
               </a:rPr>
-              <a:t>// --- Types ---</a:t>
-            </a:r>
-          </a:p>
-          <a:p>
-            <a:pPr>
-              <a:lnSpc>
-                <a:spcPct val="108000"/>
-              </a:lnSpc>
-            </a:pPr>
-            <a:r>
-              <a:rPr sz="1000">
-                <a:solidFill>
-                  <a:srgbClr val="2D3A4A"/>
-                </a:solidFill>
-                <a:latin typeface="Consolas"/>
-              </a:rPr>
-              <a:t>int : INT  size 4      float : FLOAT  size 4</a:t>
-            </a:r>
-          </a:p>
-          <a:p>
-            <a:pPr>
-              <a:lnSpc>
-                <a:spcPct val="108000"/>
-              </a:lnSpc>
-            </a:pPr>
-            <a:r>
-              <a:rPr sz="1000">
-                <a:solidFill>
-                  <a:srgbClr val="2D3A4A"/>
-                </a:solidFill>
-                <a:latin typeface="Consolas"/>
-              </a:rPr>
-              <a:t>char : CHAR  size 1    void : VOID  size 0</a:t>
-            </a:r>
-          </a:p>
-          <a:p>
-            <a:pPr>
-              <a:lnSpc>
-                <a:spcPct val="108000"/>
-              </a:lnSpc>
-            </a:pPr>
-            <a:r>
-              <a:rPr sz="1000">
-                <a:solidFill>
-                  <a:srgbClr val="64748B"/>
-                </a:solidFill>
-                <a:latin typeface="Consolas"/>
-              </a:rPr>
-              <a:t>// --- Procedures ---   // --- Labels ---</a:t>
+              <a:t>// --- Labels ---   L1 @line 16   L2 @line 16</a:t>
             </a:r>
           </a:p>
         </p:txBody>
@@ -24176,7 +26093,7 @@
                 </a:solidFill>
                 <a:latin typeface="微软雅黑"/>
               </a:rPr>
-              <a:t>如注：Types 节此前恒空 —— RecType 是零调用的死接口。</a:t>
+              <a:t>注：Types / Params / Labels 三节此前恒空 —— RecType、形参表、RecLabel</a:t>
             </a:r>
           </a:p>
           <a:p>
@@ -24192,7 +26109,7 @@
                 </a:solidFill>
                 <a:latin typeface="微软雅黑"/>
               </a:rPr>
-              <a:t>现由 Analyze() 入口调 RecBuiltinTypes() 登记 5 行，</a:t>
+              <a:t>都没有调用点。现已接上，标号由 IR 的 LABEL 四元式登记，</a:t>
             </a:r>
           </a:p>
           <a:p>
@@ -24208,7 +26125,7 @@
                 </a:solidFill>
                 <a:latin typeface="微软雅黑"/>
               </a:rPr>
-              <a:t>m_iSize 与 codegen 的 movb / movl 口径一致。</a:t>
+              <a:t>故 dump 时机必须从语义之后挪到 IR 之后。</a:t>
             </a:r>
           </a:p>
         </p:txBody>
@@ -24875,7 +26792,7 @@
                 </a:solidFill>
                 <a:latin typeface="微软雅黑"/>
               </a:rPr>
-              <a:t>诊断实测：19 例语义回归逐字比对</a:t>
+              <a:t>诊断实测：27 例语义回归逐字比对</a:t>
             </a:r>
           </a:p>
         </p:txBody>

--- a/docs/MiniC编译器_答辩演示.pptx
+++ b/docs/MiniC编译器_答辩演示.pptx
@@ -3492,7 +3492,7 @@
                 </a:solidFill>
                 <a:latin typeface="微软雅黑"/>
               </a:rPr>
-              <a:t>21 个源文件 8,919 行 C++17  ·  135 个用例  ·  11 套回归全绿  ·  912 例随机差分零不一致</a:t>
+              <a:t>21 个源文件 9,302 行 C++17  ·  140 个用例  ·  11 套回归全绿  ·  912 例随机差分零不一致</a:t>
             </a:r>
           </a:p>
         </p:txBody>
@@ -7089,7 +7089,7 @@
                 </a:solidFill>
                 <a:latin typeface="微软雅黑"/>
               </a:rPr>
-              <a:t>27 例</a:t>
+              <a:t>32 例</a:t>
             </a:r>
           </a:p>
         </p:txBody>
@@ -13487,7 +13487,7 @@
                 </a:solidFill>
                 <a:latin typeface="微软雅黑"/>
               </a:rPr>
-              <a:t>语义已查实参个数 / return 类型 / 常量下标越界；变量下标越界不查</a:t>
+              <a:t>语义已查实参类型 / return / 常量下标越界；变量下标越界不查</a:t>
             </a:r>
           </a:p>
         </p:txBody>
@@ -13819,7 +13819,7 @@
                 </a:solidFill>
                 <a:latin typeface="微软雅黑"/>
               </a:rPr>
-              <a:t>代码生成不做寄存器分配与 CSE，只有常量折叠 + -O 窥孔</a:t>
+              <a:t>代码生成只做累加器直通与立即数直用，不做寄存器分配与 CSE</a:t>
             </a:r>
           </a:p>
         </p:txBody>
@@ -14122,7 +14122,7 @@
                 </a:solidFill>
                 <a:latin typeface="微软雅黑"/>
               </a:rPr>
-              <a:t>以代码行为为准的十项收口 —— 不新增语言特性，只修真实缺陷</a:t>
+              <a:t>以代码行为为准的收口 —— 不新增语言特性，只修真实缺陷</a:t>
             </a:r>
           </a:p>
         </p:txBody>
@@ -14479,7 +14479,7 @@
                 </a:solidFill>
                 <a:latin typeface="微软雅黑"/>
               </a:rPr>
-              <a:t>4 项</a:t>
+              <a:t>7 项</a:t>
             </a:r>
           </a:p>
         </p:txBody>
@@ -14534,7 +14534,7 @@
                 </a:solidFill>
                 <a:latin typeface="微软雅黑"/>
               </a:rPr>
-              <a:t>2 个错误 + 2 个警告</a:t>
+              <a:t>3 个错误 + 4 个警告</a:t>
             </a:r>
           </a:p>
         </p:txBody>
@@ -14847,7 +14847,7 @@
                 </a:solidFill>
                 <a:latin typeface="微软雅黑"/>
               </a:rPr>
-              <a:t>89 例</a:t>
+              <a:t>93 例</a:t>
             </a:r>
           </a:p>
         </p:txBody>
@@ -15123,7 +15123,7 @@
                 </a:solidFill>
                 <a:latin typeface="微软雅黑"/>
               </a:rPr>
-              <a:t>②  四项静态检查</a:t>
+              <a:t>②  七项静态检查 + 诊断上下文</a:t>
             </a:r>
           </a:p>
         </p:txBody>
@@ -15162,7 +15162,7 @@
                 </a:solidFill>
                 <a:latin typeface="微软雅黑"/>
               </a:rPr>
-              <a:t>数组名不带下标 / 常量下标越界或为负 / 非 void 无 return /</a:t>
+              <a:t>数组名 / 常量下标 / return / 入口 / 实参类型 / 字面量 / char；</a:t>
             </a:r>
           </a:p>
           <a:p>
@@ -15178,7 +15178,7 @@
                 </a:solidFill>
                 <a:latin typeface="微软雅黑"/>
               </a:rPr>
-              <a:t>无入口也无顶层语句。后两项只能是警告，否则 10 个既有用例全崩。</a:t>
+              <a:t>诊断后跟源码行与 ^ 定位符。后四项只能是警告，否则既有用例全崩。</a:t>
             </a:r>
           </a:p>
         </p:txBody>
@@ -15730,7 +15730,7 @@
                 </a:solidFill>
                 <a:latin typeface="微软雅黑"/>
               </a:rPr>
-              <a:t>-O 行为一致性冒烟。已在本机逐步骤复现，待补令牌权限启用。</a:t>
+              <a:t>-O 行为一致性冒烟。已在 dev / main 上启用，首次运行 85 秒全绿。</a:t>
             </a:r>
           </a:p>
         </p:txBody>
@@ -15815,7 +15815,7 @@
                 </a:solidFill>
                 <a:latin typeface="微软雅黑"/>
               </a:rPr>
-              <a:t>唯一不变量：默认编译路径的产物逐字不变 —— 18 个 quad 基线、30 个 codegen 基线、27 个语义基线一字节未改。</a:t>
+              <a:t>唯一不变量：默认编译路径的产物逐字不变 —— 18 个 quad 基线、30 个 codegen 基线、32 个语义基线一字节未改。</a:t>
             </a:r>
           </a:p>
         </p:txBody>
@@ -17296,7 +17296,7 @@
                 </a:solidFill>
                 <a:latin typeface="微软雅黑"/>
               </a:rPr>
-              <a:t>8,919</a:t>
+              <a:t>9,302</a:t>
             </a:r>
           </a:p>
         </p:txBody>
@@ -17664,7 +17664,7 @@
                 </a:solidFill>
                 <a:latin typeface="微软雅黑"/>
               </a:rPr>
-              <a:t>135</a:t>
+              <a:t>140</a:t>
             </a:r>
           </a:p>
         </p:txBody>
@@ -18708,7 +18708,7 @@
                 </a:solidFill>
                 <a:latin typeface="微软雅黑"/>
               </a:rPr>
-              <a:t>本 PPT（18 页）+ docs/项目总结.md（901 行）</a:t>
+              <a:t>本 PPT（18 页）+ docs/项目总结.md（954 行）</a:t>
             </a:r>
           </a:p>
         </p:txBody>
@@ -26792,7 +26792,7 @@
                 </a:solidFill>
                 <a:latin typeface="微软雅黑"/>
               </a:rPr>
-              <a:t>诊断实测：27 例语义回归逐字比对</a:t>
+              <a:t>诊断实测：32 例语义回归逐字比对</a:t>
             </a:r>
           </a:p>
         </p:txBody>

--- a/docs/MiniC编译器_答辩演示.pptx
+++ b/docs/MiniC编译器_答辩演示.pptx
@@ -15537,7 +15537,7 @@
                 </a:solidFill>
                 <a:latin typeface="微软雅黑"/>
               </a:rPr>
-              <a:t>⑤  -O 窥孔优化</a:t>
+              <a:t>⑤  -O 优化：切块 + 块内三项 + 四轮窥孔</a:t>
             </a:r>
           </a:p>
         </p:txBody>
@@ -15576,7 +15576,7 @@
                 </a:solidFill>
                 <a:latin typeface="微软雅黑"/>
               </a:rPr>
-              <a:t>常量条件跳转 / 删不可达 / 删空跳 / 删死临时量与死标号，共四轮。</a:t>
+              <a:t>按标号切基本块，块内做常量传播 / 公共子表达式 / 死存储，再叠四轮窥孔，迭代到不动点。</a:t>
             </a:r>
           </a:p>
           <a:p>
@@ -15592,7 +15592,7 @@
                 </a:solidFill>
                 <a:latin typeface="微软雅黑"/>
               </a:rPr>
-              <a:t>第一版把条件跳转当块结束，删掉 if 真分支 —— 16 个用例输出变了。</a:t>
+              <a:t>全仓 140 个用例从「只删 2 条」变成 removed 54 / rewrote 150。</a:t>
             </a:r>
           </a:p>
         </p:txBody>
@@ -20954,7 +20954,7 @@
                 </a:solidFill>
                 <a:latin typeface="微软雅黑"/>
               </a:rPr>
-              <a:t>与基础版的差异（挑战版）</a:t>
+              <a:t>挑战版语言规格</a:t>
             </a:r>
           </a:p>
         </p:txBody>
@@ -21359,7 +21359,7 @@
                 </a:solidFill>
                 <a:latin typeface="微软雅黑"/>
               </a:rPr>
-              <a:t>基础版只有声明 / 赋值 / 表达式；挑战版新增字符、布尔、数组、函数、</a:t>
+              <a:t>在声明 / 赋值 / 表达式之上，扩展出字符、布尔、一维数组、函数、</a:t>
             </a:r>
           </a:p>
           <a:p>

--- a/docs/MiniC编译器_答辩演示.pptx
+++ b/docs/MiniC编译器_答辩演示.pptx
@@ -3492,7 +3492,7 @@
                 </a:solidFill>
                 <a:latin typeface="微软雅黑"/>
               </a:rPr>
-              <a:t>21 个源文件 9,302 行 C++17  ·  140 个用例  ·  11 套回归全绿  ·  912 例随机差分零不一致</a:t>
+              <a:t>21 个源文件 9,572 行 C++17  ·  140 个用例  ·  11 套回归全绿  ·  1000 例随机差分零不一致</a:t>
             </a:r>
           </a:p>
         </p:txBody>
@@ -7845,7 +7845,7 @@
                 </a:solidFill>
                 <a:latin typeface="微软雅黑"/>
               </a:rPr>
-              <a:t>两组独立基准反查：912 例，零不一致</a:t>
+              <a:t>端到端差分：1000 例随机程序，零不一致</a:t>
             </a:r>
           </a:p>
         </p:txBody>
@@ -7928,7 +7928,7 @@
                 </a:solidFill>
                 <a:latin typeface="微软雅黑"/>
               </a:rPr>
-              <a:t>两组基准，互相补位</a:t>
+              <a:t>基准是另一个编译器，不是自己的期望值</a:t>
             </a:r>
           </a:p>
         </p:txBody>
@@ -8011,7 +8011,7 @@
                 </a:solidFill>
                 <a:latin typeface="微软雅黑"/>
               </a:rPr>
-              <a:t>基准一：gcc</a:t>
+              <a:t>基准：gcc -O0</a:t>
             </a:r>
           </a:p>
         </p:txBody>
@@ -8050,7 +8050,7 @@
                 </a:solidFill>
                 <a:latin typeface="微软雅黑"/>
               </a:rPr>
-              <a:t>同一逻辑写 .mc 与 .c 两份，各走自己的编译器，逐行比对 stdout</a:t>
+              <a:t>同一棵随机程序树渲染成 .mc 与等价 .c，各走自己的编译器，逐行比对 stdout</a:t>
             </a:r>
           </a:p>
         </p:txBody>
@@ -8133,7 +8133,7 @@
                 </a:solidFill>
                 <a:latin typeface="微软雅黑"/>
               </a:rPr>
-              <a:t>基准二：Python 求值器</a:t>
+              <a:t>覆盖面</a:t>
             </a:r>
           </a:p>
         </p:txBody>
@@ -8172,7 +8172,7 @@
                 </a:solidFill>
                 <a:latin typeface="微软雅黑"/>
               </a:rPr>
-              <a:t>随机表达式树深度 4，另写参考求值器，不共享编译器任何代码</a:t>
+              <a:t>赋值 / 算术 / 比较 / if-else / while / 函数调用 / 数组读写 / 全局变量</a:t>
             </a:r>
           </a:p>
         </p:txBody>
@@ -8255,7 +8255,7 @@
                 </a:solidFill>
                 <a:latin typeface="微软雅黑"/>
               </a:rPr>
-              <a:t>为什么两组</a:t>
+              <a:t>可复现</a:t>
             </a:r>
           </a:p>
         </p:txBody>
@@ -8294,7 +8294,7 @@
                 </a:solidFill>
                 <a:latin typeface="微软雅黑"/>
               </a:rPr>
-              <a:t>gcc 覆盖函数/递归/数组；Python 覆盖优先级与类型转换，单组都有盲区</a:t>
+              <a:t>python tools/random_diff.py -n 1000 -s 20261028，退出码 0 即全一致</a:t>
             </a:r>
           </a:p>
         </p:txBody>
@@ -8377,7 +8377,7 @@
                 </a:solidFill>
                 <a:latin typeface="微软雅黑"/>
               </a:rPr>
-              <a:t>除零用例跳过</a:t>
+              <a:t>假不一致怎么排除</a:t>
             </a:r>
           </a:p>
         </p:txBody>
@@ -8416,7 +8416,7 @@
                 </a:solidFill>
                 <a:latin typeface="微软雅黑"/>
               </a:rPr>
-              <a:t>除数求值为 0 的不计入，避免把未定义行为算成缺陷</a:t>
+              <a:t>字面量带 f 后缀保持单精度；所有变量显式初始化，否则比的是栈残留</a:t>
             </a:r>
           </a:p>
         </p:txBody>
@@ -8501,7 +8501,7 @@
                 </a:solidFill>
                 <a:latin typeface="微软雅黑"/>
               </a:rPr>
-              <a:t>480</a:t>
+              <a:t>1000</a:t>
             </a:r>
           </a:p>
         </p:txBody>
@@ -8540,7 +8540,7 @@
                 </a:solidFill>
                 <a:latin typeface="微软雅黑"/>
               </a:rPr>
-              <a:t>例 gcc 基准</a:t>
+              <a:t>例随机程序</a:t>
             </a:r>
           </a:p>
           <a:p>
@@ -8641,7 +8641,7 @@
                 </a:solidFill>
                 <a:latin typeface="微软雅黑"/>
               </a:rPr>
-              <a:t>432</a:t>
+              <a:t>93</a:t>
             </a:r>
           </a:p>
         </p:txBody>
@@ -8680,7 +8680,7 @@
                 </a:solidFill>
                 <a:latin typeface="微软雅黑"/>
               </a:rPr>
-              <a:t>例 Python 基准</a:t>
+              <a:t>例 -O 前后对照</a:t>
             </a:r>
           </a:p>
           <a:p>
@@ -8696,7 +8696,7 @@
                 </a:solidFill>
                 <a:latin typeface="微软雅黑"/>
               </a:rPr>
-              <a:t>207 int + 225 float</a:t>
+              <a:t>stdout + 退出码</a:t>
             </a:r>
           </a:p>
         </p:txBody>
@@ -15537,7 +15537,7 @@
                 </a:solidFill>
                 <a:latin typeface="微软雅黑"/>
               </a:rPr>
-              <a:t>⑤  -O 优化：切块 + 块内三项 + 四轮窥孔</a:t>
+              <a:t>⑤  -O 优化与寄存器分配</a:t>
             </a:r>
           </a:p>
         </p:txBody>
@@ -15576,7 +15576,7 @@
                 </a:solidFill>
                 <a:latin typeface="微软雅黑"/>
               </a:rPr>
-              <a:t>按标号切基本块，块内做常量传播 / 公共子表达式 / 死存储，再叠四轮窥孔，迭代到不动点。</a:t>
+              <a:t>按标号切块做常量传播 / CSE / 死存储 + 四轮窥孔，迭代到不动点；热点局部整型标量固定 %ebx/%esi。</a:t>
             </a:r>
           </a:p>
           <a:p>
@@ -15592,7 +15592,7 @@
                 </a:solidFill>
                 <a:latin typeface="微软雅黑"/>
               </a:rPr>
-              <a:t>全仓 140 个用例从「只删 2 条」变成 removed 54 / rewrote 150。</a:t>
+              <a:t>全仓 removed 54 / rewrote 150；汇编指令 3 010 → 2 652（−11.9%）。</a:t>
             </a:r>
           </a:p>
         </p:txBody>
@@ -17296,7 +17296,7 @@
                 </a:solidFill>
                 <a:latin typeface="微软雅黑"/>
               </a:rPr>
-              <a:t>9,302</a:t>
+              <a:t>9,572</a:t>
             </a:r>
           </a:p>
         </p:txBody>
@@ -17848,7 +17848,7 @@
                 </a:solidFill>
                 <a:latin typeface="微软雅黑"/>
               </a:rPr>
-              <a:t>912</a:t>
+              <a:t>1000</a:t>
             </a:r>
           </a:p>
         </p:txBody>
@@ -17887,7 +17887,7 @@
                 </a:solidFill>
                 <a:latin typeface="微软雅黑"/>
               </a:rPr>
-              <a:t>例差分验证</a:t>
+              <a:t>例随机差分</a:t>
             </a:r>
           </a:p>
           <a:p>
@@ -17903,7 +17903,7 @@
                 </a:solidFill>
                 <a:latin typeface="微软雅黑"/>
               </a:rPr>
-              <a:t>两组独立基准</a:t>
+              <a:t>与 gcc -O0 对照</a:t>
             </a:r>
           </a:p>
         </p:txBody>
@@ -18708,7 +18708,7 @@
                 </a:solidFill>
                 <a:latin typeface="微软雅黑"/>
               </a:rPr>
-              <a:t>本 PPT（18 页）+ docs/项目总结.md（954 行）</a:t>
+              <a:t>本 PPT（18 页）+ docs/项目总结.md（1,047 行）</a:t>
             </a:r>
           </a:p>
         </p:txBody>
@@ -29096,7 +29096,7 @@
                 </a:solidFill>
                 <a:latin typeface="微软雅黑"/>
               </a:rPr>
-              <a:t>把四元式逐条翻成 x86-64，能被 gcc 直接汇编链接</a:t>
+              <a:t>把四元式逐条翻成 x86-64，栈式基线之上做了三层搬运消除</a:t>
             </a:r>
           </a:p>
         </p:txBody>
@@ -29395,7 +29395,7 @@
                 </a:solidFill>
                 <a:latin typeface="微软雅黑"/>
               </a:rPr>
-              <a:t>生成的汇编（tests/test.asm，47 行）</a:t>
+              <a:t>生成的汇编（tests/test.asm，45 行）</a:t>
             </a:r>
           </a:p>
         </p:txBody>
@@ -29700,7 +29700,23 @@
                 </a:solidFill>
                 <a:latin typeface="Consolas"/>
               </a:rPr>
-              <a:t>        leave</a:t>
+              <a:t>        movq  %rbp, %rsp</a:t>
+            </a:r>
+          </a:p>
+          <a:p>
+            <a:pPr>
+              <a:lnSpc>
+                <a:spcPct val="112000"/>
+              </a:lnSpc>
+            </a:pPr>
+            <a:r>
+              <a:rPr sz="950">
+                <a:solidFill>
+                  <a:srgbClr val="2D3A4A"/>
+                </a:solidFill>
+                <a:latin typeface="Consolas"/>
+              </a:rPr>
+              <a:t>        popq  %rbp</a:t>
             </a:r>
           </a:p>
           <a:p>
@@ -29894,7 +29910,7 @@
         </p:nvSpPr>
         <p:spPr>
           <a:xfrm>
-            <a:off x="6263640" y="3721608"/>
+            <a:off x="6263640" y="3685032"/>
             <a:ext cx="100584" cy="100584"/>
           </a:xfrm>
           <a:prstGeom prst="ellipse">
@@ -29938,7 +29954,7 @@
         </p:nvSpPr>
         <p:spPr>
           <a:xfrm>
-            <a:off x="6537959" y="3639312"/>
+            <a:off x="6537959" y="3602736"/>
             <a:ext cx="4846320" cy="365760"/>
           </a:xfrm>
           <a:prstGeom prst="rect">
@@ -29958,13 +29974,13 @@
               </a:lnSpc>
             </a:pPr>
             <a:r>
-              <a:rPr sz="1200" b="1">
+              <a:rPr sz="1100" b="1">
                 <a:solidFill>
                   <a:srgbClr val="1F2937"/>
                 </a:solidFill>
                 <a:latin typeface="微软雅黑"/>
               </a:rPr>
-              <a:t>912 例两组差分</a:t>
+              <a:t>1000 例随机差分</a:t>
             </a:r>
           </a:p>
         </p:txBody>
@@ -29977,7 +29993,7 @@
         </p:nvSpPr>
         <p:spPr>
           <a:xfrm>
-            <a:off x="6537959" y="3863339"/>
+            <a:off x="6537959" y="3826763"/>
             <a:ext cx="4846320" cy="365760"/>
           </a:xfrm>
           <a:prstGeom prst="rect">
@@ -29997,13 +30013,13 @@
               </a:lnSpc>
             </a:pPr>
             <a:r>
-              <a:rPr sz="1000" b="0">
+              <a:rPr sz="900" b="0">
                 <a:solidFill>
                   <a:srgbClr val="64748B"/>
                 </a:solidFill>
                 <a:latin typeface="微软雅黑"/>
               </a:rPr>
-              <a:t>gcc 编译等价 C 版对照 480 例 + Python 独立求值器 432 例，0 不一致</a:t>
+              <a:t>tools/random_diff.py 与 gcc -O0 对照，0 不一致</a:t>
             </a:r>
           </a:p>
         </p:txBody>
@@ -30016,7 +30032,7 @@
         </p:nvSpPr>
         <p:spPr>
           <a:xfrm>
-            <a:off x="6263640" y="4379976"/>
+            <a:off x="6263640" y="4178808"/>
             <a:ext cx="100584" cy="100584"/>
           </a:xfrm>
           <a:prstGeom prst="ellipse">
@@ -30060,7 +30076,7 @@
         </p:nvSpPr>
         <p:spPr>
           <a:xfrm>
-            <a:off x="6537959" y="4297680"/>
+            <a:off x="6537959" y="4096512"/>
             <a:ext cx="4846320" cy="365760"/>
           </a:xfrm>
           <a:prstGeom prst="rect">
@@ -30080,7 +30096,7 @@
               </a:lnSpc>
             </a:pPr>
             <a:r>
-              <a:rPr sz="1200" b="1">
+              <a:rPr sz="1100" b="1">
                 <a:solidFill>
                   <a:srgbClr val="1F2937"/>
                 </a:solidFill>
@@ -30099,7 +30115,7 @@
         </p:nvSpPr>
         <p:spPr>
           <a:xfrm>
-            <a:off x="6537959" y="4521708"/>
+            <a:off x="6537959" y="4320540"/>
             <a:ext cx="4846320" cy="365760"/>
           </a:xfrm>
           <a:prstGeom prst="rect">
@@ -30119,7 +30135,7 @@
               </a:lnSpc>
             </a:pPr>
             <a:r>
-              <a:rPr sz="1000" b="0">
+              <a:rPr sz="900" b="0">
                 <a:solidFill>
                   <a:srgbClr val="64748B"/>
                 </a:solidFill>
@@ -30138,7 +30154,7 @@
         </p:nvSpPr>
         <p:spPr>
           <a:xfrm>
-            <a:off x="6263640" y="5038344"/>
+            <a:off x="6263640" y="4672583"/>
             <a:ext cx="100584" cy="100584"/>
           </a:xfrm>
           <a:prstGeom prst="ellipse">
@@ -30182,7 +30198,7 @@
         </p:nvSpPr>
         <p:spPr>
           <a:xfrm>
-            <a:off x="6537959" y="4956048"/>
+            <a:off x="6537959" y="4590288"/>
             <a:ext cx="4846320" cy="365760"/>
           </a:xfrm>
           <a:prstGeom prst="rect">
@@ -30202,12 +30218,134 @@
               </a:lnSpc>
             </a:pPr>
             <a:r>
-              <a:rPr sz="1200" b="1">
+              <a:rPr sz="1100" b="1">
                 <a:solidFill>
                   <a:srgbClr val="1F2937"/>
                 </a:solidFill>
                 <a:latin typeface="微软雅黑"/>
               </a:rPr>
+              <a:t>指令数 −18.3%</a:t>
+            </a:r>
+          </a:p>
+        </p:txBody>
+      </p:sp>
+      <p:sp>
+        <p:nvSpPr>
+          <p:cNvPr id="25" name="TextBox 24"/>
+          <p:cNvSpPr txBox="1"/>
+          <p:nvPr/>
+        </p:nvSpPr>
+        <p:spPr>
+          <a:xfrm>
+            <a:off x="6537959" y="4814316"/>
+            <a:ext cx="4846320" cy="365760"/>
+          </a:xfrm>
+          <a:prstGeom prst="rect">
+            <a:avLst/>
+          </a:prstGeom>
+          <a:noFill/>
+        </p:spPr>
+        <p:txBody>
+          <a:bodyPr wrap="square" anchor="t" lIns="0" rIns="0" tIns="0" bIns="0">
+            <a:spAutoFit/>
+          </a:bodyPr>
+          <a:lstStyle/>
+          <a:p>
+            <a:pPr algn="l">
+              <a:lnSpc>
+                <a:spcPct val="115000"/>
+              </a:lnSpc>
+            </a:pPr>
+            <a:r>
+              <a:rPr sz="900" b="0">
+                <a:solidFill>
+                  <a:srgbClr val="64748B"/>
+                </a:solidFill>
+                <a:latin typeface="微软雅黑"/>
+              </a:rPr>
+              <a:t>累加器直通 + 立即数直用 + 热点变量进 %ebx/%esi</a:t>
+            </a:r>
+          </a:p>
+        </p:txBody>
+      </p:sp>
+      <p:sp>
+        <p:nvSpPr>
+          <p:cNvPr id="26" name="Oval 25"/>
+          <p:cNvSpPr/>
+          <p:nvPr/>
+        </p:nvSpPr>
+        <p:spPr>
+          <a:xfrm>
+            <a:off x="6263640" y="5166360"/>
+            <a:ext cx="100584" cy="100584"/>
+          </a:xfrm>
+          <a:prstGeom prst="ellipse">
+            <a:avLst/>
+          </a:prstGeom>
+          <a:solidFill>
+            <a:srgbClr val="2E6CE6"/>
+          </a:solidFill>
+          <a:ln>
+            <a:noFill/>
+          </a:ln>
+          <a:effectLst/>
+        </p:spPr>
+        <p:style>
+          <a:lnRef idx="1">
+            <a:schemeClr val="accent1"/>
+          </a:lnRef>
+          <a:fillRef idx="3">
+            <a:schemeClr val="accent1"/>
+          </a:fillRef>
+          <a:effectRef idx="2">
+            <a:schemeClr val="accent1"/>
+          </a:effectRef>
+          <a:fontRef idx="minor">
+            <a:schemeClr val="lt1"/>
+          </a:fontRef>
+        </p:style>
+        <p:txBody>
+          <a:bodyPr rtlCol="0" anchor="ctr"/>
+          <a:lstStyle/>
+          <a:p>
+            <a:pPr algn="ctr"/>
+          </a:p>
+        </p:txBody>
+      </p:sp>
+      <p:sp>
+        <p:nvSpPr>
+          <p:cNvPr id="27" name="TextBox 26"/>
+          <p:cNvSpPr txBox="1"/>
+          <p:nvPr/>
+        </p:nvSpPr>
+        <p:spPr>
+          <a:xfrm>
+            <a:off x="6537959" y="5084064"/>
+            <a:ext cx="4846320" cy="365760"/>
+          </a:xfrm>
+          <a:prstGeom prst="rect">
+            <a:avLst/>
+          </a:prstGeom>
+          <a:noFill/>
+        </p:spPr>
+        <p:txBody>
+          <a:bodyPr wrap="square" anchor="t" lIns="0" rIns="0" tIns="0" bIns="0">
+            <a:spAutoFit/>
+          </a:bodyPr>
+          <a:lstStyle/>
+          <a:p>
+            <a:pPr algn="l">
+              <a:lnSpc>
+                <a:spcPct val="115000"/>
+              </a:lnSpc>
+            </a:pPr>
+            <a:r>
+              <a:rPr sz="1100" b="1">
+                <a:solidFill>
+                  <a:srgbClr val="1F2937"/>
+                </a:solidFill>
+                <a:latin typeface="微软雅黑"/>
+              </a:rPr>
               <a:t>16 字节栈对齐</a:t>
             </a:r>
           </a:p>
@@ -30215,13 +30353,13 @@
       </p:sp>
       <p:sp>
         <p:nvSpPr>
-          <p:cNvPr id="25" name="TextBox 24"/>
-          <p:cNvSpPr txBox="1"/>
-          <p:nvPr/>
-        </p:nvSpPr>
-        <p:spPr>
-          <a:xfrm>
-            <a:off x="6537959" y="5180076"/>
+          <p:cNvPr id="28" name="TextBox 27"/>
+          <p:cNvSpPr txBox="1"/>
+          <p:nvPr/>
+        </p:nvSpPr>
+        <p:spPr>
+          <a:xfrm>
+            <a:off x="6537959" y="5308092"/>
             <a:ext cx="4846320" cy="365760"/>
           </a:xfrm>
           <a:prstGeom prst="rect">
@@ -30241,7 +30379,7 @@
               </a:lnSpc>
             </a:pPr>
             <a:r>
-              <a:rPr sz="1000" b="0">
+              <a:rPr sz="900" b="0">
                 <a:solidFill>
                   <a:srgbClr val="64748B"/>
                 </a:solidFill>
@@ -30254,7 +30392,7 @@
       </p:sp>
       <p:sp>
         <p:nvSpPr>
-          <p:cNvPr id="26" name="Rectangle 25"/>
+          <p:cNvPr id="29" name="Rectangle 28"/>
           <p:cNvSpPr/>
           <p:nvPr/>
         </p:nvSpPr>
@@ -30300,7 +30438,7 @@
       </p:sp>
       <p:sp>
         <p:nvSpPr>
-          <p:cNvPr id="27" name="TextBox 26"/>
+          <p:cNvPr id="30" name="TextBox 29"/>
           <p:cNvSpPr txBox="1"/>
           <p:nvPr/>
         </p:nvSpPr>

--- a/docs/MiniC编译器_答辩演示.pptx
+++ b/docs/MiniC编译器_答辩演示.pptx
@@ -3492,7 +3492,7 @@
                 </a:solidFill>
                 <a:latin typeface="微软雅黑"/>
               </a:rPr>
-              <a:t>21 个源文件 9,572 行 C++17  ·  140 个用例  ·  11 套回归全绿  ·  1000 例随机差分零不一致</a:t>
+              <a:t>21 个源文件 9,882 行 C++17  ·  141 个用例  ·  11 套回归全绿  ·  1000 例随机差分零不一致</a:t>
             </a:r>
           </a:p>
         </p:txBody>
@@ -7503,7 +7503,7 @@
                 </a:solidFill>
                 <a:latin typeface="微软雅黑"/>
               </a:rPr>
-              <a:t>30 例</a:t>
+              <a:t>31 例</a:t>
             </a:r>
           </a:p>
         </p:txBody>
@@ -15592,7 +15592,7 @@
                 </a:solidFill>
                 <a:latin typeface="微软雅黑"/>
               </a:rPr>
-              <a:t>全仓 removed 54 / rewrote 150；汇编指令 3 010 → 2 652（−11.9%）。</a:t>
+              <a:t>全仓 removed 54 / rewrote 150；汇编指令 3 010 → 2 557（−21.2%）；整数比较塌缩 5→2 条、i = i + 1 由 3 条变 1 条。</a:t>
             </a:r>
           </a:p>
         </p:txBody>
@@ -15815,7 +15815,7 @@
                 </a:solidFill>
                 <a:latin typeface="微软雅黑"/>
               </a:rPr>
-              <a:t>唯一不变量：默认编译路径的产物逐字不变 —— 18 个 quad 基线、30 个 codegen 基线、32 个语义基线一字节未改。</a:t>
+              <a:t>唯一不变量：默认编译路径的产物逐字不变 —— 18 个 quad 基线、31 个 codegen 基线、32 个语义基线一字节未改。</a:t>
             </a:r>
           </a:p>
         </p:txBody>
@@ -17296,7 +17296,7 @@
                 </a:solidFill>
                 <a:latin typeface="微软雅黑"/>
               </a:rPr>
-              <a:t>9,572</a:t>
+              <a:t>9,882</a:t>
             </a:r>
           </a:p>
         </p:txBody>
@@ -17664,7 +17664,7 @@
                 </a:solidFill>
                 <a:latin typeface="微软雅黑"/>
               </a:rPr>
-              <a:t>140</a:t>
+              <a:t>141</a:t>
             </a:r>
           </a:p>
         </p:txBody>
@@ -18708,7 +18708,7 @@
                 </a:solidFill>
                 <a:latin typeface="微软雅黑"/>
               </a:rPr>
-              <a:t>本 PPT（18 页）+ docs/项目总结.md（1,047 行）</a:t>
+              <a:t>本 PPT（18 页）+ docs/项目总结.md（1,071 行）</a:t>
             </a:r>
           </a:p>
         </p:txBody>
@@ -30102,7 +30102,7 @@
                 </a:solidFill>
                 <a:latin typeface="微软雅黑"/>
               </a:rPr>
-              <a:t>30 例端到端</a:t>
+              <a:t>31 例端到端</a:t>
             </a:r>
           </a:p>
         </p:txBody>
@@ -30224,7 +30224,7 @@
                 </a:solidFill>
                 <a:latin typeface="微软雅黑"/>
               </a:rPr>
-              <a:t>指令数 −18.3%</a:t>
+              <a:t>指令数 −21.2%</a:t>
             </a:r>
           </a:p>
         </p:txBody>
@@ -30263,7 +30263,7 @@
                 </a:solidFill>
                 <a:latin typeface="微软雅黑"/>
               </a:rPr>
-              <a:t>累加器直通 + 立即数直用 + 热点变量进 %ebx/%esi</a:t>
+              <a:t>三层搬运消除 + 比较塌缩</a:t>
             </a:r>
           </a:p>
         </p:txBody>

--- a/docs/MiniC编译器_答辩演示.pptx
+++ b/docs/MiniC编译器_答辩演示.pptx
@@ -3492,7 +3492,7 @@
                 </a:solidFill>
                 <a:latin typeface="微软雅黑"/>
               </a:rPr>
-              <a:t>21 个源文件 9,882 行 C++17  ·  141 个用例  ·  11 套回归全绿  ·  1000 例随机差分零不一致</a:t>
+              <a:t>21 个源文件 9,954 行 C++17  ·  142 个用例  ·  11 套回归全绿  ·  1000 例随机差分零不一致</a:t>
             </a:r>
           </a:p>
         </p:txBody>
@@ -7503,7 +7503,7 @@
                 </a:solidFill>
                 <a:latin typeface="微软雅黑"/>
               </a:rPr>
-              <a:t>31 例</a:t>
+              <a:t>32 例</a:t>
             </a:r>
           </a:p>
         </p:txBody>
@@ -15576,7 +15576,7 @@
                 </a:solidFill>
                 <a:latin typeface="微软雅黑"/>
               </a:rPr>
-              <a:t>按标号切块做常量传播 / CSE / 死存储 + 四轮窥孔，迭代到不动点；热点局部整型标量固定 %ebx/%esi。</a:t>
+              <a:t>常量传播 / CSE / 死存储 + 四轮窥孔；热点局部固定 %ebx/%esi。</a:t>
             </a:r>
           </a:p>
           <a:p>
@@ -15592,7 +15592,7 @@
                 </a:solidFill>
                 <a:latin typeface="微软雅黑"/>
               </a:rPr>
-              <a:t>全仓 removed 54 / rewrote 150；汇编指令 3 010 → 2 557（−21.2%）；整数比较塌缩 5→2 条、i = i + 1 由 3 条变 1 条。</a:t>
+              <a:t>汇编指令 3 010 → 2 557（−21.2%）；比较塌缩、i++、数组读回。</a:t>
             </a:r>
           </a:p>
         </p:txBody>
@@ -15815,7 +15815,7 @@
                 </a:solidFill>
                 <a:latin typeface="微软雅黑"/>
               </a:rPr>
-              <a:t>唯一不变量：默认编译路径的产物逐字不变 —— 18 个 quad 基线、31 个 codegen 基线、32 个语义基线一字节未改。</a:t>
+              <a:t>唯一不变量：默认编译路径的产物逐字不变 —— 18 个 quad 基线、32 个 codegen 基线、32 个语义基线一字节未改。</a:t>
             </a:r>
           </a:p>
         </p:txBody>
@@ -17296,7 +17296,7 @@
                 </a:solidFill>
                 <a:latin typeface="微软雅黑"/>
               </a:rPr>
-              <a:t>9,882</a:t>
+              <a:t>9,954</a:t>
             </a:r>
           </a:p>
         </p:txBody>
@@ -17664,7 +17664,7 @@
                 </a:solidFill>
                 <a:latin typeface="微软雅黑"/>
               </a:rPr>
-              <a:t>141</a:t>
+              <a:t>142</a:t>
             </a:r>
           </a:p>
         </p:txBody>
@@ -18708,7 +18708,7 @@
                 </a:solidFill>
                 <a:latin typeface="微软雅黑"/>
               </a:rPr>
-              <a:t>本 PPT（18 页）+ docs/项目总结.md（1,071 行）</a:t>
+              <a:t>本 PPT（18 页）+ docs/项目总结.md（1,085 行）</a:t>
             </a:r>
           </a:p>
         </p:txBody>
@@ -29096,7 +29096,7 @@
                 </a:solidFill>
                 <a:latin typeface="微软雅黑"/>
               </a:rPr>
-              <a:t>把四元式逐条翻成 x86-64，栈式基线之上做了三层搬运消除</a:t>
+              <a:t>把四元式逐条翻成 x86-64，栈式基线上削减四层搬运</a:t>
             </a:r>
           </a:p>
         </p:txBody>
@@ -30102,7 +30102,7 @@
                 </a:solidFill>
                 <a:latin typeface="微软雅黑"/>
               </a:rPr>
-              <a:t>31 例端到端</a:t>
+              <a:t>32 例端到端</a:t>
             </a:r>
           </a:p>
         </p:txBody>
@@ -30263,7 +30263,7 @@
                 </a:solidFill>
                 <a:latin typeface="微软雅黑"/>
               </a:rPr>
-              <a:t>三层搬运消除 + 比较塌缩</a:t>
+              <a:t>四层搬运消除 + 比较塌缩 + 数组地址复用</a:t>
             </a:r>
           </a:p>
         </p:txBody>

--- a/docs/MiniC编译器_答辩演示.pptx
+++ b/docs/MiniC编译器_答辩演示.pptx
@@ -3492,7 +3492,7 @@
                 </a:solidFill>
                 <a:latin typeface="微软雅黑"/>
               </a:rPr>
-              <a:t>21 个源文件 9,954 行 C++17  ·  142 个用例  ·  11 套回归全绿  ·  1000 例随机差分零不一致</a:t>
+              <a:t>21 个源文件 10,148 行 C++17  ·  144 个用例  ·  12 套回归全绿  ·  1000 例随机差分零不一致</a:t>
             </a:r>
           </a:p>
         </p:txBody>
@@ -5635,7 +5635,7 @@
                 </a:solidFill>
                 <a:latin typeface="微软雅黑"/>
               </a:rPr>
-              <a:t>11 套回归，一条 build.bat test 全绿</a:t>
+              <a:t>12 套回归，一条 build.bat test 全绿</a:t>
             </a:r>
           </a:p>
         </p:txBody>
@@ -7257,7 +7257,7 @@
                 </a:solidFill>
                 <a:latin typeface="微软雅黑"/>
               </a:rPr>
-              <a:t>四元式</a:t>
+              <a:t>四元式 / 优化</a:t>
             </a:r>
           </a:p>
         </p:txBody>
@@ -7296,7 +7296,7 @@
                 </a:solidFill>
                 <a:latin typeface="微软雅黑"/>
               </a:rPr>
-              <a:t>18 例</a:t>
+              <a:t>18 + 2 例</a:t>
             </a:r>
           </a:p>
         </p:txBody>
@@ -7335,7 +7335,7 @@
                 </a:solidFill>
                 <a:latin typeface="Consolas"/>
               </a:rPr>
-              <a:t>.quad.txt</a:t>
+              <a:t>.quad.txt（含 -O）</a:t>
             </a:r>
           </a:p>
         </p:txBody>
@@ -7627,7 +7627,7 @@
                 </a:solidFill>
                 <a:latin typeface="微软雅黑"/>
               </a:rPr>
-              <a:t>+ 2 套 GUI 冒烟（book-smoke 55 条断言 / sample-smoke 22 条）  →  合计 11 套，ALL TEST SUITES PASSED，exit 0</a:t>
+              <a:t>+ 2 套 GUI 冒烟（book-smoke 55 条断言 / sample-smoke 22 条）  →  合计 12 套，ALL TEST SUITES PASSED，exit 0</a:t>
             </a:r>
           </a:p>
         </p:txBody>
@@ -14847,7 +14847,7 @@
                 </a:solidFill>
                 <a:latin typeface="微软雅黑"/>
               </a:rPr>
-              <a:t>93 例</a:t>
+              <a:t>95 例</a:t>
             </a:r>
           </a:p>
         </p:txBody>
@@ -15576,7 +15576,7 @@
                 </a:solidFill>
                 <a:latin typeface="微软雅黑"/>
               </a:rPr>
-              <a:t>常量传播 / CSE / 死存储 + 四轮窥孔；热点局部固定 %ebx/%esi。</a:t>
+              <a:t>常量传播 / CSE / 死存储 + 窥孔 + 循环不变量外提；热点固定 %ebx/%esi。</a:t>
             </a:r>
           </a:p>
           <a:p>
@@ -17296,7 +17296,7 @@
                 </a:solidFill>
                 <a:latin typeface="微软雅黑"/>
               </a:rPr>
-              <a:t>9,954</a:t>
+              <a:t>10,148</a:t>
             </a:r>
           </a:p>
         </p:txBody>
@@ -17480,7 +17480,7 @@
                 </a:solidFill>
                 <a:latin typeface="微软雅黑"/>
               </a:rPr>
-              <a:t>11</a:t>
+              <a:t>12</a:t>
             </a:r>
           </a:p>
         </p:txBody>
@@ -17664,7 +17664,7 @@
                 </a:solidFill>
                 <a:latin typeface="微软雅黑"/>
               </a:rPr>
-              <a:t>142</a:t>
+              <a:t>144</a:t>
             </a:r>
           </a:p>
         </p:txBody>
@@ -17719,7 +17719,7 @@
                 </a:solidFill>
                 <a:latin typeface="微软雅黑"/>
               </a:rPr>
-              <a:t>6 类黄金基线</a:t>
+              <a:t>7 类黄金基线</a:t>
             </a:r>
           </a:p>
         </p:txBody>
@@ -18386,7 +18386,7 @@
                 </a:solidFill>
                 <a:latin typeface="微软雅黑"/>
               </a:rPr>
-              <a:t>9 套编译阶段回归 + 2 套 GUI 冒烟</a:t>
+              <a:t>10 套编译阶段回归 + 2 套 GUI 冒烟</a:t>
             </a:r>
           </a:p>
         </p:txBody>
@@ -18708,7 +18708,7 @@
                 </a:solidFill>
                 <a:latin typeface="微软雅黑"/>
               </a:rPr>
-              <a:t>本 PPT（18 页）+ docs/项目总结.md（1,085 行）</a:t>
+              <a:t>本 PPT（18 页）+ docs/项目总结.md（1,097 行）</a:t>
             </a:r>
           </a:p>
         </p:txBody>

--- a/docs/MiniC编译器_答辩演示.pptx
+++ b/docs/MiniC编译器_答辩演示.pptx
@@ -3492,7 +3492,7 @@
                 </a:solidFill>
                 <a:latin typeface="微软雅黑"/>
               </a:rPr>
-              <a:t>21 个源文件 10,148 行 C++17  ·  144 个用例  ·  12 套回归全绿  ·  1000 例随机差分零不一致</a:t>
+              <a:t>21 个源文件 10,225 行 C++17  ·  149 个用例  ·  12 套回归全绿  ·  1000 例随机差分零不一致</a:t>
             </a:r>
           </a:p>
         </p:txBody>
@@ -6882,7 +6882,7 @@
                 </a:solidFill>
                 <a:latin typeface="微软雅黑"/>
               </a:rPr>
-              <a:t>2 例</a:t>
+              <a:t>3 例</a:t>
             </a:r>
           </a:p>
         </p:txBody>
@@ -7089,7 +7089,7 @@
                 </a:solidFill>
                 <a:latin typeface="微软雅黑"/>
               </a:rPr>
-              <a:t>32 例</a:t>
+              <a:t>36 例</a:t>
             </a:r>
           </a:p>
         </p:txBody>
@@ -14479,7 +14479,7 @@
                 </a:solidFill>
                 <a:latin typeface="微软雅黑"/>
               </a:rPr>
-              <a:t>7 项</a:t>
+              <a:t>10 项</a:t>
             </a:r>
           </a:p>
         </p:txBody>
@@ -14534,7 +14534,7 @@
                 </a:solidFill>
                 <a:latin typeface="微软雅黑"/>
               </a:rPr>
-              <a:t>3 个错误 + 4 个警告</a:t>
+              <a:t>6 个错误 + 4 个警告</a:t>
             </a:r>
           </a:p>
         </p:txBody>
@@ -14847,7 +14847,7 @@
                 </a:solidFill>
                 <a:latin typeface="微软雅黑"/>
               </a:rPr>
-              <a:t>95 例</a:t>
+              <a:t>97 例</a:t>
             </a:r>
           </a:p>
         </p:txBody>
@@ -15123,7 +15123,7 @@
                 </a:solidFill>
                 <a:latin typeface="微软雅黑"/>
               </a:rPr>
-              <a:t>②  七项静态检查 + 诊断上下文</a:t>
+              <a:t>②  十项静态检查 + 诊断上下文</a:t>
             </a:r>
           </a:p>
         </p:txBody>
@@ -15162,7 +15162,7 @@
                 </a:solidFill>
                 <a:latin typeface="微软雅黑"/>
               </a:rPr>
-              <a:t>数组名 / 常量下标 / return / 入口 / 实参类型 / 字面量 / char；</a:t>
+              <a:t>数组名 / 常量下标 / return / void / 入口 / 实参类型 / 字面量 / char；</a:t>
             </a:r>
           </a:p>
           <a:p>
@@ -15815,7 +15815,7 @@
                 </a:solidFill>
                 <a:latin typeface="微软雅黑"/>
               </a:rPr>
-              <a:t>唯一不变量：默认编译路径的产物逐字不变 —— 18 个 quad 基线、32 个 codegen 基线、32 个语义基线一字节未改。</a:t>
+              <a:t>唯一不变量：默认编译路径的产物逐字不变 —— 18 个 quad 基线、32 个 codegen 基线、36 个语义基线一字节未改。</a:t>
             </a:r>
           </a:p>
         </p:txBody>
@@ -17296,7 +17296,7 @@
                 </a:solidFill>
                 <a:latin typeface="微软雅黑"/>
               </a:rPr>
-              <a:t>10,148</a:t>
+              <a:t>10,225</a:t>
             </a:r>
           </a:p>
         </p:txBody>
@@ -17664,7 +17664,7 @@
                 </a:solidFill>
                 <a:latin typeface="微软雅黑"/>
               </a:rPr>
-              <a:t>144</a:t>
+              <a:t>149</a:t>
             </a:r>
           </a:p>
         </p:txBody>
@@ -18708,7 +18708,7 @@
                 </a:solidFill>
                 <a:latin typeface="微软雅黑"/>
               </a:rPr>
-              <a:t>本 PPT（18 页）+ docs/项目总结.md（1,097 行）</a:t>
+              <a:t>本 PPT（18 页）+ docs/项目总结.md（1,106 行）</a:t>
             </a:r>
           </a:p>
         </p:txBody>
@@ -24845,7 +24845,7 @@
                 </a:solidFill>
                 <a:latin typeface="微软雅黑"/>
               </a:rPr>
-              <a:t>RecBuiltinTypes / RecArrayType</a:t>
+              <a:t>RecTypeIfAbsent / RecArrayType</a:t>
             </a:r>
           </a:p>
           <a:p>
@@ -24861,7 +24861,7 @@
                 </a:solidFill>
                 <a:latin typeface="微软雅黑"/>
               </a:rPr>
-              <a:t>5 个内建 + 数组类型 × 宽度</a:t>
+              <a:t>按需登记 + 数组类型 × 宽度</a:t>
             </a:r>
           </a:p>
         </p:txBody>
@@ -25944,7 +25944,7 @@
                 </a:solidFill>
                 <a:latin typeface="Consolas"/>
               </a:rPr>
-              <a:t>int : INT  size 4    char : CHAR  size 1</a:t>
+              <a:t>int : INT  size 4    char : CHAR  size 1   // 按需</a:t>
             </a:r>
           </a:p>
           <a:p>
@@ -26109,7 +26109,7 @@
                 </a:solidFill>
                 <a:latin typeface="微软雅黑"/>
               </a:rPr>
-              <a:t>都没有调用点。现已接上，标号由 IR 的 LABEL 四元式登记，</a:t>
+              <a:t>都没有调用点。现已接上；Types 节改成按需登记（RecTypeIfAbsent，</a:t>
             </a:r>
           </a:p>
           <a:p>
@@ -26125,7 +26125,7 @@
                 </a:solidFill>
                 <a:latin typeface="微软雅黑"/>
               </a:rPr>
-              <a:t>故 dump 时机必须从语义之后挪到 IR 之后。</a:t>
+              <a:t>用到哪种才列哪种），标号由 IR 的 LABEL 四元式登记，故 dump 时机移到 IR 之后。</a:t>
             </a:r>
           </a:p>
         </p:txBody>
@@ -26792,7 +26792,7 @@
                 </a:solidFill>
                 <a:latin typeface="微软雅黑"/>
               </a:rPr>
-              <a:t>诊断实测：32 例语义回归逐字比对</a:t>
+              <a:t>诊断实测：36 例语义回归逐字比对</a:t>
             </a:r>
           </a:p>
         </p:txBody>

--- a/docs/MiniC编译器_答辩演示.pptx
+++ b/docs/MiniC编译器_答辩演示.pptx
@@ -10040,7 +10040,7 @@
                 </a:solidFill>
                 <a:latin typeface="微软雅黑"/>
               </a:rPr>
-              <a:t>示例库 15 条</a:t>
+              <a:t>示例库 20 条</a:t>
             </a:r>
           </a:p>
         </p:txBody>
@@ -10079,7 +10079,7 @@
                 </a:solidFill>
                 <a:latin typeface="微软雅黑"/>
               </a:rPr>
-              <a:t>分 6 组：基础 / 类型 / 函数 / 数组与控制流 / 综合 / 错误演示</a:t>
+              <a:t>分 6 组，其中错误演示 8 条；每条都实跑比对</a:t>
             </a:r>
           </a:p>
         </p:txBody>
